--- a/Planning docs/Slides/lesson-30-3-teacher-slides.pptx
+++ b/Planning docs/Slides/lesson-30-3-teacher-slides.pptx
@@ -514,7 +514,7 @@
           <a:p>
             <a:r>
               <a:rPr lang="en-US" dirty="0"/>
-              <a:t>Title slide for Week 30 Day 3. The Lion, the Witch and the Wardrobe.</a:t>
+              <a:t>Lesson 30.3. Reading: Reading: Ch. 16–17 + Synthesis.</a:t>
             </a:r>
             <a:endParaRPr lang="en-US" dirty="0"/>
           </a:p>
@@ -602,7 +602,7 @@
           <a:p>
             <a:r>
               <a:rPr lang="en-US" dirty="0"/>
-              <a:t>Review morphology focus. Have students identify the base word and affix in each example.</a:t>
+              <a:t>Break the word into base + word part. Ask what the part adds to the meaning.</a:t>
             </a:r>
             <a:endParaRPr lang="en-US" dirty="0"/>
           </a:p>
@@ -690,7 +690,7 @@
           <a:p>
             <a:r>
               <a:rPr lang="en-US" dirty="0"/>
-              <a:t>Reading focus slide. Use pause-and-think questions during reading. Copywork can be done after reading.</a:t>
+              <a:t>Each word appears in the chapters read this week, in the author’s own sentence.</a:t>
             </a:r>
             <a:endParaRPr lang="en-US" dirty="0"/>
           </a:p>
@@ -778,7 +778,7 @@
           <a:p>
             <a:r>
               <a:rPr lang="en-US" dirty="0"/>
-              <a:t>RWM: Read the mentor sentence. Discuss as a Reader (what happens?), Writer (what craft did the author use?), then Mimic (write your own).</a:t>
+              <a:t>Read the chapters, then return to the pause questions.</a:t>
             </a:r>
             <a:endParaRPr lang="en-US" dirty="0"/>
           </a:p>
@@ -866,7 +866,7 @@
           <a:p>
             <a:r>
               <a:rPr lang="en-US" dirty="0"/>
-              <a:t>Transition to the writing workshop assignment in Canvas.</a:t>
+              <a:t>Writer’s Workshop stage for the week.</a:t>
             </a:r>
             <a:endParaRPr lang="en-US" dirty="0"/>
           </a:p>
@@ -954,7 +954,7 @@
           <a:p>
             <a:r>
               <a:rPr lang="en-US" dirty="0"/>
-              <a:t>Read the prompt aloud once. Give students about 1 minute to read it again silently and think. Remind them: there is no wrong answer — just write what comes to mind. Advance to the writing slide when ready.</a:t>
+              <a:t>Read the prompt aloud. Give students a moment to think before writing.</a:t>
             </a:r>
             <a:endParaRPr lang="en-US" dirty="0"/>
           </a:p>
@@ -1042,7 +1042,7 @@
           <a:p>
             <a:r>
               <a:rPr lang="en-US" dirty="0"/>
-              <a:t>Set a 5-minute timer. Walk the room quietly. If a student stops, gently encourage them: "Keep writing — even one more sentence." The goal is sustained writing, not perfection. Do not interrupt to correct spelling or grammar during this time.</a:t>
+              <a:t>Five minutes of sustained writing. Stamina over polish. Do not correct spelling now.</a:t>
             </a:r>
             <a:endParaRPr lang="en-US" dirty="0"/>
           </a:p>
@@ -1130,7 +1130,7 @@
           <a:p>
             <a:r>
               <a:rPr lang="en-US" dirty="0"/>
-              <a:t>Set a 1-minute timer. Remind students: we are only fixing ONE thing today — Did I explain my reasoning clearly?. They should also do a quick conventions check (capitals, punctuation, spelling). They do NOT need to rewrite — just fix and improve. Revision = improving ideas; Editing = fixing conventions. Keep them separate in your language.</a:t>
+              <a:t>One fix only. Editing is conventions; revision is ideas. Name which one you are asking for.</a:t>
             </a:r>
             <a:endParaRPr lang="en-US" dirty="0"/>
           </a:p>
@@ -1218,7 +1218,7 @@
           <a:p>
             <a:r>
               <a:rPr lang="en-US" dirty="0"/>
-              <a:t>Call on 3-5 students to share. Respond with genuine interest: "I love how you described that" or "That's a really interesting idea." Avoid correcting grammar or spelling during share time — this is about celebrating writing. If time is short, have 2-3 students share in chat instead.</a:t>
+              <a:t>Two or three volunteers. Praise something specific in each.</a:t>
             </a:r>
             <a:endParaRPr lang="en-US" dirty="0"/>
           </a:p>
@@ -1306,7 +1306,7 @@
           <a:p>
             <a:r>
               <a:rPr lang="en-US" dirty="0"/>
-              <a:t>Review the big question and reading lens with students before reading.</a:t>
+              <a:t>Reading lens: Good readers in a fantasy story slow down and pay attention to how the author builds the world . Details of setting, character, and pattern all work together to create meaning.</a:t>
             </a:r>
             <a:endParaRPr lang="en-US" dirty="0"/>
           </a:p>
@@ -1394,7 +1394,8 @@
           <a:p>
             <a:r>
               <a:rPr lang="en-US" dirty="0"/>
-              <a:t>Read the model sentence aloud. Ask students: what do you notice about the punctuation and capitalization?</a:t>
+              <a:t>Model sentence in the lesson: After Narnia, four children queens.
+Tap through each highlighted word in the lesson and name what it does right before moving to the fix-it.</a:t>
             </a:r>
             <a:endParaRPr lang="en-US" dirty="0"/>
           </a:p>
@@ -1482,7 +1483,8 @@
           <a:p>
             <a:r>
               <a:rPr lang="en-US" dirty="0"/>
-              <a:t>Give students 1-2 minutes to fix the sentence. Walk the room and check.</a:t>
+              <a:t>Corrected: Corrected: The children reigned over Narnia for many years, but they never forgot their home and the wardrobe that had brought them there. 
+Look for: Capitalize The at the start; Narnia = proper noun (capital N); comma before but joining two independent clauses; period ends.</a:t>
             </a:r>
             <a:endParaRPr lang="en-US" dirty="0"/>
           </a:p>
@@ -1570,7 +1572,8 @@
           <a:p>
             <a:r>
               <a:rPr lang="en-US" dirty="0"/>
-              <a:t>Reveal the corrected version. Point out each fix: capitalization, punctuation, spelling.</a:t>
+              <a:t>Corrected: Corrected: The children reigned over Narnia for many years, but they never forgot their home and the wardrobe that had brought them there. 
+Look for: Capitalize The at the start; Narnia = proper noun (capital N); comma before but joining two independent clauses; period ends.</a:t>
             </a:r>
             <a:endParaRPr lang="en-US" dirty="0"/>
           </a:p>
@@ -1951,8 +1954,8 @@
         </p:nvSpPr>
         <p:spPr>
           <a:xfrm>
-            <a:off x="457200" y="914400"/>
-            <a:ext cx="8229600" cy="1097280"/>
+            <a:off x="0" y="822960"/>
+            <a:ext cx="9144000" cy="822960"/>
           </a:xfrm>
           <a:prstGeom prst="rect">
             <a:avLst/>
@@ -1968,7 +1971,43 @@
               <a:buNone/>
             </a:pPr>
             <a:r>
-              <a:rPr lang="en-US" sz="4000" b="1" dirty="0">
+              <a:rPr lang="en-US" sz="5200" dirty="0">
+                <a:solidFill>
+                  <a:srgbClr val="000000"/>
+                </a:solidFill>
+              </a:rPr>
+              <a:t>🦁</a:t>
+            </a:r>
+            <a:endParaRPr lang="en-US" sz="5200" dirty="0"/>
+          </a:p>
+        </p:txBody>
+      </p:sp>
+      <p:sp>
+        <p:nvSpPr>
+          <p:cNvPr id="3" name="Text 1"/>
+          <p:cNvSpPr/>
+          <p:nvPr/>
+        </p:nvSpPr>
+        <p:spPr>
+          <a:xfrm>
+            <a:off x="457200" y="1691640"/>
+            <a:ext cx="8229600" cy="566928"/>
+          </a:xfrm>
+          <a:prstGeom prst="rect">
+            <a:avLst/>
+          </a:prstGeom>
+          <a:noFill/>
+          <a:ln/>
+        </p:spPr>
+        <p:txBody>
+          <a:bodyPr wrap="square" lIns="0" tIns="0" rIns="0" bIns="0" rtlCol="0" anchor="ctr"/>
+          <a:lstStyle/>
+          <a:p>
+            <a:pPr algn="ctr" indent="0" marL="0">
+              <a:buNone/>
+            </a:pPr>
+            <a:r>
+              <a:rPr lang="en-US" sz="2600" b="1" dirty="0">
                 <a:solidFill>
                   <a:srgbClr val="FFFFFF"/>
                 </a:solidFill>
@@ -1976,22 +2015,22 @@
                 <a:ea typeface="Calibri" pitchFamily="34" charset="-122"/>
                 <a:cs typeface="Calibri" pitchFamily="34" charset="-120"/>
               </a:rPr>
-              <a:t>🦁  Week 30 · Day 3</a:t>
-            </a:r>
-            <a:endParaRPr lang="en-US" sz="4000" dirty="0"/>
-          </a:p>
-        </p:txBody>
-      </p:sp>
-      <p:sp>
-        <p:nvSpPr>
-          <p:cNvPr id="3" name="Text 1"/>
-          <p:cNvSpPr/>
-          <p:nvPr/>
-        </p:nvSpPr>
-        <p:spPr>
-          <a:xfrm>
-            <a:off x="457200" y="2103120"/>
-            <a:ext cx="8229600" cy="731520"/>
+              <a:t>The Lion, the Witch and the Wardrobe</a:t>
+            </a:r>
+            <a:endParaRPr lang="en-US" sz="2600" dirty="0"/>
+          </a:p>
+        </p:txBody>
+      </p:sp>
+      <p:sp>
+        <p:nvSpPr>
+          <p:cNvPr id="4" name="Text 2"/>
+          <p:cNvSpPr/>
+          <p:nvPr/>
+        </p:nvSpPr>
+        <p:spPr>
+          <a:xfrm>
+            <a:off x="457200" y="2331720"/>
+            <a:ext cx="8229600" cy="411480"/>
           </a:xfrm>
           <a:prstGeom prst="rect">
             <a:avLst/>
@@ -2007,7 +2046,7 @@
               <a:buNone/>
             </a:pPr>
             <a:r>
-              <a:rPr lang="en-US" sz="1800" dirty="0">
+              <a:rPr lang="en-US" sz="2000" dirty="0">
                 <a:solidFill>
                   <a:srgbClr val="4A90D9"/>
                 </a:solidFill>
@@ -2015,22 +2054,22 @@
                 <a:ea typeface="Calibri" pitchFamily="34" charset="-122"/>
                 <a:cs typeface="Calibri" pitchFamily="34" charset="-120"/>
               </a:rPr>
-              <a:t>The Lion, the Witch and the Wardrobe — Lesson 30.3</a:t>
-            </a:r>
-            <a:endParaRPr lang="en-US" sz="1800" dirty="0"/>
-          </a:p>
-        </p:txBody>
-      </p:sp>
-      <p:sp>
-        <p:nvSpPr>
-          <p:cNvPr id="4" name="Text 2"/>
-          <p:cNvSpPr/>
-          <p:nvPr/>
-        </p:nvSpPr>
-        <p:spPr>
-          <a:xfrm>
-            <a:off x="457200" y="4114800"/>
-            <a:ext cx="8229600" cy="457200"/>
+              <a:t>Lesson 30.3  ·  Reading: Ch. 16–17 + Synthesis</a:t>
+            </a:r>
+            <a:endParaRPr lang="en-US" sz="2000" dirty="0"/>
+          </a:p>
+        </p:txBody>
+      </p:sp>
+      <p:sp>
+        <p:nvSpPr>
+          <p:cNvPr id="5" name="Text 3"/>
+          <p:cNvSpPr/>
+          <p:nvPr/>
+        </p:nvSpPr>
+        <p:spPr>
+          <a:xfrm>
+            <a:off x="457200" y="2880360"/>
+            <a:ext cx="8229600" cy="320040"/>
           </a:xfrm>
           <a:prstGeom prst="rect">
             <a:avLst/>
@@ -2046,17 +2085,17 @@
               <a:buNone/>
             </a:pPr>
             <a:r>
-              <a:rPr lang="en-US" sz="1300" dirty="0">
-                <a:solidFill>
-                  <a:srgbClr val="AAAAAA"/>
-                </a:solidFill>
-                <a:latin typeface="Calibri" pitchFamily="34" charset="0"/>
-                <a:ea typeface="Calibri" pitchFamily="34" charset="-122"/>
-                <a:cs typeface="Calibri" pitchFamily="34" charset="-120"/>
-              </a:rPr>
-              <a:t>Optima Academy Online · 3rd Grade ELA</a:t>
-            </a:r>
-            <a:endParaRPr lang="en-US" sz="1300" dirty="0"/>
+              <a:rPr lang="en-US" sz="1400" dirty="0">
+                <a:solidFill>
+                  <a:srgbClr val="C9BCE4"/>
+                </a:solidFill>
+                <a:latin typeface="Calibri" pitchFamily="34" charset="0"/>
+                <a:ea typeface="Calibri" pitchFamily="34" charset="-122"/>
+                <a:cs typeface="Calibri" pitchFamily="34" charset="-120"/>
+              </a:rPr>
+              <a:t>Grade 3 ELA  ·  Virtue: Loyalty</a:t>
+            </a:r>
+            <a:endParaRPr lang="en-US" sz="1400" dirty="0"/>
           </a:p>
         </p:txBody>
       </p:sp>
@@ -2094,65 +2133,62 @@
       </p:grpSpPr>
       <p:sp>
         <p:nvSpPr>
-          <p:cNvPr id="2" name="Text 0"/>
-          <p:cNvSpPr/>
-          <p:nvPr/>
-        </p:nvSpPr>
-        <p:spPr>
-          <a:xfrm>
-            <a:off x="365760" y="164592"/>
-            <a:ext cx="8412480" cy="566928"/>
-          </a:xfrm>
-          <a:prstGeom prst="rect">
-            <a:avLst/>
-          </a:prstGeom>
-          <a:noFill/>
-          <a:ln/>
-        </p:spPr>
-        <p:txBody>
-          <a:bodyPr wrap="square" lIns="0" tIns="0" rIns="0" bIns="0" rtlCol="0" anchor="ctr"/>
-          <a:lstStyle/>
-          <a:p>
-            <a:pPr algn="l" indent="0" marL="0">
-              <a:buNone/>
-            </a:pPr>
-            <a:r>
-              <a:rPr lang="en-US" sz="2800" b="1" dirty="0">
-                <a:solidFill>
-                  <a:srgbClr val="0E1C42"/>
-                </a:solidFill>
-                <a:latin typeface="Calibri" pitchFamily="34" charset="0"/>
-                <a:ea typeface="Calibri" pitchFamily="34" charset="-122"/>
-                <a:cs typeface="Calibri" pitchFamily="34" charset="-120"/>
-              </a:rPr>
-              <a:t>🌱 Morphology: Review roots and bases from the year</a:t>
-            </a:r>
-            <a:endParaRPr lang="en-US" sz="2800" dirty="0"/>
-          </a:p>
-        </p:txBody>
-      </p:sp>
-      <p:sp>
-        <p:nvSpPr>
-          <p:cNvPr id="3" name="Shape 1"/>
-          <p:cNvSpPr/>
-          <p:nvPr/>
-        </p:nvSpPr>
-        <p:spPr>
-          <a:xfrm>
-            <a:off x="365760" y="749808"/>
-            <a:ext cx="8412480" cy="0"/>
-          </a:xfrm>
-          <a:prstGeom prst="line">
-            <a:avLst/>
-          </a:prstGeom>
-          <a:noFill/>
-          <a:ln w="19050">
-            <a:solidFill>
-              <a:srgbClr val="8B6FC0"/>
-            </a:solidFill>
-            <a:prstDash val="solid"/>
-          </a:ln>
-        </p:spPr>
+          <p:cNvPr id="2" name="Shape 0"/>
+          <p:cNvSpPr/>
+          <p:nvPr/>
+        </p:nvSpPr>
+        <p:spPr>
+          <a:xfrm>
+            <a:off x="0" y="0"/>
+            <a:ext cx="9144000" cy="566928"/>
+          </a:xfrm>
+          <a:prstGeom prst="rect">
+            <a:avLst/>
+          </a:prstGeom>
+          <a:solidFill>
+            <a:srgbClr val="4A90D9"/>
+          </a:solidFill>
+          <a:ln/>
+        </p:spPr>
+      </p:sp>
+      <p:sp>
+        <p:nvSpPr>
+          <p:cNvPr id="3" name="Text 1"/>
+          <p:cNvSpPr/>
+          <p:nvPr/>
+        </p:nvSpPr>
+        <p:spPr>
+          <a:xfrm>
+            <a:off x="365760" y="54864"/>
+            <a:ext cx="8412480" cy="457200"/>
+          </a:xfrm>
+          <a:prstGeom prst="rect">
+            <a:avLst/>
+          </a:prstGeom>
+          <a:noFill/>
+          <a:ln/>
+        </p:spPr>
+        <p:txBody>
+          <a:bodyPr wrap="square" lIns="0" tIns="0" rIns="0" bIns="0" rtlCol="0" anchor="ctr"/>
+          <a:lstStyle/>
+          <a:p>
+            <a:pPr indent="0" marL="0">
+              <a:buNone/>
+            </a:pPr>
+            <a:r>
+              <a:rPr lang="en-US" sz="2200" b="1" dirty="0">
+                <a:solidFill>
+                  <a:srgbClr val="FFFFFF"/>
+                </a:solidFill>
+                <a:latin typeface="Calibri" pitchFamily="34" charset="0"/>
+                <a:ea typeface="Calibri" pitchFamily="34" charset="-122"/>
+                <a:cs typeface="Calibri" pitchFamily="34" charset="-120"/>
+              </a:rPr>
+              <a:t>🌱  Morphology</a:t>
+            </a:r>
+            <a:endParaRPr lang="en-US" sz="2200" dirty="0"/>
+          </a:p>
+        </p:txBody>
       </p:sp>
       <p:sp>
         <p:nvSpPr>
@@ -2162,32 +2198,32 @@
         </p:nvSpPr>
         <p:spPr>
           <a:xfrm>
-            <a:off x="457200" y="1005840"/>
-            <a:ext cx="8046720" cy="292608"/>
-          </a:xfrm>
-          <a:prstGeom prst="rect">
-            <a:avLst/>
-          </a:prstGeom>
-          <a:noFill/>
-          <a:ln/>
-        </p:spPr>
-        <p:txBody>
-          <a:bodyPr wrap="square" lIns="0" tIns="0" rIns="0" bIns="0" rtlCol="0" anchor="ctr"/>
-          <a:lstStyle/>
-          <a:p>
-            <a:pPr indent="0" marL="0">
-              <a:buNone/>
-            </a:pPr>
-            <a:r>
-              <a:rPr lang="en-US" sz="1100" b="1" spc="200" kern="0" dirty="0">
-                <a:solidFill>
-                  <a:srgbClr val="64748B"/>
-                </a:solidFill>
-                <a:latin typeface="Calibri" pitchFamily="34" charset="0"/>
-                <a:ea typeface="Calibri" pitchFamily="34" charset="-122"/>
-                <a:cs typeface="Calibri" pitchFamily="34" charset="-120"/>
-              </a:rPr>
-              <a:t>CONCEPT EXAMPLES</a:t>
+            <a:off x="365760" y="804672"/>
+            <a:ext cx="8229600" cy="237744"/>
+          </a:xfrm>
+          <a:prstGeom prst="rect">
+            <a:avLst/>
+          </a:prstGeom>
+          <a:noFill/>
+          <a:ln/>
+        </p:spPr>
+        <p:txBody>
+          <a:bodyPr wrap="square" lIns="0" tIns="0" rIns="0" bIns="0" rtlCol="0" anchor="ctr"/>
+          <a:lstStyle/>
+          <a:p>
+            <a:pPr indent="0" marL="0">
+              <a:buNone/>
+            </a:pPr>
+            <a:r>
+              <a:rPr lang="en-US" sz="1100" b="1" spc="100" kern="0" dirty="0">
+                <a:solidFill>
+                  <a:srgbClr val="8B6FC0"/>
+                </a:solidFill>
+                <a:latin typeface="Calibri" pitchFamily="34" charset="0"/>
+                <a:ea typeface="Calibri" pitchFamily="34" charset="-122"/>
+                <a:cs typeface="Calibri" pitchFamily="34" charset="-120"/>
+              </a:rPr>
+              <a:t>REVIEW ROOTS AND BASES FROM THE YEAR</a:t>
             </a:r>
             <a:endParaRPr lang="en-US" sz="1100" dirty="0"/>
           </a:p>
@@ -2195,30 +2231,59 @@
       </p:sp>
       <p:sp>
         <p:nvSpPr>
-          <p:cNvPr id="5" name="Text 3"/>
-          <p:cNvSpPr/>
-          <p:nvPr/>
-        </p:nvSpPr>
-        <p:spPr>
-          <a:xfrm>
-            <a:off x="640080" y="1325880"/>
-            <a:ext cx="7863840" cy="320040"/>
-          </a:xfrm>
-          <a:prstGeom prst="rect">
-            <a:avLst/>
-          </a:prstGeom>
-          <a:noFill/>
-          <a:ln/>
-        </p:spPr>
-        <p:txBody>
-          <a:bodyPr wrap="square" lIns="0" tIns="0" rIns="0" bIns="0" rtlCol="0" anchor="ctr"/>
-          <a:lstStyle/>
-          <a:p>
-            <a:pPr indent="0" marL="0">
-              <a:buNone/>
-            </a:pPr>
-            <a:r>
-              <a:rPr lang="en-US" sz="1300" dirty="0">
+          <p:cNvPr id="5" name="Shape 3"/>
+          <p:cNvSpPr/>
+          <p:nvPr/>
+        </p:nvSpPr>
+        <p:spPr>
+          <a:xfrm>
+            <a:off x="365760" y="1097280"/>
+            <a:ext cx="8412480" cy="621792"/>
+          </a:xfrm>
+          <a:prstGeom prst="roundRect">
+            <a:avLst>
+              <a:gd name="adj" fmla="val 14706"/>
+            </a:avLst>
+          </a:prstGeom>
+          <a:solidFill>
+            <a:srgbClr val="F0E8FF"/>
+          </a:solidFill>
+          <a:ln/>
+          <a:effectLst>
+            <a:outerShdw sx="100000" sy="100000" kx="0" ky="0" algn="bl" rotWithShape="0" blurRad="101600" dist="38100" dir="2700000">
+              <a:srgbClr val="000000">
+                <a:alpha val="12000"/>
+              </a:srgbClr>
+            </a:outerShdw>
+          </a:effectLst>
+        </p:spPr>
+      </p:sp>
+      <p:sp>
+        <p:nvSpPr>
+          <p:cNvPr id="6" name="Text 4"/>
+          <p:cNvSpPr/>
+          <p:nvPr/>
+        </p:nvSpPr>
+        <p:spPr>
+          <a:xfrm>
+            <a:off x="594360" y="1216152"/>
+            <a:ext cx="7863840" cy="384048"/>
+          </a:xfrm>
+          <a:prstGeom prst="rect">
+            <a:avLst/>
+          </a:prstGeom>
+          <a:noFill/>
+          <a:ln/>
+        </p:spPr>
+        <p:txBody>
+          <a:bodyPr wrap="square" lIns="0" tIns="0" rIns="0" bIns="0" rtlCol="0" anchor="ctr"/>
+          <a:lstStyle/>
+          <a:p>
+            <a:pPr indent="0" marL="0">
+              <a:buNone/>
+            </a:pPr>
+            <a:r>
+              <a:rPr lang="en-US" sz="1500" dirty="0">
                 <a:solidFill>
                   <a:srgbClr val="1E293B"/>
                 </a:solidFill>
@@ -2226,9 +2291,9 @@
                 <a:ea typeface="Calibri" pitchFamily="34" charset="-122"/>
                 <a:cs typeface="Calibri" pitchFamily="34" charset="-120"/>
               </a:rPr>
-              <a:t>• 📌 Apply: Build words using Review</a:t>
-            </a:r>
-            <a:endParaRPr lang="en-US" sz="1300" dirty="0"/>
+              <a:t>🌱  Match each clue to the correct word that uses this week's word part.</a:t>
+            </a:r>
+            <a:endParaRPr lang="en-US" sz="1500" dirty="0"/>
           </a:p>
         </p:txBody>
       </p:sp>
@@ -2266,30 +2331,157 @@
       </p:grpSpPr>
       <p:sp>
         <p:nvSpPr>
-          <p:cNvPr id="2" name="Text 0"/>
-          <p:cNvSpPr/>
-          <p:nvPr/>
-        </p:nvSpPr>
-        <p:spPr>
-          <a:xfrm>
-            <a:off x="365760" y="164592"/>
-            <a:ext cx="8412480" cy="566928"/>
-          </a:xfrm>
-          <a:prstGeom prst="rect">
-            <a:avLst/>
-          </a:prstGeom>
-          <a:noFill/>
-          <a:ln/>
-        </p:spPr>
-        <p:txBody>
-          <a:bodyPr wrap="square" lIns="0" tIns="0" rIns="0" bIns="0" rtlCol="0" anchor="ctr"/>
-          <a:lstStyle/>
-          <a:p>
-            <a:pPr algn="l" indent="0" marL="0">
-              <a:buNone/>
-            </a:pPr>
-            <a:r>
-              <a:rPr lang="en-US" sz="2800" b="1" dirty="0">
+          <p:cNvPr id="2" name="Shape 0"/>
+          <p:cNvSpPr/>
+          <p:nvPr/>
+        </p:nvSpPr>
+        <p:spPr>
+          <a:xfrm>
+            <a:off x="0" y="0"/>
+            <a:ext cx="9144000" cy="566928"/>
+          </a:xfrm>
+          <a:prstGeom prst="rect">
+            <a:avLst/>
+          </a:prstGeom>
+          <a:solidFill>
+            <a:srgbClr val="55C8E8"/>
+          </a:solidFill>
+          <a:ln/>
+        </p:spPr>
+      </p:sp>
+      <p:sp>
+        <p:nvSpPr>
+          <p:cNvPr id="3" name="Text 1"/>
+          <p:cNvSpPr/>
+          <p:nvPr/>
+        </p:nvSpPr>
+        <p:spPr>
+          <a:xfrm>
+            <a:off x="365760" y="54864"/>
+            <a:ext cx="8412480" cy="457200"/>
+          </a:xfrm>
+          <a:prstGeom prst="rect">
+            <a:avLst/>
+          </a:prstGeom>
+          <a:noFill/>
+          <a:ln/>
+        </p:spPr>
+        <p:txBody>
+          <a:bodyPr wrap="square" lIns="0" tIns="0" rIns="0" bIns="0" rtlCol="0" anchor="ctr"/>
+          <a:lstStyle/>
+          <a:p>
+            <a:pPr indent="0" marL="0">
+              <a:buNone/>
+            </a:pPr>
+            <a:r>
+              <a:rPr lang="en-US" sz="2200" b="1" dirty="0">
+                <a:solidFill>
+                  <a:srgbClr val="FFFFFF"/>
+                </a:solidFill>
+                <a:latin typeface="Calibri" pitchFamily="34" charset="0"/>
+                <a:ea typeface="Calibri" pitchFamily="34" charset="-122"/>
+                <a:cs typeface="Calibri" pitchFamily="34" charset="-120"/>
+              </a:rPr>
+              <a:t>🔤  Vocabulary</a:t>
+            </a:r>
+            <a:endParaRPr lang="en-US" sz="2200" dirty="0"/>
+          </a:p>
+        </p:txBody>
+      </p:sp>
+      <p:sp>
+        <p:nvSpPr>
+          <p:cNvPr id="4" name="Text 2"/>
+          <p:cNvSpPr/>
+          <p:nvPr/>
+        </p:nvSpPr>
+        <p:spPr>
+          <a:xfrm>
+            <a:off x="365760" y="804672"/>
+            <a:ext cx="8229600" cy="237744"/>
+          </a:xfrm>
+          <a:prstGeom prst="rect">
+            <a:avLst/>
+          </a:prstGeom>
+          <a:noFill/>
+          <a:ln/>
+        </p:spPr>
+        <p:txBody>
+          <a:bodyPr wrap="square" lIns="0" tIns="0" rIns="0" bIns="0" rtlCol="0" anchor="ctr"/>
+          <a:lstStyle/>
+          <a:p>
+            <a:pPr indent="0" marL="0">
+              <a:buNone/>
+            </a:pPr>
+            <a:r>
+              <a:rPr lang="en-US" sz="1100" b="1" spc="100" kern="0" dirty="0">
+                <a:solidFill>
+                  <a:srgbClr val="55C8E8"/>
+                </a:solidFill>
+                <a:latin typeface="Calibri" pitchFamily="34" charset="0"/>
+                <a:ea typeface="Calibri" pitchFamily="34" charset="-122"/>
+                <a:cs typeface="Calibri" pitchFamily="34" charset="-120"/>
+              </a:rPr>
+              <a:t>USE THE WORDS</a:t>
+            </a:r>
+            <a:endParaRPr lang="en-US" sz="1100" dirty="0"/>
+          </a:p>
+        </p:txBody>
+      </p:sp>
+      <p:sp>
+        <p:nvSpPr>
+          <p:cNvPr id="5" name="Shape 3"/>
+          <p:cNvSpPr/>
+          <p:nvPr/>
+        </p:nvSpPr>
+        <p:spPr>
+          <a:xfrm>
+            <a:off x="365760" y="1097280"/>
+            <a:ext cx="8412480" cy="658368"/>
+          </a:xfrm>
+          <a:prstGeom prst="roundRect">
+            <a:avLst>
+              <a:gd name="adj" fmla="val 13889"/>
+            </a:avLst>
+          </a:prstGeom>
+          <a:solidFill>
+            <a:srgbClr val="E5F7FC"/>
+          </a:solidFill>
+          <a:ln/>
+          <a:effectLst>
+            <a:outerShdw sx="100000" sy="100000" kx="0" ky="0" algn="bl" rotWithShape="0" blurRad="101600" dist="38100" dir="2700000">
+              <a:srgbClr val="000000">
+                <a:alpha val="12000"/>
+              </a:srgbClr>
+            </a:outerShdw>
+          </a:effectLst>
+        </p:spPr>
+      </p:sp>
+      <p:sp>
+        <p:nvSpPr>
+          <p:cNvPr id="6" name="Text 4"/>
+          <p:cNvSpPr/>
+          <p:nvPr/>
+        </p:nvSpPr>
+        <p:spPr>
+          <a:xfrm>
+            <a:off x="594360" y="1225296"/>
+            <a:ext cx="7863840" cy="420624"/>
+          </a:xfrm>
+          <a:prstGeom prst="rect">
+            <a:avLst/>
+          </a:prstGeom>
+          <a:noFill/>
+          <a:ln/>
+        </p:spPr>
+        <p:txBody>
+          <a:bodyPr wrap="square" lIns="0" tIns="0" rIns="0" bIns="0" rtlCol="0" anchor="ctr"/>
+          <a:lstStyle/>
+          <a:p>
+            <a:pPr indent="0" marL="0">
+              <a:buNone/>
+            </a:pPr>
+            <a:r>
+              <a:rPr lang="en-US" sz="1700" b="1" dirty="0">
                 <a:solidFill>
                   <a:srgbClr val="0E1C42"/>
                 </a:solidFill>
@@ -2297,100 +2489,13 @@
                 <a:ea typeface="Calibri" pitchFamily="34" charset="-122"/>
                 <a:cs typeface="Calibri" pitchFamily="34" charset="-120"/>
               </a:rPr>
-              <a:t>Reading: Ch. 16–17 + Synthesis</a:t>
-            </a:r>
-            <a:endParaRPr lang="en-US" sz="2800" dirty="0"/>
-          </a:p>
-        </p:txBody>
-      </p:sp>
-      <p:sp>
-        <p:nvSpPr>
-          <p:cNvPr id="3" name="Shape 1"/>
-          <p:cNvSpPr/>
-          <p:nvPr/>
-        </p:nvSpPr>
-        <p:spPr>
-          <a:xfrm>
-            <a:off x="365760" y="749808"/>
-            <a:ext cx="8412480" cy="0"/>
-          </a:xfrm>
-          <a:prstGeom prst="line">
-            <a:avLst/>
-          </a:prstGeom>
-          <a:noFill/>
-          <a:ln w="19050">
-            <a:solidFill>
-              <a:srgbClr val="55C8E8"/>
-            </a:solidFill>
-            <a:prstDash val="solid"/>
-          </a:ln>
-        </p:spPr>
-      </p:sp>
-      <p:sp>
-        <p:nvSpPr>
-          <p:cNvPr id="4" name="Text 2"/>
-          <p:cNvSpPr/>
-          <p:nvPr/>
-        </p:nvSpPr>
-        <p:spPr>
-          <a:xfrm>
-            <a:off x="457200" y="1005840"/>
-            <a:ext cx="8046720" cy="292608"/>
-          </a:xfrm>
-          <a:prstGeom prst="rect">
-            <a:avLst/>
-          </a:prstGeom>
-          <a:noFill/>
-          <a:ln/>
-        </p:spPr>
-        <p:txBody>
-          <a:bodyPr wrap="square" lIns="0" tIns="0" rIns="0" bIns="0" rtlCol="0" anchor="ctr"/>
-          <a:lstStyle/>
-          <a:p>
-            <a:pPr indent="0" marL="0">
-              <a:buNone/>
-            </a:pPr>
-            <a:r>
-              <a:rPr lang="en-US" sz="1100" b="1" spc="200" kern="0" dirty="0">
-                <a:solidFill>
-                  <a:srgbClr val="55C8E8"/>
-                </a:solidFill>
-                <a:latin typeface="Calibri" pitchFamily="34" charset="0"/>
-                <a:ea typeface="Calibri" pitchFamily="34" charset="-122"/>
-                <a:cs typeface="Calibri" pitchFamily="34" charset="-120"/>
-              </a:rPr>
-              <a:t>PAUSE &amp; THINK</a:t>
-            </a:r>
-            <a:endParaRPr lang="en-US" sz="1100" dirty="0"/>
-          </a:p>
-        </p:txBody>
-      </p:sp>
-      <p:sp>
-        <p:nvSpPr>
-          <p:cNvPr id="5" name="Text 3"/>
-          <p:cNvSpPr/>
-          <p:nvPr/>
-        </p:nvSpPr>
-        <p:spPr>
-          <a:xfrm>
-            <a:off x="640080" y="1325880"/>
-            <a:ext cx="7863840" cy="548640"/>
-          </a:xfrm>
-          <a:prstGeom prst="rect">
-            <a:avLst/>
-          </a:prstGeom>
-          <a:noFill/>
-          <a:ln/>
-        </p:spPr>
-        <p:txBody>
-          <a:bodyPr wrap="square" lIns="0" tIns="0" rIns="0" bIns="0" rtlCol="0" anchor="ctr"/>
-          <a:lstStyle/>
-          <a:p>
-            <a:pPr indent="0" marL="0">
-              <a:buNone/>
-            </a:pPr>
-            <a:r>
-              <a:rPr lang="en-US" sz="1400" i="1" dirty="0">
+              <a:t>sovereign  </a:t>
+            </a:r>
+            <a:pPr indent="0" marL="0">
+              <a:buNone/>
+            </a:pPr>
+            <a:r>
+              <a:rPr lang="en-US" sz="1400" dirty="0">
                 <a:solidFill>
                   <a:srgbClr val="1E293B"/>
                 </a:solidFill>
@@ -2398,38 +2503,81 @@
                 <a:ea typeface="Calibri" pitchFamily="34" charset="-122"/>
                 <a:cs typeface="Calibri" pitchFamily="34" charset="-120"/>
               </a:rPr>
-              <a:t>As you read today, ask yourself: How does understanding the theme help you explain what the novel is really about?</a:t>
-            </a:r>
-            <a:endParaRPr lang="en-US" sz="1400" dirty="0"/>
-          </a:p>
-        </p:txBody>
-      </p:sp>
-      <p:sp>
-        <p:nvSpPr>
-          <p:cNvPr id="6" name="Text 4"/>
-          <p:cNvSpPr/>
-          <p:nvPr/>
-        </p:nvSpPr>
-        <p:spPr>
-          <a:xfrm>
-            <a:off x="640080" y="1965960"/>
-            <a:ext cx="7863840" cy="548640"/>
-          </a:xfrm>
-          <a:prstGeom prst="rect">
-            <a:avLst/>
-          </a:prstGeom>
-          <a:noFill/>
-          <a:ln/>
-        </p:spPr>
-        <p:txBody>
-          <a:bodyPr wrap="square" lIns="0" tIns="0" rIns="0" bIns="0" rtlCol="0" anchor="ctr"/>
-          <a:lstStyle/>
-          <a:p>
-            <a:pPr indent="0" marL="0">
-              <a:buNone/>
-            </a:pPr>
-            <a:r>
-              <a:rPr lang="en-US" sz="1400" i="1" dirty="0">
+              <a:t>After years of rule, the children became wise ______ rulers of Narnia.</a:t>
+            </a:r>
+            <a:endParaRPr lang="en-US" sz="1700" dirty="0"/>
+          </a:p>
+        </p:txBody>
+      </p:sp>
+      <p:sp>
+        <p:nvSpPr>
+          <p:cNvPr id="7" name="Shape 5"/>
+          <p:cNvSpPr/>
+          <p:nvPr/>
+        </p:nvSpPr>
+        <p:spPr>
+          <a:xfrm>
+            <a:off x="365760" y="1828800"/>
+            <a:ext cx="8412480" cy="658368"/>
+          </a:xfrm>
+          <a:prstGeom prst="roundRect">
+            <a:avLst>
+              <a:gd name="adj" fmla="val 13889"/>
+            </a:avLst>
+          </a:prstGeom>
+          <a:solidFill>
+            <a:srgbClr val="FFFFFF"/>
+          </a:solidFill>
+          <a:ln/>
+          <a:effectLst>
+            <a:outerShdw sx="100000" sy="100000" kx="0" ky="0" algn="bl" rotWithShape="0" blurRad="101600" dist="38100" dir="2700000">
+              <a:srgbClr val="000000">
+                <a:alpha val="12000"/>
+              </a:srgbClr>
+            </a:outerShdw>
+          </a:effectLst>
+        </p:spPr>
+      </p:sp>
+      <p:sp>
+        <p:nvSpPr>
+          <p:cNvPr id="8" name="Text 6"/>
+          <p:cNvSpPr/>
+          <p:nvPr/>
+        </p:nvSpPr>
+        <p:spPr>
+          <a:xfrm>
+            <a:off x="594360" y="1956816"/>
+            <a:ext cx="7863840" cy="420624"/>
+          </a:xfrm>
+          <a:prstGeom prst="rect">
+            <a:avLst/>
+          </a:prstGeom>
+          <a:noFill/>
+          <a:ln/>
+        </p:spPr>
+        <p:txBody>
+          <a:bodyPr wrap="square" lIns="0" tIns="0" rIns="0" bIns="0" rtlCol="0" anchor="ctr"/>
+          <a:lstStyle/>
+          <a:p>
+            <a:pPr indent="0" marL="0">
+              <a:buNone/>
+            </a:pPr>
+            <a:r>
+              <a:rPr lang="en-US" sz="1700" b="1" dirty="0">
+                <a:solidFill>
+                  <a:srgbClr val="0E1C42"/>
+                </a:solidFill>
+                <a:latin typeface="Calibri" pitchFamily="34" charset="0"/>
+                <a:ea typeface="Calibri" pitchFamily="34" charset="-122"/>
+                <a:cs typeface="Calibri" pitchFamily="34" charset="-120"/>
+              </a:rPr>
+              <a:t>coronation  </a:t>
+            </a:r>
+            <a:pPr indent="0" marL="0">
+              <a:buNone/>
+            </a:pPr>
+            <a:r>
+              <a:rPr lang="en-US" sz="1400" dirty="0">
                 <a:solidFill>
                   <a:srgbClr val="1E293B"/>
                 </a:solidFill>
@@ -2437,9 +2585,91 @@
                 <a:ea typeface="Calibri" pitchFamily="34" charset="-122"/>
                 <a:cs typeface="Calibri" pitchFamily="34" charset="-120"/>
               </a:rPr>
-              <a:t>Write a 3–5 sentence synthesis paragraph. Include: the title, the theme stated as a complete idea, two pieces of evidence from different chapters, and a closing sentence.</a:t>
-            </a:r>
-            <a:endParaRPr lang="en-US" sz="1400" dirty="0"/>
+              <a:t>The ______ at Cair Paravel was celebrated by every creature in the land.</a:t>
+            </a:r>
+            <a:endParaRPr lang="en-US" sz="1700" dirty="0"/>
+          </a:p>
+        </p:txBody>
+      </p:sp>
+      <p:sp>
+        <p:nvSpPr>
+          <p:cNvPr id="9" name="Shape 7"/>
+          <p:cNvSpPr/>
+          <p:nvPr/>
+        </p:nvSpPr>
+        <p:spPr>
+          <a:xfrm>
+            <a:off x="365760" y="2560320"/>
+            <a:ext cx="8412480" cy="658368"/>
+          </a:xfrm>
+          <a:prstGeom prst="roundRect">
+            <a:avLst>
+              <a:gd name="adj" fmla="val 13889"/>
+            </a:avLst>
+          </a:prstGeom>
+          <a:solidFill>
+            <a:srgbClr val="E5F7FC"/>
+          </a:solidFill>
+          <a:ln/>
+          <a:effectLst>
+            <a:outerShdw sx="100000" sy="100000" kx="0" ky="0" algn="bl" rotWithShape="0" blurRad="101600" dist="38100" dir="2700000">
+              <a:srgbClr val="000000">
+                <a:alpha val="12000"/>
+              </a:srgbClr>
+            </a:outerShdw>
+          </a:effectLst>
+        </p:spPr>
+      </p:sp>
+      <p:sp>
+        <p:nvSpPr>
+          <p:cNvPr id="10" name="Text 8"/>
+          <p:cNvSpPr/>
+          <p:nvPr/>
+        </p:nvSpPr>
+        <p:spPr>
+          <a:xfrm>
+            <a:off x="594360" y="2688336"/>
+            <a:ext cx="7863840" cy="420624"/>
+          </a:xfrm>
+          <a:prstGeom prst="rect">
+            <a:avLst/>
+          </a:prstGeom>
+          <a:noFill/>
+          <a:ln/>
+        </p:spPr>
+        <p:txBody>
+          <a:bodyPr wrap="square" lIns="0" tIns="0" rIns="0" bIns="0" rtlCol="0" anchor="ctr"/>
+          <a:lstStyle/>
+          <a:p>
+            <a:pPr indent="0" marL="0">
+              <a:buNone/>
+            </a:pPr>
+            <a:r>
+              <a:rPr lang="en-US" sz="1700" b="1" dirty="0">
+                <a:solidFill>
+                  <a:srgbClr val="0E1C42"/>
+                </a:solidFill>
+                <a:latin typeface="Calibri" pitchFamily="34" charset="0"/>
+                <a:ea typeface="Calibri" pitchFamily="34" charset="-122"/>
+                <a:cs typeface="Calibri" pitchFamily="34" charset="-120"/>
+              </a:rPr>
+              <a:t>reconciled  </a:t>
+            </a:r>
+            <a:pPr indent="0" marL="0">
+              <a:buNone/>
+            </a:pPr>
+            <a:r>
+              <a:rPr lang="en-US" sz="1400" dirty="0">
+                <a:solidFill>
+                  <a:srgbClr val="1E293B"/>
+                </a:solidFill>
+                <a:latin typeface="Calibri" pitchFamily="34" charset="0"/>
+                <a:ea typeface="Calibri" pitchFamily="34" charset="-122"/>
+                <a:cs typeface="Calibri" pitchFamily="34" charset="-120"/>
+              </a:rPr>
+              <a:t>By the end of the novel, Edmund was fully ______ with his family and with himself.</a:t>
+            </a:r>
+            <a:endParaRPr lang="en-US" sz="1700" dirty="0"/>
           </a:p>
         </p:txBody>
       </p:sp>
@@ -2477,30 +2707,89 @@
       </p:grpSpPr>
       <p:sp>
         <p:nvSpPr>
-          <p:cNvPr id="2" name="Text 0"/>
-          <p:cNvSpPr/>
-          <p:nvPr/>
-        </p:nvSpPr>
-        <p:spPr>
-          <a:xfrm>
-            <a:off x="365760" y="164592"/>
-            <a:ext cx="8412480" cy="566928"/>
-          </a:xfrm>
-          <a:prstGeom prst="rect">
-            <a:avLst/>
-          </a:prstGeom>
-          <a:noFill/>
-          <a:ln/>
-        </p:spPr>
-        <p:txBody>
-          <a:bodyPr wrap="square" lIns="0" tIns="0" rIns="0" bIns="0" rtlCol="0" anchor="ctr"/>
-          <a:lstStyle/>
-          <a:p>
-            <a:pPr algn="l" indent="0" marL="0">
-              <a:buNone/>
-            </a:pPr>
-            <a:r>
-              <a:rPr lang="en-US" sz="2800" b="1" dirty="0">
+          <p:cNvPr id="2" name="Shape 0"/>
+          <p:cNvSpPr/>
+          <p:nvPr/>
+        </p:nvSpPr>
+        <p:spPr>
+          <a:xfrm>
+            <a:off x="0" y="0"/>
+            <a:ext cx="9144000" cy="566928"/>
+          </a:xfrm>
+          <a:prstGeom prst="rect">
+            <a:avLst/>
+          </a:prstGeom>
+          <a:solidFill>
+            <a:srgbClr val="4A90D9"/>
+          </a:solidFill>
+          <a:ln/>
+        </p:spPr>
+      </p:sp>
+      <p:sp>
+        <p:nvSpPr>
+          <p:cNvPr id="3" name="Text 1"/>
+          <p:cNvSpPr/>
+          <p:nvPr/>
+        </p:nvSpPr>
+        <p:spPr>
+          <a:xfrm>
+            <a:off x="365760" y="54864"/>
+            <a:ext cx="8412480" cy="457200"/>
+          </a:xfrm>
+          <a:prstGeom prst="rect">
+            <a:avLst/>
+          </a:prstGeom>
+          <a:noFill/>
+          <a:ln/>
+        </p:spPr>
+        <p:txBody>
+          <a:bodyPr wrap="square" lIns="0" tIns="0" rIns="0" bIns="0" rtlCol="0" anchor="ctr"/>
+          <a:lstStyle/>
+          <a:p>
+            <a:pPr indent="0" marL="0">
+              <a:buNone/>
+            </a:pPr>
+            <a:r>
+              <a:rPr lang="en-US" sz="2200" b="1" dirty="0">
+                <a:solidFill>
+                  <a:srgbClr val="FFFFFF"/>
+                </a:solidFill>
+                <a:latin typeface="Calibri" pitchFamily="34" charset="0"/>
+                <a:ea typeface="Calibri" pitchFamily="34" charset="-122"/>
+                <a:cs typeface="Calibri" pitchFamily="34" charset="-120"/>
+              </a:rPr>
+              <a:t>📕  Read</a:t>
+            </a:r>
+            <a:endParaRPr lang="en-US" sz="2200" dirty="0"/>
+          </a:p>
+        </p:txBody>
+      </p:sp>
+      <p:sp>
+        <p:nvSpPr>
+          <p:cNvPr id="4" name="Text 2"/>
+          <p:cNvSpPr/>
+          <p:nvPr/>
+        </p:nvSpPr>
+        <p:spPr>
+          <a:xfrm>
+            <a:off x="365760" y="868680"/>
+            <a:ext cx="8412480" cy="502920"/>
+          </a:xfrm>
+          <a:prstGeom prst="rect">
+            <a:avLst/>
+          </a:prstGeom>
+          <a:noFill/>
+          <a:ln/>
+        </p:spPr>
+        <p:txBody>
+          <a:bodyPr wrap="square" lIns="0" tIns="0" rIns="0" bIns="0" rtlCol="0" anchor="ctr"/>
+          <a:lstStyle/>
+          <a:p>
+            <a:pPr indent="0" marL="0">
+              <a:buNone/>
+            </a:pPr>
+            <a:r>
+              <a:rPr lang="en-US" sz="2600" b="1" dirty="0">
                 <a:solidFill>
                   <a:srgbClr val="0E1C42"/>
                 </a:solidFill>
@@ -2508,68 +2797,11 @@
                 <a:ea typeface="Calibri" pitchFamily="34" charset="-122"/>
                 <a:cs typeface="Calibri" pitchFamily="34" charset="-120"/>
               </a:rPr>
-              <a:t>📖 Read · Write · Mimic</a:t>
-            </a:r>
-            <a:endParaRPr lang="en-US" sz="2800" dirty="0"/>
-          </a:p>
-        </p:txBody>
-      </p:sp>
-      <p:sp>
-        <p:nvSpPr>
-          <p:cNvPr id="3" name="Shape 1"/>
-          <p:cNvSpPr/>
-          <p:nvPr/>
-        </p:nvSpPr>
-        <p:spPr>
-          <a:xfrm>
-            <a:off x="365760" y="749808"/>
-            <a:ext cx="8412480" cy="0"/>
-          </a:xfrm>
-          <a:prstGeom prst="line">
-            <a:avLst/>
-          </a:prstGeom>
-          <a:noFill/>
-          <a:ln w="19050">
-            <a:solidFill>
-              <a:srgbClr val="C7922C"/>
-            </a:solidFill>
-            <a:prstDash val="solid"/>
-          </a:ln>
-        </p:spPr>
-      </p:sp>
-      <p:sp>
-        <p:nvSpPr>
-          <p:cNvPr id="4" name="Shape 2"/>
-          <p:cNvSpPr/>
-          <p:nvPr/>
-        </p:nvSpPr>
-        <p:spPr>
-          <a:xfrm>
-            <a:off x="457200" y="914400"/>
-            <a:ext cx="8229600" cy="640080"/>
-          </a:xfrm>
-          <a:prstGeom prst="roundRect">
-            <a:avLst>
-              <a:gd name="adj" fmla="val 14286"/>
-            </a:avLst>
-          </a:prstGeom>
-          <a:solidFill>
-            <a:srgbClr val="FEF6E8"/>
-          </a:solidFill>
-          <a:ln w="12700">
-            <a:solidFill>
-              <a:srgbClr val="C7922C"/>
-            </a:solidFill>
-            <a:prstDash val="solid"/>
-          </a:ln>
-          <a:effectLst>
-            <a:outerShdw sx="100000" sy="100000" kx="0" ky="0" algn="bl" rotWithShape="0" blurRad="101600" dist="38100" dir="2700000">
-              <a:srgbClr val="000000">
-                <a:alpha val="12000"/>
-              </a:srgbClr>
-            </a:outerShdw>
-          </a:effectLst>
-        </p:spPr>
+              <a:t>Reading: Ch. 16–17 + Synthesis</a:t>
+            </a:r>
+            <a:endParaRPr lang="en-US" sz="2600" dirty="0"/>
+          </a:p>
+        </p:txBody>
       </p:sp>
       <p:sp>
         <p:nvSpPr>
@@ -2579,24 +2811,63 @@
         </p:nvSpPr>
         <p:spPr>
           <a:xfrm>
-            <a:off x="640080" y="1024128"/>
-            <a:ext cx="7863840" cy="411480"/>
-          </a:xfrm>
-          <a:prstGeom prst="rect">
-            <a:avLst/>
-          </a:prstGeom>
-          <a:noFill/>
-          <a:ln/>
-        </p:spPr>
-        <p:txBody>
-          <a:bodyPr wrap="square" lIns="0" tIns="0" rIns="0" bIns="0" rtlCol="0" anchor="ctr"/>
-          <a:lstStyle/>
-          <a:p>
-            <a:pPr indent="0" marL="0">
-              <a:buNone/>
-            </a:pPr>
-            <a:r>
-              <a:rPr lang="en-US" sz="1800" i="1" dirty="0">
+            <a:off x="365760" y="1463040"/>
+            <a:ext cx="8229600" cy="237744"/>
+          </a:xfrm>
+          <a:prstGeom prst="rect">
+            <a:avLst/>
+          </a:prstGeom>
+          <a:noFill/>
+          <a:ln/>
+        </p:spPr>
+        <p:txBody>
+          <a:bodyPr wrap="square" lIns="0" tIns="0" rIns="0" bIns="0" rtlCol="0" anchor="ctr"/>
+          <a:lstStyle/>
+          <a:p>
+            <a:pPr indent="0" marL="0">
+              <a:buNone/>
+            </a:pPr>
+            <a:r>
+              <a:rPr lang="en-US" sz="1100" b="1" spc="100" kern="0" dirty="0">
+                <a:solidFill>
+                  <a:srgbClr val="C7922C"/>
+                </a:solidFill>
+                <a:latin typeface="Calibri" pitchFamily="34" charset="0"/>
+                <a:ea typeface="Calibri" pitchFamily="34" charset="-122"/>
+                <a:cs typeface="Calibri" pitchFamily="34" charset="-120"/>
+              </a:rPr>
+              <a:t>PAUSE &amp; THINK</a:t>
+            </a:r>
+            <a:endParaRPr lang="en-US" sz="1100" dirty="0"/>
+          </a:p>
+        </p:txBody>
+      </p:sp>
+      <p:sp>
+        <p:nvSpPr>
+          <p:cNvPr id="6" name="Text 4"/>
+          <p:cNvSpPr/>
+          <p:nvPr/>
+        </p:nvSpPr>
+        <p:spPr>
+          <a:xfrm>
+            <a:off x="365760" y="1719072"/>
+            <a:ext cx="8412480" cy="914400"/>
+          </a:xfrm>
+          <a:prstGeom prst="rect">
+            <a:avLst/>
+          </a:prstGeom>
+          <a:noFill/>
+          <a:ln/>
+        </p:spPr>
+        <p:txBody>
+          <a:bodyPr wrap="square" lIns="0" tIns="0" rIns="0" bIns="0" rtlCol="0" anchor="ctr"/>
+          <a:lstStyle/>
+          <a:p>
+            <a:pPr indent="0" marL="0">
+              <a:buNone/>
+            </a:pPr>
+            <a:r>
+              <a:rPr lang="en-US" sz="1500" dirty="0">
                 <a:solidFill>
                   <a:srgbClr val="1E293B"/>
                 </a:solidFill>
@@ -2604,126 +2875,16 @@
                 <a:ea typeface="Calibri" pitchFamily="34" charset="-122"/>
                 <a:cs typeface="Calibri" pitchFamily="34" charset="-120"/>
               </a:rPr>
-              <a:t>“Once a king or queen in Narnia, always a king or queen in Narnia.”</a:t>
-            </a:r>
-            <a:endParaRPr lang="en-US" sz="1800" dirty="0"/>
-          </a:p>
-        </p:txBody>
-      </p:sp>
-      <p:sp>
-        <p:nvSpPr>
-          <p:cNvPr id="6" name="Text 4"/>
-          <p:cNvSpPr/>
-          <p:nvPr/>
-        </p:nvSpPr>
-        <p:spPr>
-          <a:xfrm>
-            <a:off x="640080" y="1645920"/>
-            <a:ext cx="7863840" cy="320040"/>
-          </a:xfrm>
-          <a:prstGeom prst="rect">
-            <a:avLst/>
-          </a:prstGeom>
-          <a:noFill/>
-          <a:ln/>
-        </p:spPr>
-        <p:txBody>
-          <a:bodyPr wrap="square" lIns="0" tIns="0" rIns="0" bIns="0" rtlCol="0" anchor="ctr"/>
-          <a:lstStyle/>
-          <a:p>
-            <a:pPr indent="0" marL="0">
-              <a:buNone/>
-            </a:pPr>
-            <a:r>
-              <a:rPr lang="en-US" sz="1300" i="1" dirty="0">
-                <a:solidFill>
-                  <a:srgbClr val="8B6FC0"/>
-                </a:solidFill>
-                <a:latin typeface="Calibri" pitchFamily="34" charset="0"/>
-                <a:ea typeface="Calibri" pitchFamily="34" charset="-122"/>
-                <a:cs typeface="Calibri" pitchFamily="34" charset="-120"/>
-              </a:rPr>
-              <a:t>📌 Craft focus: repetition with balance — rhythm that sounds like a law</a:t>
-            </a:r>
-            <a:endParaRPr lang="en-US" sz="1300" dirty="0"/>
-          </a:p>
-        </p:txBody>
-      </p:sp>
-      <p:sp>
-        <p:nvSpPr>
-          <p:cNvPr id="7" name="Shape 5"/>
-          <p:cNvSpPr/>
-          <p:nvPr/>
-        </p:nvSpPr>
-        <p:spPr>
-          <a:xfrm>
-            <a:off x="457200" y="2057400"/>
-            <a:ext cx="8229600" cy="594360"/>
-          </a:xfrm>
-          <a:prstGeom prst="roundRect">
-            <a:avLst>
-              <a:gd name="adj" fmla="val 15385"/>
-            </a:avLst>
-          </a:prstGeom>
-          <a:solidFill>
-            <a:srgbClr val="E5F7FC"/>
-          </a:solidFill>
-          <a:ln/>
-          <a:effectLst>
-            <a:outerShdw sx="100000" sy="100000" kx="0" ky="0" algn="bl" rotWithShape="0" blurRad="101600" dist="38100" dir="2700000">
-              <a:srgbClr val="000000">
-                <a:alpha val="12000"/>
-              </a:srgbClr>
-            </a:outerShdw>
-          </a:effectLst>
-        </p:spPr>
-      </p:sp>
-      <p:sp>
-        <p:nvSpPr>
-          <p:cNvPr id="8" name="Text 6"/>
-          <p:cNvSpPr/>
-          <p:nvPr/>
-        </p:nvSpPr>
-        <p:spPr>
-          <a:xfrm>
-            <a:off x="640080" y="2103120"/>
-            <a:ext cx="7863840" cy="502920"/>
-          </a:xfrm>
-          <a:prstGeom prst="rect">
-            <a:avLst/>
-          </a:prstGeom>
-          <a:noFill/>
-          <a:ln/>
-        </p:spPr>
-        <p:txBody>
-          <a:bodyPr wrap="square" lIns="0" tIns="0" rIns="0" bIns="0" rtlCol="0" anchor="t"/>
-          <a:lstStyle/>
-          <a:p>
-            <a:pPr indent="0" marL="0">
-              <a:buNone/>
-            </a:pPr>
-            <a:r>
-              <a:rPr lang="en-US" sz="1400" b="1" dirty="0">
-                <a:solidFill>
-                  <a:srgbClr val="0E1C42"/>
-                </a:solidFill>
-                <a:latin typeface="Calibri" pitchFamily="34" charset="0"/>
-                <a:ea typeface="Calibri" pitchFamily="34" charset="-122"/>
-                <a:cs typeface="Calibri" pitchFamily="34" charset="-120"/>
-              </a:rPr>
-              <a:t>📖 📖 Read like a Reader</a:t>
-            </a:r>
-            <a:pPr indent="0" marL="0">
-              <a:buNone/>
-            </a:pPr>
-            <a:endParaRPr lang="en-US" sz="1400" dirty="0"/>
-          </a:p>
-          <a:p>
-            <a:pPr indent="0" marL="0">
-              <a:buNone/>
-            </a:pPr>
-            <a:r>
-              <a:rPr lang="en-US" sz="1200" dirty="0">
+              <a:t>•  Explain how the ending reveals theme.</a:t>
+            </a:r>
+            <a:endParaRPr lang="en-US" sz="1500" dirty="0"/>
+          </a:p>
+          <a:p>
+            <a:pPr indent="0" marL="0">
+              <a:buNone/>
+            </a:pPr>
+            <a:r>
+              <a:rPr lang="en-US" sz="1500" dirty="0">
                 <a:solidFill>
                   <a:srgbClr val="1E293B"/>
                 </a:solidFill>
@@ -2731,87 +2892,16 @@
                 <a:ea typeface="Calibri" pitchFamily="34" charset="-122"/>
                 <a:cs typeface="Calibri" pitchFamily="34" charset="-120"/>
               </a:rPr>
-              <a:t>Lewis gives Narnia a rule that feels permanent. At the very end of the book, the children return to being children again. Does this sentence still hold true after that? What does it mean for something to be "always" true?</a:t>
-            </a:r>
-            <a:endParaRPr lang="en-US" sz="1400" dirty="0"/>
-          </a:p>
-        </p:txBody>
-      </p:sp>
-      <p:sp>
-        <p:nvSpPr>
-          <p:cNvPr id="9" name="Shape 7"/>
-          <p:cNvSpPr/>
-          <p:nvPr/>
-        </p:nvSpPr>
-        <p:spPr>
-          <a:xfrm>
-            <a:off x="457200" y="2715768"/>
-            <a:ext cx="8229600" cy="594360"/>
-          </a:xfrm>
-          <a:prstGeom prst="roundRect">
-            <a:avLst>
-              <a:gd name="adj" fmla="val 15385"/>
-            </a:avLst>
-          </a:prstGeom>
-          <a:solidFill>
-            <a:srgbClr val="F0E8FF"/>
-          </a:solidFill>
-          <a:ln/>
-          <a:effectLst>
-            <a:outerShdw sx="100000" sy="100000" kx="0" ky="0" algn="bl" rotWithShape="0" blurRad="101600" dist="38100" dir="2700000">
-              <a:srgbClr val="000000">
-                <a:alpha val="12000"/>
-              </a:srgbClr>
-            </a:outerShdw>
-          </a:effectLst>
-        </p:spPr>
-      </p:sp>
-      <p:sp>
-        <p:nvSpPr>
-          <p:cNvPr id="10" name="Text 8"/>
-          <p:cNvSpPr/>
-          <p:nvPr/>
-        </p:nvSpPr>
-        <p:spPr>
-          <a:xfrm>
-            <a:off x="640080" y="2761488"/>
-            <a:ext cx="7863840" cy="502920"/>
-          </a:xfrm>
-          <a:prstGeom prst="rect">
-            <a:avLst/>
-          </a:prstGeom>
-          <a:noFill/>
-          <a:ln/>
-        </p:spPr>
-        <p:txBody>
-          <a:bodyPr wrap="square" lIns="0" tIns="0" rIns="0" bIns="0" rtlCol="0" anchor="t"/>
-          <a:lstStyle/>
-          <a:p>
-            <a:pPr indent="0" marL="0">
-              <a:buNone/>
-            </a:pPr>
-            <a:r>
-              <a:rPr lang="en-US" sz="1400" b="1" dirty="0">
-                <a:solidFill>
-                  <a:srgbClr val="0E1C42"/>
-                </a:solidFill>
-                <a:latin typeface="Calibri" pitchFamily="34" charset="0"/>
-                <a:ea typeface="Calibri" pitchFamily="34" charset="-122"/>
-                <a:cs typeface="Calibri" pitchFamily="34" charset="-120"/>
-              </a:rPr>
-              <a:t>✏️ ✏️ Read like a Writer</a:t>
-            </a:r>
-            <a:pPr indent="0" marL="0">
-              <a:buNone/>
-            </a:pPr>
-            <a:endParaRPr lang="en-US" sz="1400" dirty="0"/>
-          </a:p>
-          <a:p>
-            <a:pPr indent="0" marL="0">
-              <a:buNone/>
-            </a:pPr>
-            <a:r>
-              <a:rPr lang="en-US" sz="1200" dirty="0">
+              <a:t>•  As you read today, ask yourself: How does understanding the theme help you explain what the novel is really about?</a:t>
+            </a:r>
+            <a:endParaRPr lang="en-US" sz="1500" dirty="0"/>
+          </a:p>
+          <a:p>
+            <a:pPr indent="0" marL="0">
+              <a:buNone/>
+            </a:pPr>
+            <a:r>
+              <a:rPr lang="en-US" sz="1500" dirty="0">
                 <a:solidFill>
                   <a:srgbClr val="1E293B"/>
                 </a:solidFill>
@@ -2819,97 +2909,9 @@
                 <a:ea typeface="Calibri" pitchFamily="34" charset="-122"/>
                 <a:cs typeface="Calibri" pitchFamily="34" charset="-120"/>
               </a:rPr>
-              <a:t>This sentence repeats the exact same phrase twice —  "a king or queen in Narnia"  — with only  "Once"  and  "always"  changed. That repetition creates rhythm, almost like a chant. Try writing a sentence that follows this exact same pattern about something in your own life.</a:t>
-            </a:r>
-            <a:endParaRPr lang="en-US" sz="1400" dirty="0"/>
-          </a:p>
-        </p:txBody>
-      </p:sp>
-      <p:sp>
-        <p:nvSpPr>
-          <p:cNvPr id="11" name="Shape 9"/>
-          <p:cNvSpPr/>
-          <p:nvPr/>
-        </p:nvSpPr>
-        <p:spPr>
-          <a:xfrm>
-            <a:off x="457200" y="3374136"/>
-            <a:ext cx="8229600" cy="594360"/>
-          </a:xfrm>
-          <a:prstGeom prst="roundRect">
-            <a:avLst>
-              <a:gd name="adj" fmla="val 15385"/>
-            </a:avLst>
-          </a:prstGeom>
-          <a:solidFill>
-            <a:srgbClr val="E8F8EF"/>
-          </a:solidFill>
-          <a:ln/>
-          <a:effectLst>
-            <a:outerShdw sx="100000" sy="100000" kx="0" ky="0" algn="bl" rotWithShape="0" blurRad="101600" dist="38100" dir="2700000">
-              <a:srgbClr val="000000">
-                <a:alpha val="12000"/>
-              </a:srgbClr>
-            </a:outerShdw>
-          </a:effectLst>
-        </p:spPr>
-      </p:sp>
-      <p:sp>
-        <p:nvSpPr>
-          <p:cNvPr id="12" name="Text 10"/>
-          <p:cNvSpPr/>
-          <p:nvPr/>
-        </p:nvSpPr>
-        <p:spPr>
-          <a:xfrm>
-            <a:off x="640080" y="3419856"/>
-            <a:ext cx="7863840" cy="502920"/>
-          </a:xfrm>
-          <a:prstGeom prst="rect">
-            <a:avLst/>
-          </a:prstGeom>
-          <a:noFill/>
-          <a:ln/>
-        </p:spPr>
-        <p:txBody>
-          <a:bodyPr wrap="square" lIns="0" tIns="0" rIns="0" bIns="0" rtlCol="0" anchor="t"/>
-          <a:lstStyle/>
-          <a:p>
-            <a:pPr indent="0" marL="0">
-              <a:buNone/>
-            </a:pPr>
-            <a:r>
-              <a:rPr lang="en-US" sz="1400" b="1" dirty="0">
-                <a:solidFill>
-                  <a:srgbClr val="0E1C42"/>
-                </a:solidFill>
-                <a:latin typeface="Calibri" pitchFamily="34" charset="0"/>
-                <a:ea typeface="Calibri" pitchFamily="34" charset="-122"/>
-                <a:cs typeface="Calibri" pitchFamily="34" charset="-120"/>
-              </a:rPr>
-              <a:t>🖊️ 🖊️ Mimic</a:t>
-            </a:r>
-            <a:pPr indent="0" marL="0">
-              <a:buNone/>
-            </a:pPr>
-            <a:endParaRPr lang="en-US" sz="1400" dirty="0"/>
-          </a:p>
-          <a:p>
-            <a:pPr indent="0" marL="0">
-              <a:buNone/>
-            </a:pPr>
-            <a:r>
-              <a:rPr lang="en-US" sz="1200" dirty="0">
-                <a:solidFill>
-                  <a:srgbClr val="1E293B"/>
-                </a:solidFill>
-                <a:latin typeface="Calibri" pitchFamily="34" charset="0"/>
-                <a:ea typeface="Calibri" pitchFamily="34" charset="-122"/>
-                <a:cs typeface="Calibri" pitchFamily="34" charset="-120"/>
-              </a:rPr>
-              <a:t>Write your own sentence using the same pattern as the author.</a:t>
-            </a:r>
-            <a:endParaRPr lang="en-US" sz="1400" dirty="0"/>
+              <a:t>•  Write a 3–5 sentence synthesis paragraph. Include: the title, the theme stated as a complete idea, two pieces of evidence from different chapters, and a closing sentence.</a:t>
+            </a:r>
+            <a:endParaRPr lang="en-US" sz="1500" dirty="0"/>
           </a:p>
         </p:txBody>
       </p:sp>
@@ -2947,30 +2949,128 @@
       </p:grpSpPr>
       <p:sp>
         <p:nvSpPr>
-          <p:cNvPr id="2" name="Text 0"/>
-          <p:cNvSpPr/>
-          <p:nvPr/>
-        </p:nvSpPr>
-        <p:spPr>
-          <a:xfrm>
-            <a:off x="365760" y="164592"/>
-            <a:ext cx="8412480" cy="566928"/>
-          </a:xfrm>
-          <a:prstGeom prst="rect">
-            <a:avLst/>
-          </a:prstGeom>
-          <a:noFill/>
-          <a:ln/>
-        </p:spPr>
-        <p:txBody>
-          <a:bodyPr wrap="square" lIns="0" tIns="0" rIns="0" bIns="0" rtlCol="0" anchor="ctr"/>
-          <a:lstStyle/>
-          <a:p>
-            <a:pPr algn="l" indent="0" marL="0">
-              <a:buNone/>
-            </a:pPr>
-            <a:r>
-              <a:rPr lang="en-US" sz="2800" b="1" dirty="0">
+          <p:cNvPr id="2" name="Shape 0"/>
+          <p:cNvSpPr/>
+          <p:nvPr/>
+        </p:nvSpPr>
+        <p:spPr>
+          <a:xfrm>
+            <a:off x="0" y="0"/>
+            <a:ext cx="9144000" cy="566928"/>
+          </a:xfrm>
+          <a:prstGeom prst="rect">
+            <a:avLst/>
+          </a:prstGeom>
+          <a:solidFill>
+            <a:srgbClr val="34B76F"/>
+          </a:solidFill>
+          <a:ln/>
+        </p:spPr>
+      </p:sp>
+      <p:sp>
+        <p:nvSpPr>
+          <p:cNvPr id="3" name="Text 1"/>
+          <p:cNvSpPr/>
+          <p:nvPr/>
+        </p:nvSpPr>
+        <p:spPr>
+          <a:xfrm>
+            <a:off x="365760" y="54864"/>
+            <a:ext cx="8412480" cy="457200"/>
+          </a:xfrm>
+          <a:prstGeom prst="rect">
+            <a:avLst/>
+          </a:prstGeom>
+          <a:noFill/>
+          <a:ln/>
+        </p:spPr>
+        <p:txBody>
+          <a:bodyPr wrap="square" lIns="0" tIns="0" rIns="0" bIns="0" rtlCol="0" anchor="ctr"/>
+          <a:lstStyle/>
+          <a:p>
+            <a:pPr indent="0" marL="0">
+              <a:buNone/>
+            </a:pPr>
+            <a:r>
+              <a:rPr lang="en-US" sz="2200" b="1" dirty="0">
+                <a:solidFill>
+                  <a:srgbClr val="FFFFFF"/>
+                </a:solidFill>
+                <a:latin typeface="Calibri" pitchFamily="34" charset="0"/>
+                <a:ea typeface="Calibri" pitchFamily="34" charset="-122"/>
+                <a:cs typeface="Calibri" pitchFamily="34" charset="-120"/>
+              </a:rPr>
+              <a:t>🪶  Writer’s Workshop</a:t>
+            </a:r>
+            <a:endParaRPr lang="en-US" sz="2200" dirty="0"/>
+          </a:p>
+        </p:txBody>
+      </p:sp>
+      <p:sp>
+        <p:nvSpPr>
+          <p:cNvPr id="4" name="Text 2"/>
+          <p:cNvSpPr/>
+          <p:nvPr/>
+        </p:nvSpPr>
+        <p:spPr>
+          <a:xfrm>
+            <a:off x="365760" y="822960"/>
+            <a:ext cx="8229600" cy="237744"/>
+          </a:xfrm>
+          <a:prstGeom prst="rect">
+            <a:avLst/>
+          </a:prstGeom>
+          <a:noFill/>
+          <a:ln/>
+        </p:spPr>
+        <p:txBody>
+          <a:bodyPr wrap="square" lIns="0" tIns="0" rIns="0" bIns="0" rtlCol="0" anchor="ctr"/>
+          <a:lstStyle/>
+          <a:p>
+            <a:pPr indent="0" marL="0">
+              <a:buNone/>
+            </a:pPr>
+            <a:r>
+              <a:rPr lang="en-US" sz="1100" b="1" spc="100" kern="0" dirty="0">
+                <a:solidFill>
+                  <a:srgbClr val="34B76F"/>
+                </a:solidFill>
+                <a:latin typeface="Calibri" pitchFamily="34" charset="0"/>
+                <a:ea typeface="Calibri" pitchFamily="34" charset="-122"/>
+                <a:cs typeface="Calibri" pitchFamily="34" charset="-120"/>
+              </a:rPr>
+              <a:t>THIS WEEK’S STAGE</a:t>
+            </a:r>
+            <a:endParaRPr lang="en-US" sz="1100" dirty="0"/>
+          </a:p>
+        </p:txBody>
+      </p:sp>
+      <p:sp>
+        <p:nvSpPr>
+          <p:cNvPr id="5" name="Text 3"/>
+          <p:cNvSpPr/>
+          <p:nvPr/>
+        </p:nvSpPr>
+        <p:spPr>
+          <a:xfrm>
+            <a:off x="365760" y="1078992"/>
+            <a:ext cx="8412480" cy="548640"/>
+          </a:xfrm>
+          <a:prstGeom prst="rect">
+            <a:avLst/>
+          </a:prstGeom>
+          <a:noFill/>
+          <a:ln/>
+        </p:spPr>
+        <p:txBody>
+          <a:bodyPr wrap="square" lIns="0" tIns="0" rIns="0" bIns="0" rtlCol="0" anchor="ctr"/>
+          <a:lstStyle/>
+          <a:p>
+            <a:pPr indent="0" marL="0">
+              <a:buNone/>
+            </a:pPr>
+            <a:r>
+              <a:rPr lang="en-US" sz="3000" b="1" dirty="0">
                 <a:solidFill>
                   <a:srgbClr val="0E1C42"/>
                 </a:solidFill>
@@ -2978,61 +3078,38 @@
                 <a:ea typeface="Calibri" pitchFamily="34" charset="-122"/>
                 <a:cs typeface="Calibri" pitchFamily="34" charset="-120"/>
               </a:rPr>
-              <a:t>Writer’s Workshop: Week 30 · PUBLISH PREPARATION</a:t>
-            </a:r>
-            <a:endParaRPr lang="en-US" sz="2800" dirty="0"/>
-          </a:p>
-        </p:txBody>
-      </p:sp>
-      <p:sp>
-        <p:nvSpPr>
-          <p:cNvPr id="3" name="Shape 1"/>
-          <p:cNvSpPr/>
-          <p:nvPr/>
-        </p:nvSpPr>
-        <p:spPr>
-          <a:xfrm>
-            <a:off x="365760" y="749808"/>
-            <a:ext cx="8412480" cy="0"/>
-          </a:xfrm>
-          <a:prstGeom prst="line">
-            <a:avLst/>
-          </a:prstGeom>
-          <a:noFill/>
-          <a:ln w="19050">
-            <a:solidFill>
-              <a:srgbClr val="34B76F"/>
-            </a:solidFill>
-            <a:prstDash val="solid"/>
-          </a:ln>
-        </p:spPr>
-      </p:sp>
-      <p:sp>
-        <p:nvSpPr>
-          <p:cNvPr id="4" name="Text 2"/>
-          <p:cNvSpPr/>
-          <p:nvPr/>
-        </p:nvSpPr>
-        <p:spPr>
-          <a:xfrm>
-            <a:off x="640080" y="1371600"/>
-            <a:ext cx="7863840" cy="457200"/>
-          </a:xfrm>
-          <a:prstGeom prst="rect">
-            <a:avLst/>
-          </a:prstGeom>
-          <a:noFill/>
-          <a:ln/>
-        </p:spPr>
-        <p:txBody>
-          <a:bodyPr wrap="square" lIns="0" tIns="0" rIns="0" bIns="0" rtlCol="0" anchor="ctr"/>
-          <a:lstStyle/>
-          <a:p>
-            <a:pPr indent="0" marL="0">
-              <a:buNone/>
-            </a:pPr>
-            <a:r>
-              <a:rPr lang="en-US" sz="1600" dirty="0">
+              <a:t>PUBLISH PREPARATION</a:t>
+            </a:r>
+            <a:endParaRPr lang="en-US" sz="3000" dirty="0"/>
+          </a:p>
+        </p:txBody>
+      </p:sp>
+      <p:sp>
+        <p:nvSpPr>
+          <p:cNvPr id="6" name="Text 4"/>
+          <p:cNvSpPr/>
+          <p:nvPr/>
+        </p:nvSpPr>
+        <p:spPr>
+          <a:xfrm>
+            <a:off x="365760" y="1691640"/>
+            <a:ext cx="8412480" cy="457200"/>
+          </a:xfrm>
+          <a:prstGeom prst="rect">
+            <a:avLst/>
+          </a:prstGeom>
+          <a:noFill/>
+          <a:ln/>
+        </p:spPr>
+        <p:txBody>
+          <a:bodyPr wrap="square" lIns="0" tIns="0" rIns="0" bIns="0" rtlCol="0" anchor="ctr"/>
+          <a:lstStyle/>
+          <a:p>
+            <a:pPr indent="0" marL="0">
+              <a:buNone/>
+            </a:pPr>
+            <a:r>
+              <a:rPr lang="en-US" sz="1800" dirty="0">
                 <a:solidFill>
                   <a:srgbClr val="1E293B"/>
                 </a:solidFill>
@@ -3040,48 +3117,9 @@
                 <a:ea typeface="Calibri" pitchFamily="34" charset="-122"/>
                 <a:cs typeface="Calibri" pitchFamily="34" charset="-120"/>
               </a:rPr>
-              <a:t>Open your writing assignment in Canvas.</a:t>
-            </a:r>
-            <a:endParaRPr lang="en-US" sz="1600" dirty="0"/>
-          </a:p>
-        </p:txBody>
-      </p:sp>
-      <p:sp>
-        <p:nvSpPr>
-          <p:cNvPr id="5" name="Text 3"/>
-          <p:cNvSpPr/>
-          <p:nvPr/>
-        </p:nvSpPr>
-        <p:spPr>
-          <a:xfrm>
-            <a:off x="640080" y="2011680"/>
-            <a:ext cx="7863840" cy="457200"/>
-          </a:xfrm>
-          <a:prstGeom prst="rect">
-            <a:avLst/>
-          </a:prstGeom>
-          <a:noFill/>
-          <a:ln/>
-        </p:spPr>
-        <p:txBody>
-          <a:bodyPr wrap="square" lIns="0" tIns="0" rIns="0" bIns="0" rtlCol="0" anchor="ctr"/>
-          <a:lstStyle/>
-          <a:p>
-            <a:pPr indent="0" marL="0">
-              <a:buNone/>
-            </a:pPr>
-            <a:r>
-              <a:rPr lang="en-US" sz="1400" dirty="0">
-                <a:solidFill>
-                  <a:srgbClr val="64748B"/>
-                </a:solidFill>
-                <a:latin typeface="Calibri" pitchFamily="34" charset="0"/>
-                <a:ea typeface="Calibri" pitchFamily="34" charset="-122"/>
-                <a:cs typeface="Calibri" pitchFamily="34" charset="-120"/>
-              </a:rPr>
-              <a:t>Follow the writing prompt for today's workshop.</a:t>
-            </a:r>
-            <a:endParaRPr lang="en-US" sz="1400" dirty="0"/>
+              <a:t>Whole-book assessment; revise literary response</a:t>
+            </a:r>
+            <a:endParaRPr lang="en-US" sz="1800" dirty="0"/>
           </a:p>
         </p:txBody>
       </p:sp>
@@ -3119,65 +3157,62 @@
       </p:grpSpPr>
       <p:sp>
         <p:nvSpPr>
-          <p:cNvPr id="2" name="Text 0"/>
-          <p:cNvSpPr/>
-          <p:nvPr/>
-        </p:nvSpPr>
-        <p:spPr>
-          <a:xfrm>
-            <a:off x="365760" y="164592"/>
-            <a:ext cx="8412480" cy="566928"/>
-          </a:xfrm>
-          <a:prstGeom prst="rect">
-            <a:avLst/>
-          </a:prstGeom>
-          <a:noFill/>
-          <a:ln/>
-        </p:spPr>
-        <p:txBody>
-          <a:bodyPr wrap="square" lIns="0" tIns="0" rIns="0" bIns="0" rtlCol="0" anchor="ctr"/>
-          <a:lstStyle/>
-          <a:p>
-            <a:pPr algn="l" indent="0" marL="0">
-              <a:buNone/>
-            </a:pPr>
-            <a:r>
-              <a:rPr lang="en-US" sz="2800" b="1" dirty="0">
-                <a:solidFill>
-                  <a:srgbClr val="0E1C42"/>
-                </a:solidFill>
-                <a:latin typeface="Calibri" pitchFamily="34" charset="0"/>
-                <a:ea typeface="Calibri" pitchFamily="34" charset="-122"/>
-                <a:cs typeface="Calibri" pitchFamily="34" charset="-120"/>
-              </a:rPr>
-              <a:t>✏️ 10-Minute Write</a:t>
-            </a:r>
-            <a:endParaRPr lang="en-US" sz="2800" dirty="0"/>
-          </a:p>
-        </p:txBody>
-      </p:sp>
-      <p:sp>
-        <p:nvSpPr>
-          <p:cNvPr id="3" name="Shape 1"/>
-          <p:cNvSpPr/>
-          <p:nvPr/>
-        </p:nvSpPr>
-        <p:spPr>
-          <a:xfrm>
-            <a:off x="365760" y="749808"/>
-            <a:ext cx="8412480" cy="0"/>
-          </a:xfrm>
-          <a:prstGeom prst="line">
-            <a:avLst/>
-          </a:prstGeom>
-          <a:noFill/>
-          <a:ln w="19050">
-            <a:solidFill>
-              <a:srgbClr val="C7922C"/>
-            </a:solidFill>
-            <a:prstDash val="solid"/>
-          </a:ln>
-        </p:spPr>
+          <p:cNvPr id="2" name="Shape 0"/>
+          <p:cNvSpPr/>
+          <p:nvPr/>
+        </p:nvSpPr>
+        <p:spPr>
+          <a:xfrm>
+            <a:off x="0" y="0"/>
+            <a:ext cx="9144000" cy="566928"/>
+          </a:xfrm>
+          <a:prstGeom prst="rect">
+            <a:avLst/>
+          </a:prstGeom>
+          <a:solidFill>
+            <a:srgbClr val="C7922C"/>
+          </a:solidFill>
+          <a:ln/>
+        </p:spPr>
+      </p:sp>
+      <p:sp>
+        <p:nvSpPr>
+          <p:cNvPr id="3" name="Text 1"/>
+          <p:cNvSpPr/>
+          <p:nvPr/>
+        </p:nvSpPr>
+        <p:spPr>
+          <a:xfrm>
+            <a:off x="365760" y="54864"/>
+            <a:ext cx="8412480" cy="457200"/>
+          </a:xfrm>
+          <a:prstGeom prst="rect">
+            <a:avLst/>
+          </a:prstGeom>
+          <a:noFill/>
+          <a:ln/>
+        </p:spPr>
+        <p:txBody>
+          <a:bodyPr wrap="square" lIns="0" tIns="0" rIns="0" bIns="0" rtlCol="0" anchor="ctr"/>
+          <a:lstStyle/>
+          <a:p>
+            <a:pPr indent="0" marL="0">
+              <a:buNone/>
+            </a:pPr>
+            <a:r>
+              <a:rPr lang="en-US" sz="2200" b="1" dirty="0">
+                <a:solidFill>
+                  <a:srgbClr val="FFFFFF"/>
+                </a:solidFill>
+                <a:latin typeface="Calibri" pitchFamily="34" charset="0"/>
+                <a:ea typeface="Calibri" pitchFamily="34" charset="-122"/>
+                <a:cs typeface="Calibri" pitchFamily="34" charset="-120"/>
+              </a:rPr>
+              <a:t>✍️  10-Minute Write</a:t>
+            </a:r>
+            <a:endParaRPr lang="en-US" sz="2200" dirty="0"/>
+          </a:p>
+        </p:txBody>
       </p:sp>
       <p:sp>
         <p:nvSpPr>
@@ -3187,24 +3222,24 @@
         </p:nvSpPr>
         <p:spPr>
           <a:xfrm>
-            <a:off x="457200" y="1005840"/>
-            <a:ext cx="8046720" cy="292608"/>
-          </a:xfrm>
-          <a:prstGeom prst="rect">
-            <a:avLst/>
-          </a:prstGeom>
-          <a:noFill/>
-          <a:ln/>
-        </p:spPr>
-        <p:txBody>
-          <a:bodyPr wrap="square" lIns="0" tIns="0" rIns="0" bIns="0" rtlCol="0" anchor="ctr"/>
-          <a:lstStyle/>
-          <a:p>
-            <a:pPr indent="0" marL="0">
-              <a:buNone/>
-            </a:pPr>
-            <a:r>
-              <a:rPr lang="en-US" sz="1100" b="1" spc="200" kern="0" dirty="0">
+            <a:off x="365760" y="822960"/>
+            <a:ext cx="8229600" cy="237744"/>
+          </a:xfrm>
+          <a:prstGeom prst="rect">
+            <a:avLst/>
+          </a:prstGeom>
+          <a:noFill/>
+          <a:ln/>
+        </p:spPr>
+        <p:txBody>
+          <a:bodyPr wrap="square" lIns="0" tIns="0" rIns="0" bIns="0" rtlCol="0" anchor="ctr"/>
+          <a:lstStyle/>
+          <a:p>
+            <a:pPr indent="0" marL="0">
+              <a:buNone/>
+            </a:pPr>
+            <a:r>
+              <a:rPr lang="en-US" sz="1100" b="1" spc="100" kern="0" dirty="0">
                 <a:solidFill>
                   <a:srgbClr val="C7922C"/>
                 </a:solidFill>
@@ -3212,7 +3247,7 @@
                 <a:ea typeface="Calibri" pitchFamily="34" charset="-122"/>
                 <a:cs typeface="Calibri" pitchFamily="34" charset="-120"/>
               </a:rPr>
-              <a:t>📖 READ THE PROMPT — 1 MINUTE</a:t>
+              <a:t>READ THE PROMPT — 1 MINUTE</a:t>
             </a:r>
             <a:endParaRPr lang="en-US" sz="1100" dirty="0"/>
           </a:p>
@@ -3226,18 +3261,18 @@
         </p:nvSpPr>
         <p:spPr>
           <a:xfrm>
-            <a:off x="457200" y="1417320"/>
-            <a:ext cx="8229600" cy="1645920"/>
+            <a:off x="365760" y="1143000"/>
+            <a:ext cx="8412480" cy="1737360"/>
           </a:xfrm>
           <a:prstGeom prst="roundRect">
             <a:avLst>
-              <a:gd name="adj" fmla="val 5556"/>
+              <a:gd name="adj" fmla="val 5263"/>
             </a:avLst>
           </a:prstGeom>
           <a:solidFill>
             <a:srgbClr val="FEF6E8"/>
           </a:solidFill>
-          <a:ln w="12700">
+          <a:ln w="19050">
             <a:solidFill>
               <a:srgbClr val="C7922C"/>
             </a:solidFill>
@@ -3260,24 +3295,24 @@
         </p:nvSpPr>
         <p:spPr>
           <a:xfrm>
-            <a:off x="640080" y="1527048"/>
-            <a:ext cx="7863840" cy="1417320"/>
-          </a:xfrm>
-          <a:prstGeom prst="rect">
-            <a:avLst/>
-          </a:prstGeom>
-          <a:noFill/>
-          <a:ln/>
-        </p:spPr>
-        <p:txBody>
-          <a:bodyPr wrap="square" lIns="0" tIns="0" rIns="0" bIns="0" rtlCol="0" anchor="ctr"/>
-          <a:lstStyle/>
-          <a:p>
-            <a:pPr indent="0" marL="0">
-              <a:buNone/>
-            </a:pPr>
-            <a:r>
-              <a:rPr lang="en-US" sz="1800" i="1" dirty="0">
+            <a:off x="594360" y="1271016"/>
+            <a:ext cx="7955280" cy="1481328"/>
+          </a:xfrm>
+          <a:prstGeom prst="rect">
+            <a:avLst/>
+          </a:prstGeom>
+          <a:noFill/>
+          <a:ln/>
+        </p:spPr>
+        <p:txBody>
+          <a:bodyPr wrap="square" lIns="0" tIns="0" rIns="0" bIns="0" rtlCol="0" anchor="ctr"/>
+          <a:lstStyle/>
+          <a:p>
+            <a:pPr indent="0" marL="0">
+              <a:buNone/>
+            </a:pPr>
+            <a:r>
+              <a:rPr lang="en-US" sz="1700" dirty="0">
                 <a:solidFill>
                   <a:srgbClr val="1E293B"/>
                 </a:solidFill>
@@ -3285,9 +3320,9 @@
                 <a:ea typeface="Calibri" pitchFamily="34" charset="-122"/>
                 <a:cs typeface="Calibri" pitchFamily="34" charset="-120"/>
               </a:rPr>
-              <a:t>The children return through the wardrobe and no time has passed. If you could visit another world but no one would ever know, would you still go? Why or why not?</a:t>
-            </a:r>
-            <a:endParaRPr lang="en-US" sz="1800" dirty="0"/>
+              <a:t>The children grow up and forget the wardrobe. Write about something you used to believe and grew out of.</a:t>
+            </a:r>
+            <a:endParaRPr lang="en-US" sz="1700" dirty="0"/>
           </a:p>
         </p:txBody>
       </p:sp>
@@ -3299,76 +3334,34 @@
         </p:nvSpPr>
         <p:spPr>
           <a:xfrm>
-            <a:off x="640080" y="3246120"/>
-            <a:ext cx="7863840" cy="457200"/>
-          </a:xfrm>
-          <a:prstGeom prst="rect">
-            <a:avLst/>
-          </a:prstGeom>
-          <a:noFill/>
-          <a:ln/>
-        </p:spPr>
-        <p:txBody>
-          <a:bodyPr wrap="square" lIns="0" tIns="0" rIns="0" bIns="0" rtlCol="0" anchor="ctr"/>
-          <a:lstStyle/>
-          <a:p>
-            <a:pPr indent="0" marL="0">
-              <a:buNone/>
-            </a:pPr>
-            <a:r>
-              <a:rPr lang="en-US" sz="1400" b="1" dirty="0">
-                <a:solidFill>
-                  <a:srgbClr val="0E1C42"/>
-                </a:solidFill>
-                <a:latin typeface="Calibri" pitchFamily="34" charset="0"/>
-                <a:ea typeface="Calibri" pitchFamily="34" charset="-122"/>
-                <a:cs typeface="Calibri" pitchFamily="34" charset="-120"/>
-              </a:rPr>
-              <a:t>Type in the chat </a:t>
-            </a:r>
-            <a:pPr indent="0" marL="0">
-              <a:buNone/>
-            </a:pPr>
-            <a:r>
-              <a:rPr lang="en-US" sz="1400" dirty="0">
-                <a:solidFill>
-                  <a:srgbClr val="1E293B"/>
-                </a:solidFill>
-                <a:latin typeface="Calibri" pitchFamily="34" charset="0"/>
-                <a:ea typeface="Calibri" pitchFamily="34" charset="-122"/>
-                <a:cs typeface="Calibri" pitchFamily="34" charset="-120"/>
-              </a:rPr>
-              <a:t>or </a:t>
-            </a:r>
-            <a:pPr indent="0" marL="0">
-              <a:buNone/>
-            </a:pPr>
-            <a:r>
-              <a:rPr lang="en-US" sz="1400" b="1" dirty="0">
-                <a:solidFill>
-                  <a:srgbClr val="0E1C42"/>
-                </a:solidFill>
-                <a:latin typeface="Calibri" pitchFamily="34" charset="0"/>
-                <a:ea typeface="Calibri" pitchFamily="34" charset="-122"/>
-                <a:cs typeface="Calibri" pitchFamily="34" charset="-120"/>
-              </a:rPr>
-              <a:t>write on paper</a:t>
-            </a:r>
-            <a:pPr indent="0" marL="0">
-              <a:buNone/>
-            </a:pPr>
-            <a:r>
-              <a:rPr lang="en-US" sz="1400" dirty="0">
-                <a:solidFill>
-                  <a:srgbClr val="1E293B"/>
-                </a:solidFill>
-                <a:latin typeface="Calibri" pitchFamily="34" charset="0"/>
-                <a:ea typeface="Calibri" pitchFamily="34" charset="-122"/>
-                <a:cs typeface="Calibri" pitchFamily="34" charset="-120"/>
-              </a:rPr>
-              <a:t> to hold up when we share.</a:t>
-            </a:r>
-            <a:endParaRPr lang="en-US" sz="1400" dirty="0"/>
+            <a:off x="365760" y="3063240"/>
+            <a:ext cx="8412480" cy="365760"/>
+          </a:xfrm>
+          <a:prstGeom prst="rect">
+            <a:avLst/>
+          </a:prstGeom>
+          <a:noFill/>
+          <a:ln/>
+        </p:spPr>
+        <p:txBody>
+          <a:bodyPr wrap="square" lIns="0" tIns="0" rIns="0" bIns="0" rtlCol="0" anchor="ctr"/>
+          <a:lstStyle/>
+          <a:p>
+            <a:pPr indent="0" marL="0">
+              <a:buNone/>
+            </a:pPr>
+            <a:r>
+              <a:rPr lang="en-US" sz="1600" i="1" dirty="0">
+                <a:solidFill>
+                  <a:srgbClr val="64748B"/>
+                </a:solidFill>
+                <a:latin typeface="Calibri" pitchFamily="34" charset="0"/>
+                <a:ea typeface="Calibri" pitchFamily="34" charset="-122"/>
+                <a:cs typeface="Calibri" pitchFamily="34" charset="-120"/>
+              </a:rPr>
+              <a:t>Think first. You will have five minutes to write.</a:t>
+            </a:r>
+            <a:endParaRPr lang="en-US" sz="1600" dirty="0"/>
           </a:p>
         </p:txBody>
       </p:sp>
@@ -3406,30 +3399,89 @@
       </p:grpSpPr>
       <p:sp>
         <p:nvSpPr>
-          <p:cNvPr id="2" name="Text 0"/>
-          <p:cNvSpPr/>
-          <p:nvPr/>
-        </p:nvSpPr>
-        <p:spPr>
-          <a:xfrm>
-            <a:off x="457200" y="228600"/>
-            <a:ext cx="8229600" cy="640080"/>
-          </a:xfrm>
-          <a:prstGeom prst="rect">
-            <a:avLst/>
-          </a:prstGeom>
-          <a:noFill/>
-          <a:ln/>
-        </p:spPr>
-        <p:txBody>
-          <a:bodyPr wrap="square" lIns="0" tIns="0" rIns="0" bIns="0" rtlCol="0" anchor="ctr"/>
-          <a:lstStyle/>
-          <a:p>
-            <a:pPr algn="ctr" indent="0" marL="0">
-              <a:buNone/>
-            </a:pPr>
-            <a:r>
-              <a:rPr lang="en-US" sz="3200" b="1" dirty="0">
+          <p:cNvPr id="2" name="Shape 0"/>
+          <p:cNvSpPr/>
+          <p:nvPr/>
+        </p:nvSpPr>
+        <p:spPr>
+          <a:xfrm>
+            <a:off x="0" y="0"/>
+            <a:ext cx="9144000" cy="566928"/>
+          </a:xfrm>
+          <a:prstGeom prst="rect">
+            <a:avLst/>
+          </a:prstGeom>
+          <a:solidFill>
+            <a:srgbClr val="C7922C"/>
+          </a:solidFill>
+          <a:ln/>
+        </p:spPr>
+      </p:sp>
+      <p:sp>
+        <p:nvSpPr>
+          <p:cNvPr id="3" name="Text 1"/>
+          <p:cNvSpPr/>
+          <p:nvPr/>
+        </p:nvSpPr>
+        <p:spPr>
+          <a:xfrm>
+            <a:off x="365760" y="54864"/>
+            <a:ext cx="8412480" cy="457200"/>
+          </a:xfrm>
+          <a:prstGeom prst="rect">
+            <a:avLst/>
+          </a:prstGeom>
+          <a:noFill/>
+          <a:ln/>
+        </p:spPr>
+        <p:txBody>
+          <a:bodyPr wrap="square" lIns="0" tIns="0" rIns="0" bIns="0" rtlCol="0" anchor="ctr"/>
+          <a:lstStyle/>
+          <a:p>
+            <a:pPr indent="0" marL="0">
+              <a:buNone/>
+            </a:pPr>
+            <a:r>
+              <a:rPr lang="en-US" sz="2200" b="1" dirty="0">
+                <a:solidFill>
+                  <a:srgbClr val="FFFFFF"/>
+                </a:solidFill>
+                <a:latin typeface="Calibri" pitchFamily="34" charset="0"/>
+                <a:ea typeface="Calibri" pitchFamily="34" charset="-122"/>
+                <a:cs typeface="Calibri" pitchFamily="34" charset="-120"/>
+              </a:rPr>
+              <a:t>✍️  Writing Time</a:t>
+            </a:r>
+            <a:endParaRPr lang="en-US" sz="2200" dirty="0"/>
+          </a:p>
+        </p:txBody>
+      </p:sp>
+      <p:sp>
+        <p:nvSpPr>
+          <p:cNvPr id="4" name="Text 2"/>
+          <p:cNvSpPr/>
+          <p:nvPr/>
+        </p:nvSpPr>
+        <p:spPr>
+          <a:xfrm>
+            <a:off x="365760" y="868680"/>
+            <a:ext cx="8412480" cy="502920"/>
+          </a:xfrm>
+          <a:prstGeom prst="rect">
+            <a:avLst/>
+          </a:prstGeom>
+          <a:noFill/>
+          <a:ln/>
+        </p:spPr>
+        <p:txBody>
+          <a:bodyPr wrap="square" lIns="0" tIns="0" rIns="0" bIns="0" rtlCol="0" anchor="ctr"/>
+          <a:lstStyle/>
+          <a:p>
+            <a:pPr indent="0" marL="0">
+              <a:buNone/>
+            </a:pPr>
+            <a:r>
+              <a:rPr lang="en-US" sz="2600" b="1" dirty="0">
                 <a:solidFill>
                   <a:srgbClr val="0E1C42"/>
                 </a:solidFill>
@@ -3437,38 +3489,38 @@
                 <a:ea typeface="Calibri" pitchFamily="34" charset="-122"/>
                 <a:cs typeface="Calibri" pitchFamily="34" charset="-120"/>
               </a:rPr>
-              <a:t>✏️  Writing Time</a:t>
-            </a:r>
-            <a:endParaRPr lang="en-US" sz="3200" dirty="0"/>
-          </a:p>
-        </p:txBody>
-      </p:sp>
-      <p:sp>
-        <p:nvSpPr>
-          <p:cNvPr id="3" name="Text 1"/>
-          <p:cNvSpPr/>
-          <p:nvPr/>
-        </p:nvSpPr>
-        <p:spPr>
-          <a:xfrm>
-            <a:off x="914400" y="822960"/>
-            <a:ext cx="7315200" cy="365760"/>
-          </a:xfrm>
-          <a:prstGeom prst="rect">
-            <a:avLst/>
-          </a:prstGeom>
-          <a:noFill/>
-          <a:ln/>
-        </p:spPr>
-        <p:txBody>
-          <a:bodyPr wrap="square" lIns="0" tIns="0" rIns="0" bIns="0" rtlCol="0" anchor="ctr"/>
-          <a:lstStyle/>
-          <a:p>
-            <a:pPr algn="ctr" indent="0" marL="0">
-              <a:buNone/>
-            </a:pPr>
-            <a:r>
-              <a:rPr lang="en-US" sz="1600" dirty="0">
+              <a:t>5 minutes — keep your pencil moving!</a:t>
+            </a:r>
+            <a:endParaRPr lang="en-US" sz="2600" dirty="0"/>
+          </a:p>
+        </p:txBody>
+      </p:sp>
+      <p:sp>
+        <p:nvSpPr>
+          <p:cNvPr id="5" name="Text 3"/>
+          <p:cNvSpPr/>
+          <p:nvPr/>
+        </p:nvSpPr>
+        <p:spPr>
+          <a:xfrm>
+            <a:off x="365760" y="1463040"/>
+            <a:ext cx="8229600" cy="237744"/>
+          </a:xfrm>
+          <a:prstGeom prst="rect">
+            <a:avLst/>
+          </a:prstGeom>
+          <a:noFill/>
+          <a:ln/>
+        </p:spPr>
+        <p:txBody>
+          <a:bodyPr wrap="square" lIns="0" tIns="0" rIns="0" bIns="0" rtlCol="0" anchor="ctr"/>
+          <a:lstStyle/>
+          <a:p>
+            <a:pPr indent="0" marL="0">
+              <a:buNone/>
+            </a:pPr>
+            <a:r>
+              <a:rPr lang="en-US" sz="1100" b="1" spc="100" kern="0" dirty="0">
                 <a:solidFill>
                   <a:srgbClr val="C7922C"/>
                 </a:solidFill>
@@ -3476,32 +3528,32 @@
                 <a:ea typeface="Calibri" pitchFamily="34" charset="-122"/>
                 <a:cs typeface="Calibri" pitchFamily="34" charset="-120"/>
               </a:rPr>
-              <a:t>5 minutes — keep your pencil moving!</a:t>
-            </a:r>
-            <a:endParaRPr lang="en-US" sz="1600" dirty="0"/>
-          </a:p>
-        </p:txBody>
-      </p:sp>
-      <p:sp>
-        <p:nvSpPr>
-          <p:cNvPr id="4" name="Shape 2"/>
-          <p:cNvSpPr/>
-          <p:nvPr/>
-        </p:nvSpPr>
-        <p:spPr>
-          <a:xfrm>
-            <a:off x="457200" y="1371600"/>
-            <a:ext cx="8229600" cy="1280160"/>
+              <a:t>YOUR PROMPT</a:t>
+            </a:r>
+            <a:endParaRPr lang="en-US" sz="1100" dirty="0"/>
+          </a:p>
+        </p:txBody>
+      </p:sp>
+      <p:sp>
+        <p:nvSpPr>
+          <p:cNvPr id="6" name="Shape 4"/>
+          <p:cNvSpPr/>
+          <p:nvPr/>
+        </p:nvSpPr>
+        <p:spPr>
+          <a:xfrm>
+            <a:off x="365760" y="1737360"/>
+            <a:ext cx="8412480" cy="1417320"/>
           </a:xfrm>
           <a:prstGeom prst="roundRect">
             <a:avLst>
-              <a:gd name="adj" fmla="val 7143"/>
+              <a:gd name="adj" fmla="val 6452"/>
             </a:avLst>
           </a:prstGeom>
           <a:solidFill>
             <a:srgbClr val="FFFFFF"/>
           </a:solidFill>
-          <a:ln w="12700">
+          <a:ln w="19050">
             <a:solidFill>
               <a:srgbClr val="C7922C"/>
             </a:solidFill>
@@ -3518,44 +3570,30 @@
       </p:sp>
       <p:sp>
         <p:nvSpPr>
-          <p:cNvPr id="5" name="Text 3"/>
-          <p:cNvSpPr/>
-          <p:nvPr/>
-        </p:nvSpPr>
-        <p:spPr>
-          <a:xfrm>
-            <a:off x="640080" y="1417320"/>
-            <a:ext cx="7863840" cy="1188720"/>
-          </a:xfrm>
-          <a:prstGeom prst="rect">
-            <a:avLst/>
-          </a:prstGeom>
-          <a:noFill/>
-          <a:ln/>
-        </p:spPr>
-        <p:txBody>
-          <a:bodyPr wrap="square" lIns="0" tIns="0" rIns="0" bIns="0" rtlCol="0" anchor="t"/>
-          <a:lstStyle/>
-          <a:p>
-            <a:pPr indent="0" marL="0">
-              <a:buNone/>
-            </a:pPr>
-            <a:r>
-              <a:rPr lang="en-US" sz="1200" b="1" dirty="0">
-                <a:solidFill>
-                  <a:srgbClr val="C7922C"/>
-                </a:solidFill>
-                <a:latin typeface="Calibri" pitchFamily="34" charset="0"/>
-                <a:ea typeface="Calibri" pitchFamily="34" charset="-122"/>
-                <a:cs typeface="Calibri" pitchFamily="34" charset="-120"/>
-              </a:rPr>
-              <a:t>📖 Prompt: </a:t>
-            </a:r>
-            <a:pPr indent="0" marL="0">
-              <a:buNone/>
-            </a:pPr>
-            <a:r>
-              <a:rPr lang="en-US" sz="1200" i="1" dirty="0">
+          <p:cNvPr id="7" name="Text 5"/>
+          <p:cNvSpPr/>
+          <p:nvPr/>
+        </p:nvSpPr>
+        <p:spPr>
+          <a:xfrm>
+            <a:off x="594360" y="1865376"/>
+            <a:ext cx="7955280" cy="1161288"/>
+          </a:xfrm>
+          <a:prstGeom prst="rect">
+            <a:avLst/>
+          </a:prstGeom>
+          <a:noFill/>
+          <a:ln/>
+        </p:spPr>
+        <p:txBody>
+          <a:bodyPr wrap="square" lIns="0" tIns="0" rIns="0" bIns="0" rtlCol="0" anchor="ctr"/>
+          <a:lstStyle/>
+          <a:p>
+            <a:pPr indent="0" marL="0">
+              <a:buNone/>
+            </a:pPr>
+            <a:r>
+              <a:rPr lang="en-US" sz="1700" dirty="0">
                 <a:solidFill>
                   <a:srgbClr val="1E293B"/>
                 </a:solidFill>
@@ -3563,122 +3601,48 @@
                 <a:ea typeface="Calibri" pitchFamily="34" charset="-122"/>
                 <a:cs typeface="Calibri" pitchFamily="34" charset="-120"/>
               </a:rPr>
-              <a:t>The children return through the wardrobe and no time has passed. If you could visit another world but no one would ever know, would you still go? Why or why not?</a:t>
-            </a:r>
-            <a:endParaRPr lang="en-US" sz="1200" dirty="0"/>
-          </a:p>
-        </p:txBody>
-      </p:sp>
-      <p:sp>
-        <p:nvSpPr>
-          <p:cNvPr id="6" name="Shape 4"/>
-          <p:cNvSpPr/>
-          <p:nvPr/>
-        </p:nvSpPr>
-        <p:spPr>
-          <a:xfrm>
-            <a:off x="2286000" y="2926080"/>
-            <a:ext cx="4572000" cy="1280160"/>
-          </a:xfrm>
-          <a:prstGeom prst="roundRect">
-            <a:avLst>
-              <a:gd name="adj" fmla="val 8571"/>
-            </a:avLst>
-          </a:prstGeom>
-          <a:solidFill>
-            <a:srgbClr val="FFFFFF"/>
-          </a:solidFill>
-          <a:ln/>
-          <a:effectLst>
-            <a:outerShdw sx="100000" sy="100000" kx="0" ky="0" algn="bl" rotWithShape="0" blurRad="101600" dist="38100" dir="2700000">
-              <a:srgbClr val="000000">
-                <a:alpha val="12000"/>
-              </a:srgbClr>
-            </a:outerShdw>
-          </a:effectLst>
-        </p:spPr>
-      </p:sp>
-      <p:sp>
-        <p:nvSpPr>
-          <p:cNvPr id="7" name="Text 5"/>
-          <p:cNvSpPr/>
-          <p:nvPr/>
-        </p:nvSpPr>
-        <p:spPr>
-          <a:xfrm>
-            <a:off x="2468880" y="3017520"/>
-            <a:ext cx="4206240" cy="1097280"/>
-          </a:xfrm>
-          <a:prstGeom prst="rect">
-            <a:avLst/>
-          </a:prstGeom>
-          <a:noFill/>
-          <a:ln/>
-        </p:spPr>
-        <p:txBody>
-          <a:bodyPr wrap="square" lIns="0" tIns="0" rIns="0" bIns="0" rtlCol="0" anchor="t"/>
-          <a:lstStyle/>
-          <a:p>
-            <a:pPr indent="0" marL="0">
-              <a:buNone/>
-            </a:pPr>
-            <a:r>
-              <a:rPr lang="en-US" sz="1400" b="1" dirty="0">
-                <a:solidFill>
-                  <a:srgbClr val="0E1C42"/>
-                </a:solidFill>
-                <a:latin typeface="Calibri" pitchFamily="34" charset="0"/>
-                <a:ea typeface="Calibri" pitchFamily="34" charset="-122"/>
-                <a:cs typeface="Calibri" pitchFamily="34" charset="-120"/>
-              </a:rPr>
-              <a:t>If you get stuck:
-</a:t>
-            </a:r>
-            <a:pPr indent="0" marL="0">
-              <a:buNone/>
-            </a:pPr>
-            <a:r>
-              <a:rPr lang="en-US" sz="1300" dirty="0">
-                <a:solidFill>
-                  <a:srgbClr val="1E293B"/>
-                </a:solidFill>
-                <a:latin typeface="Calibri" pitchFamily="34" charset="0"/>
-                <a:ea typeface="Calibri" pitchFamily="34" charset="-122"/>
-                <a:cs typeface="Calibri" pitchFamily="34" charset="-120"/>
-              </a:rPr>
-              <a:t>• Reread the prompt above
-</a:t>
-            </a:r>
-            <a:pPr indent="0" marL="0">
-              <a:buNone/>
-            </a:pPr>
-            <a:r>
-              <a:rPr lang="en-US" sz="1300" dirty="0">
-                <a:solidFill>
-                  <a:srgbClr val="1E293B"/>
-                </a:solidFill>
-                <a:latin typeface="Calibri" pitchFamily="34" charset="0"/>
-                <a:ea typeface="Calibri" pitchFamily="34" charset="-122"/>
-                <a:cs typeface="Calibri" pitchFamily="34" charset="-120"/>
-              </a:rPr>
-              <a:t>• Write "I'm thinking..." until a new idea comes
-</a:t>
-            </a:r>
-            <a:pPr indent="0" marL="0">
-              <a:buNone/>
-            </a:pPr>
-            <a:r>
-              <a:rPr lang="en-US" sz="1300" dirty="0">
-                <a:solidFill>
-                  <a:srgbClr val="1E293B"/>
-                </a:solidFill>
-                <a:latin typeface="Calibri" pitchFamily="34" charset="0"/>
-                <a:ea typeface="Calibri" pitchFamily="34" charset="-122"/>
-                <a:cs typeface="Calibri" pitchFamily="34" charset="-120"/>
-              </a:rPr>
-              <a:t>• Keep going — don't erase!</a:t>
-            </a:r>
-            <a:endParaRPr lang="en-US" sz="1400" dirty="0"/>
+              <a:t>The children grow up and forget the wardrobe. Write about something you used to believe and grew out of.</a:t>
+            </a:r>
+            <a:endParaRPr lang="en-US" sz="1700" dirty="0"/>
+          </a:p>
+        </p:txBody>
+      </p:sp>
+      <p:sp>
+        <p:nvSpPr>
+          <p:cNvPr id="8" name="Text 6"/>
+          <p:cNvSpPr/>
+          <p:nvPr/>
+        </p:nvSpPr>
+        <p:spPr>
+          <a:xfrm>
+            <a:off x="365760" y="3291840"/>
+            <a:ext cx="8412480" cy="365760"/>
+          </a:xfrm>
+          <a:prstGeom prst="rect">
+            <a:avLst/>
+          </a:prstGeom>
+          <a:noFill/>
+          <a:ln/>
+        </p:spPr>
+        <p:txBody>
+          <a:bodyPr wrap="square" lIns="0" tIns="0" rIns="0" bIns="0" rtlCol="0" anchor="ctr"/>
+          <a:lstStyle/>
+          <a:p>
+            <a:pPr indent="0" marL="0">
+              <a:buNone/>
+            </a:pPr>
+            <a:r>
+              <a:rPr lang="en-US" sz="1500" i="1" dirty="0">
+                <a:solidFill>
+                  <a:srgbClr val="64748B"/>
+                </a:solidFill>
+                <a:latin typeface="Calibri" pitchFamily="34" charset="0"/>
+                <a:ea typeface="Calibri" pitchFamily="34" charset="-122"/>
+                <a:cs typeface="Calibri" pitchFamily="34" charset="-120"/>
+              </a:rPr>
+              <a:t>Do not stop to erase. If you get stuck, write the last word again and keep going.</a:t>
+            </a:r>
+            <a:endParaRPr lang="en-US" sz="1500" dirty="0"/>
           </a:p>
         </p:txBody>
       </p:sp>
@@ -3716,39 +3680,23 @@
       </p:grpSpPr>
       <p:sp>
         <p:nvSpPr>
-          <p:cNvPr id="2" name="Text 0"/>
-          <p:cNvSpPr/>
-          <p:nvPr/>
-        </p:nvSpPr>
-        <p:spPr>
-          <a:xfrm>
-            <a:off x="3657600" y="365760"/>
-            <a:ext cx="1828800" cy="640080"/>
-          </a:xfrm>
-          <a:prstGeom prst="rect">
-            <a:avLst/>
-          </a:prstGeom>
-          <a:noFill/>
-          <a:ln/>
-        </p:spPr>
-        <p:txBody>
-          <a:bodyPr wrap="square" lIns="0" tIns="0" rIns="0" bIns="0" rtlCol="0" anchor="ctr"/>
-          <a:lstStyle/>
-          <a:p>
-            <a:pPr algn="ctr" indent="0" marL="0">
-              <a:buNone/>
-            </a:pPr>
-            <a:r>
-              <a:rPr lang="en-US" sz="4000" dirty="0">
-                <a:solidFill>
-                  <a:srgbClr val="000000"/>
-                </a:solidFill>
-              </a:rPr>
-              <a:t>🔍</a:t>
-            </a:r>
-            <a:endParaRPr lang="en-US" sz="4000" dirty="0"/>
-          </a:p>
-        </p:txBody>
+          <p:cNvPr id="2" name="Shape 0"/>
+          <p:cNvSpPr/>
+          <p:nvPr/>
+        </p:nvSpPr>
+        <p:spPr>
+          <a:xfrm>
+            <a:off x="0" y="0"/>
+            <a:ext cx="9144000" cy="566928"/>
+          </a:xfrm>
+          <a:prstGeom prst="rect">
+            <a:avLst/>
+          </a:prstGeom>
+          <a:solidFill>
+            <a:srgbClr val="34B76F"/>
+          </a:solidFill>
+          <a:ln/>
+        </p:spPr>
       </p:sp>
       <p:sp>
         <p:nvSpPr>
@@ -3758,24 +3706,63 @@
         </p:nvSpPr>
         <p:spPr>
           <a:xfrm>
-            <a:off x="914400" y="914400"/>
-            <a:ext cx="7315200" cy="640080"/>
-          </a:xfrm>
-          <a:prstGeom prst="rect">
-            <a:avLst/>
-          </a:prstGeom>
-          <a:noFill/>
-          <a:ln/>
-        </p:spPr>
-        <p:txBody>
-          <a:bodyPr wrap="square" lIns="0" tIns="0" rIns="0" bIns="0" rtlCol="0" anchor="ctr"/>
-          <a:lstStyle/>
-          <a:p>
-            <a:pPr algn="ctr" indent="0" marL="0">
-              <a:buNone/>
-            </a:pPr>
-            <a:r>
-              <a:rPr lang="en-US" sz="3200" b="1" dirty="0">
+            <a:off x="365760" y="54864"/>
+            <a:ext cx="8412480" cy="457200"/>
+          </a:xfrm>
+          <a:prstGeom prst="rect">
+            <a:avLst/>
+          </a:prstGeom>
+          <a:noFill/>
+          <a:ln/>
+        </p:spPr>
+        <p:txBody>
+          <a:bodyPr wrap="square" lIns="0" tIns="0" rIns="0" bIns="0" rtlCol="0" anchor="ctr"/>
+          <a:lstStyle/>
+          <a:p>
+            <a:pPr indent="0" marL="0">
+              <a:buNone/>
+            </a:pPr>
+            <a:r>
+              <a:rPr lang="en-US" sz="2200" b="1" dirty="0">
+                <a:solidFill>
+                  <a:srgbClr val="FFFFFF"/>
+                </a:solidFill>
+                <a:latin typeface="Calibri" pitchFamily="34" charset="0"/>
+                <a:ea typeface="Calibri" pitchFamily="34" charset="-122"/>
+                <a:cs typeface="Calibri" pitchFamily="34" charset="-120"/>
+              </a:rPr>
+              <a:t>🔍  Edit &amp; Revise</a:t>
+            </a:r>
+            <a:endParaRPr lang="en-US" sz="2200" dirty="0"/>
+          </a:p>
+        </p:txBody>
+      </p:sp>
+      <p:sp>
+        <p:nvSpPr>
+          <p:cNvPr id="4" name="Text 2"/>
+          <p:cNvSpPr/>
+          <p:nvPr/>
+        </p:nvSpPr>
+        <p:spPr>
+          <a:xfrm>
+            <a:off x="365760" y="868680"/>
+            <a:ext cx="8412480" cy="457200"/>
+          </a:xfrm>
+          <a:prstGeom prst="rect">
+            <a:avLst/>
+          </a:prstGeom>
+          <a:noFill/>
+          <a:ln/>
+        </p:spPr>
+        <p:txBody>
+          <a:bodyPr wrap="square" lIns="0" tIns="0" rIns="0" bIns="0" rtlCol="0" anchor="ctr"/>
+          <a:lstStyle/>
+          <a:p>
+            <a:pPr indent="0" marL="0">
+              <a:buNone/>
+            </a:pPr>
+            <a:r>
+              <a:rPr lang="en-US" sz="2400" b="1" dirty="0">
                 <a:solidFill>
                   <a:srgbClr val="0E1C42"/>
                 </a:solidFill>
@@ -3783,38 +3770,38 @@
                 <a:ea typeface="Calibri" pitchFamily="34" charset="-122"/>
                 <a:cs typeface="Calibri" pitchFamily="34" charset="-120"/>
               </a:rPr>
-              <a:t>Edit &amp; Revise</a:t>
-            </a:r>
-            <a:endParaRPr lang="en-US" sz="3200" dirty="0"/>
-          </a:p>
-        </p:txBody>
-      </p:sp>
-      <p:sp>
-        <p:nvSpPr>
-          <p:cNvPr id="4" name="Text 2"/>
-          <p:cNvSpPr/>
-          <p:nvPr/>
-        </p:nvSpPr>
-        <p:spPr>
-          <a:xfrm>
-            <a:off x="914400" y="1508760"/>
-            <a:ext cx="7315200" cy="457200"/>
-          </a:xfrm>
-          <a:prstGeom prst="rect">
-            <a:avLst/>
-          </a:prstGeom>
-          <a:noFill/>
-          <a:ln/>
-        </p:spPr>
-        <p:txBody>
-          <a:bodyPr wrap="square" lIns="0" tIns="0" rIns="0" bIns="0" rtlCol="0" anchor="ctr"/>
-          <a:lstStyle/>
-          <a:p>
-            <a:pPr algn="ctr" indent="0" marL="0">
-              <a:buNone/>
-            </a:pPr>
-            <a:r>
-              <a:rPr lang="en-US" sz="1600" dirty="0">
+              <a:t>1 minute — pick ONE thing to fix.</a:t>
+            </a:r>
+            <a:endParaRPr lang="en-US" sz="2400" dirty="0"/>
+          </a:p>
+        </p:txBody>
+      </p:sp>
+      <p:sp>
+        <p:nvSpPr>
+          <p:cNvPr id="5" name="Text 3"/>
+          <p:cNvSpPr/>
+          <p:nvPr/>
+        </p:nvSpPr>
+        <p:spPr>
+          <a:xfrm>
+            <a:off x="365760" y="1417320"/>
+            <a:ext cx="8229600" cy="237744"/>
+          </a:xfrm>
+          <a:prstGeom prst="rect">
+            <a:avLst/>
+          </a:prstGeom>
+          <a:noFill/>
+          <a:ln/>
+        </p:spPr>
+        <p:txBody>
+          <a:bodyPr wrap="square" lIns="0" tIns="0" rIns="0" bIns="0" rtlCol="0" anchor="ctr"/>
+          <a:lstStyle/>
+          <a:p>
+            <a:pPr indent="0" marL="0">
+              <a:buNone/>
+            </a:pPr>
+            <a:r>
+              <a:rPr lang="en-US" sz="1100" b="1" spc="100" kern="0" dirty="0">
                 <a:solidFill>
                   <a:srgbClr val="34B76F"/>
                 </a:solidFill>
@@ -3822,26 +3809,26 @@
                 <a:ea typeface="Calibri" pitchFamily="34" charset="-122"/>
                 <a:cs typeface="Calibri" pitchFamily="34" charset="-120"/>
               </a:rPr>
-              <a:t>1 minute — pick ONE thing to fix</a:t>
-            </a:r>
-            <a:endParaRPr lang="en-US" sz="1600" dirty="0"/>
-          </a:p>
-        </p:txBody>
-      </p:sp>
-      <p:sp>
-        <p:nvSpPr>
-          <p:cNvPr id="5" name="Shape 3"/>
-          <p:cNvSpPr/>
-          <p:nvPr/>
-        </p:nvSpPr>
-        <p:spPr>
-          <a:xfrm>
-            <a:off x="1371600" y="2103120"/>
-            <a:ext cx="6400800" cy="640080"/>
+              <a:t>TODAY'S EDIT FOCUS</a:t>
+            </a:r>
+            <a:endParaRPr lang="en-US" sz="1100" dirty="0"/>
+          </a:p>
+        </p:txBody>
+      </p:sp>
+      <p:sp>
+        <p:nvSpPr>
+          <p:cNvPr id="6" name="Shape 4"/>
+          <p:cNvSpPr/>
+          <p:nvPr/>
+        </p:nvSpPr>
+        <p:spPr>
+          <a:xfrm>
+            <a:off x="365760" y="1691640"/>
+            <a:ext cx="8412480" cy="777240"/>
           </a:xfrm>
           <a:prstGeom prst="roundRect">
             <a:avLst>
-              <a:gd name="adj" fmla="val 14286"/>
+              <a:gd name="adj" fmla="val 11765"/>
             </a:avLst>
           </a:prstGeom>
           <a:solidFill>
@@ -3864,44 +3851,30 @@
       </p:sp>
       <p:sp>
         <p:nvSpPr>
-          <p:cNvPr id="6" name="Text 4"/>
-          <p:cNvSpPr/>
-          <p:nvPr/>
-        </p:nvSpPr>
-        <p:spPr>
-          <a:xfrm>
-            <a:off x="1554480" y="2148840"/>
-            <a:ext cx="6035040" cy="548640"/>
-          </a:xfrm>
-          <a:prstGeom prst="rect">
-            <a:avLst/>
-          </a:prstGeom>
-          <a:noFill/>
-          <a:ln/>
-        </p:spPr>
-        <p:txBody>
-          <a:bodyPr wrap="square" lIns="0" tIns="0" rIns="0" bIns="0" rtlCol="0" anchor="ctr"/>
-          <a:lstStyle/>
-          <a:p>
-            <a:pPr indent="0" marL="0">
-              <a:buNone/>
-            </a:pPr>
-            <a:r>
-              <a:rPr lang="en-US" sz="1400" b="1" dirty="0">
-                <a:solidFill>
-                  <a:srgbClr val="34B76F"/>
-                </a:solidFill>
-                <a:latin typeface="Calibri" pitchFamily="34" charset="0"/>
-                <a:ea typeface="Calibri" pitchFamily="34" charset="-122"/>
-                <a:cs typeface="Calibri" pitchFamily="34" charset="-120"/>
-              </a:rPr>
-              <a:t>Today's check: </a:t>
-            </a:r>
-            <a:pPr indent="0" marL="0">
-              <a:buNone/>
-            </a:pPr>
-            <a:r>
-              <a:rPr lang="en-US" sz="1400" dirty="0">
+          <p:cNvPr id="7" name="Text 5"/>
+          <p:cNvSpPr/>
+          <p:nvPr/>
+        </p:nvSpPr>
+        <p:spPr>
+          <a:xfrm>
+            <a:off x="594360" y="1819656"/>
+            <a:ext cx="7955280" cy="521208"/>
+          </a:xfrm>
+          <a:prstGeom prst="rect">
+            <a:avLst/>
+          </a:prstGeom>
+          <a:noFill/>
+          <a:ln/>
+        </p:spPr>
+        <p:txBody>
+          <a:bodyPr wrap="square" lIns="0" tIns="0" rIns="0" bIns="0" rtlCol="0" anchor="ctr"/>
+          <a:lstStyle/>
+          <a:p>
+            <a:pPr indent="0" marL="0">
+              <a:buNone/>
+            </a:pPr>
+            <a:r>
+              <a:rPr lang="en-US" sz="1700" dirty="0">
                 <a:solidFill>
                   <a:srgbClr val="1E293B"/>
                 </a:solidFill>
@@ -3909,40 +3882,11 @@
                 <a:ea typeface="Calibri" pitchFamily="34" charset="-122"/>
                 <a:cs typeface="Calibri" pitchFamily="34" charset="-120"/>
               </a:rPr>
-              <a:t>Did I explain my reasoning clearly?</a:t>
-            </a:r>
-            <a:endParaRPr lang="en-US" sz="1400" dirty="0"/>
-          </a:p>
-        </p:txBody>
-      </p:sp>
-      <p:sp>
-        <p:nvSpPr>
-          <p:cNvPr id="7" name="Shape 5"/>
-          <p:cNvSpPr/>
-          <p:nvPr/>
-        </p:nvSpPr>
-        <p:spPr>
-          <a:xfrm>
-            <a:off x="1371600" y="2926080"/>
-            <a:ext cx="6400800" cy="1463040"/>
-          </a:xfrm>
-          <a:prstGeom prst="roundRect">
-            <a:avLst>
-              <a:gd name="adj" fmla="val 6250"/>
-            </a:avLst>
-          </a:prstGeom>
-          <a:solidFill>
-            <a:srgbClr val="FFFFFF"/>
-          </a:solidFill>
-          <a:ln/>
-          <a:effectLst>
-            <a:outerShdw sx="100000" sy="100000" kx="0" ky="0" algn="bl" rotWithShape="0" blurRad="101600" dist="38100" dir="2700000">
-              <a:srgbClr val="000000">
-                <a:alpha val="12000"/>
-              </a:srgbClr>
-            </a:outerShdw>
-          </a:effectLst>
-        </p:spPr>
+              <a:t>Did I start each sentence with a capital letter?</a:t>
+            </a:r>
+            <a:endParaRPr lang="en-US" sz="1700" dirty="0"/>
+          </a:p>
+        </p:txBody>
       </p:sp>
       <p:sp>
         <p:nvSpPr>
@@ -3952,45 +3896,24 @@
         </p:nvSpPr>
         <p:spPr>
           <a:xfrm>
-            <a:off x="1554480" y="3017520"/>
-            <a:ext cx="6035040" cy="1280160"/>
-          </a:xfrm>
-          <a:prstGeom prst="rect">
-            <a:avLst/>
-          </a:prstGeom>
-          <a:noFill/>
-          <a:ln/>
-        </p:spPr>
-        <p:txBody>
-          <a:bodyPr wrap="square" lIns="0" tIns="0" rIns="0" bIns="0" rtlCol="0" anchor="t"/>
-          <a:lstStyle/>
-          <a:p>
-            <a:pPr indent="0" marL="0">
-              <a:spcAft>
-                <a:spcPts val="200"/>
-              </a:spcAft>
-              <a:buNone/>
-            </a:pPr>
-            <a:r>
-              <a:rPr lang="en-US" sz="1300" b="1" dirty="0">
-                <a:solidFill>
-                  <a:srgbClr val="0E1C42"/>
-                </a:solidFill>
-                <a:latin typeface="Calibri" pitchFamily="34" charset="0"/>
-                <a:ea typeface="Calibri" pitchFamily="34" charset="-122"/>
-                <a:cs typeface="Calibri" pitchFamily="34" charset="-120"/>
-              </a:rPr>
-              <a:t>Quick check:
-</a:t>
-            </a:r>
-            <a:pPr indent="0" marL="0">
-              <a:spcAft>
-                <a:spcPts val="200"/>
-              </a:spcAft>
-              <a:buNone/>
-            </a:pPr>
-            <a:r>
-              <a:rPr lang="en-US" sz="1200" dirty="0">
+            <a:off x="365760" y="2651760"/>
+            <a:ext cx="8412480" cy="365760"/>
+          </a:xfrm>
+          <a:prstGeom prst="rect">
+            <a:avLst/>
+          </a:prstGeom>
+          <a:noFill/>
+          <a:ln/>
+        </p:spPr>
+        <p:txBody>
+          <a:bodyPr wrap="square" lIns="0" tIns="0" rIns="0" bIns="0" rtlCol="0" anchor="ctr"/>
+          <a:lstStyle/>
+          <a:p>
+            <a:pPr indent="0" marL="0">
+              <a:buNone/>
+            </a:pPr>
+            <a:r>
+              <a:rPr lang="en-US" sz="1500" b="1" dirty="0">
                 <a:solidFill>
                   <a:srgbClr val="1E293B"/>
                 </a:solidFill>
@@ -3998,17 +3921,13 @@
                 <a:ea typeface="Calibri" pitchFamily="34" charset="-122"/>
                 <a:cs typeface="Calibri" pitchFamily="34" charset="-120"/>
               </a:rPr>
-              <a:t>□ Capital letters at the start of every sentence
-</a:t>
-            </a:r>
-            <a:pPr indent="0" marL="0">
-              <a:spcAft>
-                <a:spcPts val="200"/>
-              </a:spcAft>
-              <a:buNone/>
-            </a:pPr>
-            <a:r>
-              <a:rPr lang="en-US" sz="1200" dirty="0">
+              <a:t>Quick check:  </a:t>
+            </a:r>
+            <a:pPr indent="0" marL="0">
+              <a:buNone/>
+            </a:pPr>
+            <a:r>
+              <a:rPr lang="en-US" sz="1500" dirty="0">
                 <a:solidFill>
                   <a:srgbClr val="1E293B"/>
                 </a:solidFill>
@@ -4016,45 +3935,9 @@
                 <a:ea typeface="Calibri" pitchFamily="34" charset="-122"/>
                 <a:cs typeface="Calibri" pitchFamily="34" charset="-120"/>
               </a:rPr>
-              <a:t>□ End punctuation ( .  ?  ! )
-</a:t>
-            </a:r>
-            <a:pPr indent="0" marL="0">
-              <a:spcAft>
-                <a:spcPts val="200"/>
-              </a:spcAft>
-              <a:buNone/>
-            </a:pPr>
-            <a:r>
-              <a:rPr lang="en-US" sz="1200" dirty="0">
-                <a:solidFill>
-                  <a:srgbClr val="1E293B"/>
-                </a:solidFill>
-                <a:latin typeface="Calibri" pitchFamily="34" charset="0"/>
-                <a:ea typeface="Calibri" pitchFamily="34" charset="-122"/>
-                <a:cs typeface="Calibri" pitchFamily="34" charset="-120"/>
-              </a:rPr>
-              <a:t>□ Spelling — circle any words that look wrong
-</a:t>
-            </a:r>
-            <a:pPr indent="0" marL="0">
-              <a:spcAft>
-                <a:spcPts val="200"/>
-              </a:spcAft>
-              <a:buNone/>
-            </a:pPr>
-            <a:r>
-              <a:rPr lang="en-US" sz="1200" dirty="0">
-                <a:solidFill>
-                  <a:srgbClr val="1E293B"/>
-                </a:solidFill>
-                <a:latin typeface="Calibri" pitchFamily="34" charset="0"/>
-                <a:ea typeface="Calibri" pitchFamily="34" charset="-122"/>
-                <a:cs typeface="Calibri" pitchFamily="34" charset="-120"/>
-              </a:rPr>
-              <a:t>□ Read it quietly to yourself — does it sound right?</a:t>
-            </a:r>
-            <a:endParaRPr lang="en-US" sz="1300" dirty="0"/>
+              <a:t>capitals  ·  end punctuation  ·  circle a word you are unsure of  ·  read it aloud</a:t>
+            </a:r>
+            <a:endParaRPr lang="en-US" sz="1500" dirty="0"/>
           </a:p>
         </p:txBody>
       </p:sp>
@@ -4092,39 +3975,23 @@
       </p:grpSpPr>
       <p:sp>
         <p:nvSpPr>
-          <p:cNvPr id="2" name="Text 0"/>
-          <p:cNvSpPr/>
-          <p:nvPr/>
-        </p:nvSpPr>
-        <p:spPr>
-          <a:xfrm>
-            <a:off x="3657600" y="457200"/>
-            <a:ext cx="1828800" cy="731520"/>
-          </a:xfrm>
-          <a:prstGeom prst="rect">
-            <a:avLst/>
-          </a:prstGeom>
-          <a:noFill/>
-          <a:ln/>
-        </p:spPr>
-        <p:txBody>
-          <a:bodyPr wrap="square" lIns="0" tIns="0" rIns="0" bIns="0" rtlCol="0" anchor="ctr"/>
-          <a:lstStyle/>
-          <a:p>
-            <a:pPr algn="ctr" indent="0" marL="0">
-              <a:buNone/>
-            </a:pPr>
-            <a:r>
-              <a:rPr lang="en-US" sz="4400" dirty="0">
-                <a:solidFill>
-                  <a:srgbClr val="000000"/>
-                </a:solidFill>
-              </a:rPr>
-              <a:t>🗣️</a:t>
-            </a:r>
-            <a:endParaRPr lang="en-US" sz="4400" dirty="0"/>
-          </a:p>
-        </p:txBody>
+          <p:cNvPr id="2" name="Shape 0"/>
+          <p:cNvSpPr/>
+          <p:nvPr/>
+        </p:nvSpPr>
+        <p:spPr>
+          <a:xfrm>
+            <a:off x="0" y="0"/>
+            <a:ext cx="9144000" cy="566928"/>
+          </a:xfrm>
+          <a:prstGeom prst="rect">
+            <a:avLst/>
+          </a:prstGeom>
+          <a:solidFill>
+            <a:srgbClr val="55C8E8"/>
+          </a:solidFill>
+          <a:ln/>
+        </p:spPr>
       </p:sp>
       <p:sp>
         <p:nvSpPr>
@@ -4134,24 +4001,63 @@
         </p:nvSpPr>
         <p:spPr>
           <a:xfrm>
-            <a:off x="914400" y="1097280"/>
-            <a:ext cx="7315200" cy="640080"/>
-          </a:xfrm>
-          <a:prstGeom prst="rect">
-            <a:avLst/>
-          </a:prstGeom>
-          <a:noFill/>
-          <a:ln/>
-        </p:spPr>
-        <p:txBody>
-          <a:bodyPr wrap="square" lIns="0" tIns="0" rIns="0" bIns="0" rtlCol="0" anchor="ctr"/>
-          <a:lstStyle/>
-          <a:p>
-            <a:pPr algn="ctr" indent="0" marL="0">
-              <a:buNone/>
-            </a:pPr>
-            <a:r>
-              <a:rPr lang="en-US" sz="3400" b="1" dirty="0">
+            <a:off x="365760" y="54864"/>
+            <a:ext cx="8412480" cy="457200"/>
+          </a:xfrm>
+          <a:prstGeom prst="rect">
+            <a:avLst/>
+          </a:prstGeom>
+          <a:noFill/>
+          <a:ln/>
+        </p:spPr>
+        <p:txBody>
+          <a:bodyPr wrap="square" lIns="0" tIns="0" rIns="0" bIns="0" rtlCol="0" anchor="ctr"/>
+          <a:lstStyle/>
+          <a:p>
+            <a:pPr indent="0" marL="0">
+              <a:buNone/>
+            </a:pPr>
+            <a:r>
+              <a:rPr lang="en-US" sz="2200" b="1" dirty="0">
+                <a:solidFill>
+                  <a:srgbClr val="FFFFFF"/>
+                </a:solidFill>
+                <a:latin typeface="Calibri" pitchFamily="34" charset="0"/>
+                <a:ea typeface="Calibri" pitchFamily="34" charset="-122"/>
+                <a:cs typeface="Calibri" pitchFamily="34" charset="-120"/>
+              </a:rPr>
+              <a:t>🗣️  Share Time</a:t>
+            </a:r>
+            <a:endParaRPr lang="en-US" sz="2200" dirty="0"/>
+          </a:p>
+        </p:txBody>
+      </p:sp>
+      <p:sp>
+        <p:nvSpPr>
+          <p:cNvPr id="4" name="Text 2"/>
+          <p:cNvSpPr/>
+          <p:nvPr/>
+        </p:nvSpPr>
+        <p:spPr>
+          <a:xfrm>
+            <a:off x="365760" y="1005840"/>
+            <a:ext cx="8412480" cy="548640"/>
+          </a:xfrm>
+          <a:prstGeom prst="rect">
+            <a:avLst/>
+          </a:prstGeom>
+          <a:noFill/>
+          <a:ln/>
+        </p:spPr>
+        <p:txBody>
+          <a:bodyPr wrap="square" lIns="0" tIns="0" rIns="0" bIns="0" rtlCol="0" anchor="ctr"/>
+          <a:lstStyle/>
+          <a:p>
+            <a:pPr indent="0" marL="0">
+              <a:buNone/>
+            </a:pPr>
+            <a:r>
+              <a:rPr lang="en-US" sz="2600" b="1" dirty="0">
                 <a:solidFill>
                   <a:srgbClr val="0E1C42"/>
                 </a:solidFill>
@@ -4159,191 +4065,48 @@
                 <a:ea typeface="Calibri" pitchFamily="34" charset="-122"/>
                 <a:cs typeface="Calibri" pitchFamily="34" charset="-120"/>
               </a:rPr>
-              <a:t>Share Time</a:t>
-            </a:r>
-            <a:endParaRPr lang="en-US" sz="3400" dirty="0"/>
-          </a:p>
-        </p:txBody>
-      </p:sp>
-      <p:sp>
-        <p:nvSpPr>
-          <p:cNvPr id="4" name="Text 2"/>
-          <p:cNvSpPr/>
-          <p:nvPr/>
-        </p:nvSpPr>
-        <p:spPr>
-          <a:xfrm>
-            <a:off x="914400" y="1737360"/>
-            <a:ext cx="7315200" cy="457200"/>
-          </a:xfrm>
-          <a:prstGeom prst="rect">
-            <a:avLst/>
-          </a:prstGeom>
-          <a:noFill/>
-          <a:ln/>
-        </p:spPr>
-        <p:txBody>
-          <a:bodyPr wrap="square" lIns="0" tIns="0" rIns="0" bIns="0" rtlCol="0" anchor="ctr"/>
-          <a:lstStyle/>
-          <a:p>
-            <a:pPr algn="ctr" indent="0" marL="0">
+              <a:t>3 minutes — let's hear your writing!</a:t>
+            </a:r>
+            <a:endParaRPr lang="en-US" sz="2600" dirty="0"/>
+          </a:p>
+        </p:txBody>
+      </p:sp>
+      <p:sp>
+        <p:nvSpPr>
+          <p:cNvPr id="5" name="Text 3"/>
+          <p:cNvSpPr/>
+          <p:nvPr/>
+        </p:nvSpPr>
+        <p:spPr>
+          <a:xfrm>
+            <a:off x="365760" y="1691640"/>
+            <a:ext cx="8412480" cy="457200"/>
+          </a:xfrm>
+          <a:prstGeom prst="rect">
+            <a:avLst/>
+          </a:prstGeom>
+          <a:noFill/>
+          <a:ln/>
+        </p:spPr>
+        <p:txBody>
+          <a:bodyPr wrap="square" lIns="0" tIns="0" rIns="0" bIns="0" rtlCol="0" anchor="ctr"/>
+          <a:lstStyle/>
+          <a:p>
+            <a:pPr indent="0" marL="0">
               <a:buNone/>
             </a:pPr>
             <a:r>
               <a:rPr lang="en-US" sz="1700" dirty="0">
                 <a:solidFill>
-                  <a:srgbClr val="55C8E8"/>
-                </a:solidFill>
-                <a:latin typeface="Calibri" pitchFamily="34" charset="0"/>
-                <a:ea typeface="Calibri" pitchFamily="34" charset="-122"/>
-                <a:cs typeface="Calibri" pitchFamily="34" charset="-120"/>
-              </a:rPr>
-              <a:t>3 minutes — let's hear your writing!</a:t>
+                  <a:srgbClr val="1E293B"/>
+                </a:solidFill>
+                <a:latin typeface="Calibri" pitchFamily="34" charset="0"/>
+                <a:ea typeface="Calibri" pitchFamily="34" charset="-122"/>
+                <a:cs typeface="Calibri" pitchFamily="34" charset="-120"/>
+              </a:rPr>
+              <a:t>Raise your hand  ·  paste it in the chat  ·  or hold your paper up to the camera</a:t>
             </a:r>
             <a:endParaRPr lang="en-US" sz="1700" dirty="0"/>
-          </a:p>
-        </p:txBody>
-      </p:sp>
-      <p:sp>
-        <p:nvSpPr>
-          <p:cNvPr id="5" name="Shape 3"/>
-          <p:cNvSpPr/>
-          <p:nvPr/>
-        </p:nvSpPr>
-        <p:spPr>
-          <a:xfrm>
-            <a:off x="1828800" y="2468880"/>
-            <a:ext cx="5486400" cy="1645920"/>
-          </a:xfrm>
-          <a:prstGeom prst="roundRect">
-            <a:avLst>
-              <a:gd name="adj" fmla="val 6667"/>
-            </a:avLst>
-          </a:prstGeom>
-          <a:solidFill>
-            <a:srgbClr val="FFFFFF"/>
-          </a:solidFill>
-          <a:ln/>
-          <a:effectLst>
-            <a:outerShdw sx="100000" sy="100000" kx="0" ky="0" algn="bl" rotWithShape="0" blurRad="101600" dist="38100" dir="2700000">
-              <a:srgbClr val="000000">
-                <a:alpha val="12000"/>
-              </a:srgbClr>
-            </a:outerShdw>
-          </a:effectLst>
-        </p:spPr>
-      </p:sp>
-      <p:sp>
-        <p:nvSpPr>
-          <p:cNvPr id="6" name="Text 4"/>
-          <p:cNvSpPr/>
-          <p:nvPr/>
-        </p:nvSpPr>
-        <p:spPr>
-          <a:xfrm>
-            <a:off x="2103120" y="2560320"/>
-            <a:ext cx="4937760" cy="1463040"/>
-          </a:xfrm>
-          <a:prstGeom prst="rect">
-            <a:avLst/>
-          </a:prstGeom>
-          <a:noFill/>
-          <a:ln/>
-        </p:spPr>
-        <p:txBody>
-          <a:bodyPr wrap="square" lIns="0" tIns="0" rIns="0" bIns="0" rtlCol="0" anchor="t"/>
-          <a:lstStyle/>
-          <a:p>
-            <a:pPr indent="0" marL="0">
-              <a:spcAft>
-                <a:spcPts val="200"/>
-              </a:spcAft>
-              <a:buNone/>
-            </a:pPr>
-            <a:r>
-              <a:rPr lang="en-US" sz="1400" b="1" dirty="0">
-                <a:solidFill>
-                  <a:srgbClr val="0E1C42"/>
-                </a:solidFill>
-                <a:latin typeface="Calibri" pitchFamily="34" charset="0"/>
-                <a:ea typeface="Calibri" pitchFamily="34" charset="-122"/>
-                <a:cs typeface="Calibri" pitchFamily="34" charset="-120"/>
-              </a:rPr>
-              <a:t>How to share:
-</a:t>
-            </a:r>
-            <a:pPr indent="0" marL="0">
-              <a:spcAft>
-                <a:spcPts val="200"/>
-              </a:spcAft>
-              <a:buNone/>
-            </a:pPr>
-            <a:r>
-              <a:rPr lang="en-US" sz="1300" dirty="0">
-                <a:solidFill>
-                  <a:srgbClr val="1E293B"/>
-                </a:solidFill>
-                <a:latin typeface="Calibri" pitchFamily="34" charset="0"/>
-                <a:ea typeface="Calibri" pitchFamily="34" charset="-122"/>
-                <a:cs typeface="Calibri" pitchFamily="34" charset="-120"/>
-              </a:rPr>
-              <a:t>✋ Raise your hand if you want to read yours aloud
-</a:t>
-            </a:r>
-            <a:pPr indent="0" marL="0">
-              <a:spcAft>
-                <a:spcPts val="200"/>
-              </a:spcAft>
-              <a:buNone/>
-            </a:pPr>
-            <a:r>
-              <a:rPr lang="en-US" sz="1300" dirty="0">
-                <a:solidFill>
-                  <a:srgbClr val="1E293B"/>
-                </a:solidFill>
-                <a:latin typeface="Calibri" pitchFamily="34" charset="0"/>
-                <a:ea typeface="Calibri" pitchFamily="34" charset="-122"/>
-                <a:cs typeface="Calibri" pitchFamily="34" charset="-120"/>
-              </a:rPr>
-              <a:t>💬 Or paste your writing in the chat
-</a:t>
-            </a:r>
-            <a:pPr indent="0" marL="0">
-              <a:spcAft>
-                <a:spcPts val="200"/>
-              </a:spcAft>
-              <a:buNone/>
-            </a:pPr>
-            <a:r>
-              <a:rPr lang="en-US" sz="1300" dirty="0">
-                <a:solidFill>
-                  <a:srgbClr val="1E293B"/>
-                </a:solidFill>
-                <a:latin typeface="Calibri" pitchFamily="34" charset="0"/>
-                <a:ea typeface="Calibri" pitchFamily="34" charset="-122"/>
-                <a:cs typeface="Calibri" pitchFamily="34" charset="-120"/>
-              </a:rPr>
-              <a:t>👂 Listen respectfully when others share
-</a:t>
-            </a:r>
-            <a:pPr indent="0" marL="0">
-              <a:spcAft>
-                <a:spcPts val="200"/>
-              </a:spcAft>
-              <a:buNone/>
-            </a:pPr>
-            <a:r>
-              <a:rPr lang="en-US" sz="1200" i="1" dirty="0">
-                <a:solidFill>
-                  <a:srgbClr val="64748B"/>
-                </a:solidFill>
-                <a:latin typeface="Calibri" pitchFamily="34" charset="0"/>
-                <a:ea typeface="Calibri" pitchFamily="34" charset="-122"/>
-                <a:cs typeface="Calibri" pitchFamily="34" charset="-120"/>
-              </a:rPr>
-              <a:t>Every writer's ideas matter — there are no wrong answers.</a:t>
-            </a:r>
-            <a:endParaRPr lang="en-US" sz="1400" dirty="0"/>
           </a:p>
         </p:txBody>
       </p:sp>
@@ -4361,7 +4124,7 @@
     <p:bg>
       <p:bgPr>
         <a:solidFill>
-          <a:srgbClr val="E5F7FC"/>
+          <a:srgbClr val="F8FAFC"/>
         </a:solidFill>
       </p:bgPr>
     </p:bg>
@@ -4381,81 +4144,17 @@
       </p:grpSpPr>
       <p:sp>
         <p:nvSpPr>
-          <p:cNvPr id="2" name="Text 0"/>
-          <p:cNvSpPr/>
-          <p:nvPr/>
-        </p:nvSpPr>
-        <p:spPr>
-          <a:xfrm>
-            <a:off x="365760" y="164592"/>
-            <a:ext cx="5943600" cy="566928"/>
-          </a:xfrm>
-          <a:prstGeom prst="rect">
-            <a:avLst/>
-          </a:prstGeom>
-          <a:noFill/>
-          <a:ln/>
-        </p:spPr>
-        <p:txBody>
-          <a:bodyPr wrap="square" lIns="0" tIns="0" rIns="0" bIns="0" rtlCol="0" anchor="ctr"/>
-          <a:lstStyle/>
-          <a:p>
-            <a:pPr algn="l" indent="0" marL="0">
-              <a:buNone/>
-            </a:pPr>
-            <a:r>
-              <a:rPr lang="en-US" sz="2800" b="1" dirty="0">
-                <a:solidFill>
-                  <a:srgbClr val="0E1C42"/>
-                </a:solidFill>
-                <a:latin typeface="Calibri" pitchFamily="34" charset="0"/>
-                <a:ea typeface="Calibri" pitchFamily="34" charset="-122"/>
-                <a:cs typeface="Calibri" pitchFamily="34" charset="-120"/>
-              </a:rPr>
-              <a:t>💡 Today's Focus</a:t>
-            </a:r>
-            <a:endParaRPr lang="en-US" sz="2800" dirty="0"/>
-          </a:p>
-        </p:txBody>
-      </p:sp>
-      <p:sp>
-        <p:nvSpPr>
-          <p:cNvPr id="3" name="Shape 1"/>
-          <p:cNvSpPr/>
-          <p:nvPr/>
-        </p:nvSpPr>
-        <p:spPr>
-          <a:xfrm>
-            <a:off x="365760" y="749808"/>
-            <a:ext cx="8412480" cy="0"/>
-          </a:xfrm>
-          <a:prstGeom prst="line">
-            <a:avLst/>
-          </a:prstGeom>
-          <a:noFill/>
-          <a:ln w="19050">
-            <a:solidFill>
-              <a:srgbClr val="4A90D9"/>
-            </a:solidFill>
-            <a:prstDash val="solid"/>
-          </a:ln>
-        </p:spPr>
-      </p:sp>
-      <p:sp>
-        <p:nvSpPr>
-          <p:cNvPr id="4" name="Shape 2"/>
-          <p:cNvSpPr/>
-          <p:nvPr/>
-        </p:nvSpPr>
-        <p:spPr>
-          <a:xfrm>
-            <a:off x="6492240" y="173736"/>
-            <a:ext cx="2286000" cy="502920"/>
-          </a:xfrm>
-          <a:prstGeom prst="roundRect">
-            <a:avLst>
-              <a:gd name="adj" fmla="val 21818"/>
-            </a:avLst>
+          <p:cNvPr id="2" name="Shape 0"/>
+          <p:cNvSpPr/>
+          <p:nvPr/>
+        </p:nvSpPr>
+        <p:spPr>
+          <a:xfrm>
+            <a:off x="0" y="0"/>
+            <a:ext cx="9144000" cy="566928"/>
+          </a:xfrm>
+          <a:prstGeom prst="rect">
+            <a:avLst/>
           </a:prstGeom>
           <a:solidFill>
             <a:srgbClr val="4A90D9"/>
@@ -4465,30 +4164,108 @@
       </p:sp>
       <p:sp>
         <p:nvSpPr>
+          <p:cNvPr id="3" name="Text 1"/>
+          <p:cNvSpPr/>
+          <p:nvPr/>
+        </p:nvSpPr>
+        <p:spPr>
+          <a:xfrm>
+            <a:off x="365760" y="54864"/>
+            <a:ext cx="8412480" cy="457200"/>
+          </a:xfrm>
+          <a:prstGeom prst="rect">
+            <a:avLst/>
+          </a:prstGeom>
+          <a:noFill/>
+          <a:ln/>
+        </p:spPr>
+        <p:txBody>
+          <a:bodyPr wrap="square" lIns="0" tIns="0" rIns="0" bIns="0" rtlCol="0" anchor="ctr"/>
+          <a:lstStyle/>
+          <a:p>
+            <a:pPr indent="0" marL="0">
+              <a:buNone/>
+            </a:pPr>
+            <a:r>
+              <a:rPr lang="en-US" sz="2200" b="1" dirty="0">
+                <a:solidFill>
+                  <a:srgbClr val="FFFFFF"/>
+                </a:solidFill>
+                <a:latin typeface="Calibri" pitchFamily="34" charset="0"/>
+                <a:ea typeface="Calibri" pitchFamily="34" charset="-122"/>
+                <a:cs typeface="Calibri" pitchFamily="34" charset="-120"/>
+              </a:rPr>
+              <a:t>📖  Today</a:t>
+            </a:r>
+            <a:endParaRPr lang="en-US" sz="2200" dirty="0"/>
+          </a:p>
+        </p:txBody>
+      </p:sp>
+      <p:sp>
+        <p:nvSpPr>
+          <p:cNvPr id="4" name="Text 2"/>
+          <p:cNvSpPr/>
+          <p:nvPr/>
+        </p:nvSpPr>
+        <p:spPr>
+          <a:xfrm>
+            <a:off x="365760" y="777240"/>
+            <a:ext cx="8229600" cy="237744"/>
+          </a:xfrm>
+          <a:prstGeom prst="rect">
+            <a:avLst/>
+          </a:prstGeom>
+          <a:noFill/>
+          <a:ln/>
+        </p:spPr>
+        <p:txBody>
+          <a:bodyPr wrap="square" lIns="0" tIns="0" rIns="0" bIns="0" rtlCol="0" anchor="ctr"/>
+          <a:lstStyle/>
+          <a:p>
+            <a:pPr indent="0" marL="0">
+              <a:buNone/>
+            </a:pPr>
+            <a:r>
+              <a:rPr lang="en-US" sz="1100" b="1" spc="100" kern="0" dirty="0">
+                <a:solidFill>
+                  <a:srgbClr val="8B6FC0"/>
+                </a:solidFill>
+                <a:latin typeface="Calibri" pitchFamily="34" charset="0"/>
+                <a:ea typeface="Calibri" pitchFamily="34" charset="-122"/>
+                <a:cs typeface="Calibri" pitchFamily="34" charset="-120"/>
+              </a:rPr>
+              <a:t>READING</a:t>
+            </a:r>
+            <a:endParaRPr lang="en-US" sz="1100" dirty="0"/>
+          </a:p>
+        </p:txBody>
+      </p:sp>
+      <p:sp>
+        <p:nvSpPr>
           <p:cNvPr id="5" name="Text 3"/>
           <p:cNvSpPr/>
           <p:nvPr/>
         </p:nvSpPr>
         <p:spPr>
           <a:xfrm>
-            <a:off x="6492240" y="173736"/>
-            <a:ext cx="2286000" cy="502920"/>
-          </a:xfrm>
-          <a:prstGeom prst="rect">
-            <a:avLst/>
-          </a:prstGeom>
-          <a:noFill/>
-          <a:ln/>
-        </p:spPr>
-        <p:txBody>
-          <a:bodyPr wrap="square" lIns="0" tIns="0" rIns="0" bIns="0" rtlCol="0" anchor="ctr"/>
-          <a:lstStyle/>
-          <a:p>
-            <a:pPr algn="ctr" indent="0" marL="0">
-              <a:buNone/>
-            </a:pPr>
-            <a:r>
-              <a:rPr lang="en-US" sz="1100" b="1" dirty="0">
+            <a:off x="365760" y="1014984"/>
+            <a:ext cx="8412480" cy="365760"/>
+          </a:xfrm>
+          <a:prstGeom prst="rect">
+            <a:avLst/>
+          </a:prstGeom>
+          <a:noFill/>
+          <a:ln/>
+        </p:spPr>
+        <p:txBody>
+          <a:bodyPr wrap="square" lIns="0" tIns="0" rIns="0" bIns="0" rtlCol="0" anchor="ctr"/>
+          <a:lstStyle/>
+          <a:p>
+            <a:pPr indent="0" marL="0">
+              <a:buNone/>
+            </a:pPr>
+            <a:r>
+              <a:rPr lang="en-US" sz="2000" b="1" dirty="0">
                 <a:solidFill>
                   <a:srgbClr val="0E1C42"/>
                 </a:solidFill>
@@ -4496,7 +4273,46 @@
                 <a:ea typeface="Calibri" pitchFamily="34" charset="-122"/>
                 <a:cs typeface="Calibri" pitchFamily="34" charset="-120"/>
               </a:rPr>
-              <a:t>CHAT PROMPT</a:t>
+              <a:t>Reading: Ch. 16–17 + Synthesis</a:t>
+            </a:r>
+            <a:endParaRPr lang="en-US" sz="2000" dirty="0"/>
+          </a:p>
+        </p:txBody>
+      </p:sp>
+      <p:sp>
+        <p:nvSpPr>
+          <p:cNvPr id="6" name="Text 4"/>
+          <p:cNvSpPr/>
+          <p:nvPr/>
+        </p:nvSpPr>
+        <p:spPr>
+          <a:xfrm>
+            <a:off x="365760" y="1508760"/>
+            <a:ext cx="8229600" cy="237744"/>
+          </a:xfrm>
+          <a:prstGeom prst="rect">
+            <a:avLst/>
+          </a:prstGeom>
+          <a:noFill/>
+          <a:ln/>
+        </p:spPr>
+        <p:txBody>
+          <a:bodyPr wrap="square" lIns="0" tIns="0" rIns="0" bIns="0" rtlCol="0" anchor="ctr"/>
+          <a:lstStyle/>
+          <a:p>
+            <a:pPr indent="0" marL="0">
+              <a:buNone/>
+            </a:pPr>
+            <a:r>
+              <a:rPr lang="en-US" sz="1100" b="1" spc="100" kern="0" dirty="0">
+                <a:solidFill>
+                  <a:srgbClr val="C7922C"/>
+                </a:solidFill>
+                <a:latin typeface="Calibri" pitchFamily="34" charset="0"/>
+                <a:ea typeface="Calibri" pitchFamily="34" charset="-122"/>
+                <a:cs typeface="Calibri" pitchFamily="34" charset="-120"/>
+              </a:rPr>
+              <a:t>BIG QUESTION</a:t>
             </a:r>
             <a:endParaRPr lang="en-US" sz="1100" dirty="0"/>
           </a:p>
@@ -4504,63 +4320,24 @@
       </p:sp>
       <p:sp>
         <p:nvSpPr>
-          <p:cNvPr id="6" name="Text 4"/>
-          <p:cNvSpPr/>
-          <p:nvPr/>
-        </p:nvSpPr>
-        <p:spPr>
-          <a:xfrm>
-            <a:off x="457200" y="914400"/>
-            <a:ext cx="8046720" cy="292608"/>
-          </a:xfrm>
-          <a:prstGeom prst="rect">
-            <a:avLst/>
-          </a:prstGeom>
-          <a:noFill/>
-          <a:ln/>
-        </p:spPr>
-        <p:txBody>
-          <a:bodyPr wrap="square" lIns="0" tIns="0" rIns="0" bIns="0" rtlCol="0" anchor="ctr"/>
-          <a:lstStyle/>
-          <a:p>
-            <a:pPr indent="0" marL="0">
-              <a:buNone/>
-            </a:pPr>
-            <a:r>
-              <a:rPr lang="en-US" sz="1100" b="1" spc="200" kern="0" dirty="0">
-                <a:solidFill>
-                  <a:srgbClr val="C7922C"/>
-                </a:solidFill>
-                <a:latin typeface="Calibri" pitchFamily="34" charset="0"/>
-                <a:ea typeface="Calibri" pitchFamily="34" charset="-122"/>
-                <a:cs typeface="Calibri" pitchFamily="34" charset="-120"/>
-              </a:rPr>
-              <a:t>BIG QUESTION</a:t>
-            </a:r>
-            <a:endParaRPr lang="en-US" sz="1100" dirty="0"/>
-          </a:p>
-        </p:txBody>
-      </p:sp>
-      <p:sp>
-        <p:nvSpPr>
           <p:cNvPr id="7" name="Shape 5"/>
           <p:cNvSpPr/>
           <p:nvPr/>
         </p:nvSpPr>
         <p:spPr>
           <a:xfrm>
-            <a:off x="457200" y="1234440"/>
-            <a:ext cx="8229600" cy="640080"/>
+            <a:off x="365760" y="1746504"/>
+            <a:ext cx="8412480" cy="731520"/>
           </a:xfrm>
           <a:prstGeom prst="roundRect">
             <a:avLst>
-              <a:gd name="adj" fmla="val 14286"/>
+              <a:gd name="adj" fmla="val 12500"/>
             </a:avLst>
           </a:prstGeom>
           <a:solidFill>
             <a:srgbClr val="FEF6E8"/>
           </a:solidFill>
-          <a:ln w="12700">
+          <a:ln w="19050">
             <a:solidFill>
               <a:srgbClr val="C7922C"/>
             </a:solidFill>
@@ -4583,24 +4360,24 @@
         </p:nvSpPr>
         <p:spPr>
           <a:xfrm>
-            <a:off x="640080" y="1344168"/>
-            <a:ext cx="7863840" cy="411480"/>
-          </a:xfrm>
-          <a:prstGeom prst="rect">
-            <a:avLst/>
-          </a:prstGeom>
-          <a:noFill/>
-          <a:ln/>
-        </p:spPr>
-        <p:txBody>
-          <a:bodyPr wrap="square" lIns="0" tIns="0" rIns="0" bIns="0" rtlCol="0" anchor="ctr"/>
-          <a:lstStyle/>
-          <a:p>
-            <a:pPr indent="0" marL="0">
-              <a:buNone/>
-            </a:pPr>
-            <a:r>
-              <a:rPr lang="en-US" sz="1800" i="1" dirty="0">
+            <a:off x="594360" y="1874520"/>
+            <a:ext cx="7955280" cy="475488"/>
+          </a:xfrm>
+          <a:prstGeom prst="rect">
+            <a:avLst/>
+          </a:prstGeom>
+          <a:noFill/>
+          <a:ln/>
+        </p:spPr>
+        <p:txBody>
+          <a:bodyPr wrap="square" lIns="0" tIns="0" rIns="0" bIns="0" rtlCol="0" anchor="ctr"/>
+          <a:lstStyle/>
+          <a:p>
+            <a:pPr indent="0" marL="0">
+              <a:buNone/>
+            </a:pPr>
+            <a:r>
+              <a:rPr lang="en-US" sz="1700" dirty="0">
                 <a:solidFill>
                   <a:srgbClr val="1E293B"/>
                 </a:solidFill>
@@ -4610,43 +4387,48 @@
               </a:rPr>
               <a:t>Explain how the ending reveals theme.</a:t>
             </a:r>
-            <a:endParaRPr lang="en-US" sz="1800" dirty="0"/>
-          </a:p>
-        </p:txBody>
-      </p:sp>
-      <p:sp>
-        <p:nvSpPr>
-          <p:cNvPr id="9" name="Shape 7"/>
-          <p:cNvSpPr/>
-          <p:nvPr/>
-        </p:nvSpPr>
-        <p:spPr>
-          <a:xfrm>
-            <a:off x="457200" y="1965960"/>
-            <a:ext cx="8229600" cy="640080"/>
-          </a:xfrm>
-          <a:prstGeom prst="roundRect">
-            <a:avLst>
-              <a:gd name="adj" fmla="val 14286"/>
-            </a:avLst>
-          </a:prstGeom>
-          <a:solidFill>
-            <a:srgbClr val="FEF6E8"/>
-          </a:solidFill>
-          <a:ln w="12700">
-            <a:solidFill>
-              <a:srgbClr val="C7922C"/>
-            </a:solidFill>
-            <a:prstDash val="solid"/>
-          </a:ln>
-          <a:effectLst>
-            <a:outerShdw sx="100000" sy="100000" kx="0" ky="0" algn="bl" rotWithShape="0" blurRad="101600" dist="38100" dir="2700000">
-              <a:srgbClr val="000000">
-                <a:alpha val="12000"/>
-              </a:srgbClr>
-            </a:outerShdw>
-          </a:effectLst>
-        </p:spPr>
+            <a:endParaRPr lang="en-US" sz="1700" dirty="0"/>
+          </a:p>
+        </p:txBody>
+      </p:sp>
+      <p:sp>
+        <p:nvSpPr>
+          <p:cNvPr id="9" name="Text 7"/>
+          <p:cNvSpPr/>
+          <p:nvPr/>
+        </p:nvSpPr>
+        <p:spPr>
+          <a:xfrm>
+            <a:off x="365760" y="2606040"/>
+            <a:ext cx="8229600" cy="237744"/>
+          </a:xfrm>
+          <a:prstGeom prst="rect">
+            <a:avLst/>
+          </a:prstGeom>
+          <a:noFill/>
+          <a:ln/>
+        </p:spPr>
+        <p:txBody>
+          <a:bodyPr wrap="square" lIns="0" tIns="0" rIns="0" bIns="0" rtlCol="0" anchor="ctr"/>
+          <a:lstStyle/>
+          <a:p>
+            <a:pPr indent="0" marL="0">
+              <a:buNone/>
+            </a:pPr>
+            <a:r>
+              <a:rPr lang="en-US" sz="1100" b="1" spc="100" kern="0" dirty="0">
+                <a:solidFill>
+                  <a:srgbClr val="55C8E8"/>
+                </a:solidFill>
+                <a:latin typeface="Calibri" pitchFamily="34" charset="0"/>
+                <a:ea typeface="Calibri" pitchFamily="34" charset="-122"/>
+                <a:cs typeface="Calibri" pitchFamily="34" charset="-120"/>
+              </a:rPr>
+              <a:t>READING LENS</a:t>
+            </a:r>
+            <a:endParaRPr lang="en-US" sz="1100" dirty="0"/>
+          </a:p>
+        </p:txBody>
       </p:sp>
       <p:sp>
         <p:nvSpPr>
@@ -4656,159 +4438,8 @@
         </p:nvSpPr>
         <p:spPr>
           <a:xfrm>
-            <a:off x="640080" y="2075688"/>
-            <a:ext cx="7863840" cy="411480"/>
-          </a:xfrm>
-          <a:prstGeom prst="rect">
-            <a:avLst/>
-          </a:prstGeom>
-          <a:noFill/>
-          <a:ln/>
-        </p:spPr>
-        <p:txBody>
-          <a:bodyPr wrap="square" lIns="0" tIns="0" rIns="0" bIns="0" rtlCol="0" anchor="ctr"/>
-          <a:lstStyle/>
-          <a:p>
-            <a:pPr indent="0" marL="0">
-              <a:buNone/>
-            </a:pPr>
-            <a:r>
-              <a:rPr lang="en-US" sz="1800" i="1" dirty="0">
-                <a:solidFill>
-                  <a:srgbClr val="1E293B"/>
-                </a:solidFill>
-                <a:latin typeface="Calibri" pitchFamily="34" charset="0"/>
-                <a:ea typeface="Calibri" pitchFamily="34" charset="-122"/>
-                <a:cs typeface="Calibri" pitchFamily="34" charset="-120"/>
-              </a:rPr>
-              <a:t>As you read today, ask yourself: How does understanding the theme help you explain what the novel is really about?</a:t>
-            </a:r>
-            <a:endParaRPr lang="en-US" sz="1800" dirty="0"/>
-          </a:p>
-        </p:txBody>
-      </p:sp>
-      <p:sp>
-        <p:nvSpPr>
-          <p:cNvPr id="11" name="Shape 9"/>
-          <p:cNvSpPr/>
-          <p:nvPr/>
-        </p:nvSpPr>
-        <p:spPr>
-          <a:xfrm>
-            <a:off x="457200" y="2697480"/>
-            <a:ext cx="8229600" cy="640080"/>
-          </a:xfrm>
-          <a:prstGeom prst="roundRect">
-            <a:avLst>
-              <a:gd name="adj" fmla="val 14286"/>
-            </a:avLst>
-          </a:prstGeom>
-          <a:solidFill>
-            <a:srgbClr val="FEF6E8"/>
-          </a:solidFill>
-          <a:ln w="12700">
-            <a:solidFill>
-              <a:srgbClr val="C7922C"/>
-            </a:solidFill>
-            <a:prstDash val="solid"/>
-          </a:ln>
-          <a:effectLst>
-            <a:outerShdw sx="100000" sy="100000" kx="0" ky="0" algn="bl" rotWithShape="0" blurRad="101600" dist="38100" dir="2700000">
-              <a:srgbClr val="000000">
-                <a:alpha val="12000"/>
-              </a:srgbClr>
-            </a:outerShdw>
-          </a:effectLst>
-        </p:spPr>
-      </p:sp>
-      <p:sp>
-        <p:nvSpPr>
-          <p:cNvPr id="12" name="Text 10"/>
-          <p:cNvSpPr/>
-          <p:nvPr/>
-        </p:nvSpPr>
-        <p:spPr>
-          <a:xfrm>
-            <a:off x="640080" y="2807208"/>
-            <a:ext cx="7863840" cy="411480"/>
-          </a:xfrm>
-          <a:prstGeom prst="rect">
-            <a:avLst/>
-          </a:prstGeom>
-          <a:noFill/>
-          <a:ln/>
-        </p:spPr>
-        <p:txBody>
-          <a:bodyPr wrap="square" lIns="0" tIns="0" rIns="0" bIns="0" rtlCol="0" anchor="ctr"/>
-          <a:lstStyle/>
-          <a:p>
-            <a:pPr indent="0" marL="0">
-              <a:buNone/>
-            </a:pPr>
-            <a:r>
-              <a:rPr lang="en-US" sz="1800" i="1" dirty="0">
-                <a:solidFill>
-                  <a:srgbClr val="1E293B"/>
-                </a:solidFill>
-                <a:latin typeface="Calibri" pitchFamily="34" charset="0"/>
-                <a:ea typeface="Calibri" pitchFamily="34" charset="-122"/>
-                <a:cs typeface="Calibri" pitchFamily="34" charset="-120"/>
-              </a:rPr>
-              <a:t>Write a 3–5 sentence synthesis paragraph. Include: the title, the theme stated as a complete idea, two pieces of evidence from different chapters, and a closing sentence.</a:t>
-            </a:r>
-            <a:endParaRPr lang="en-US" sz="1800" dirty="0"/>
-          </a:p>
-        </p:txBody>
-      </p:sp>
-      <p:sp>
-        <p:nvSpPr>
-          <p:cNvPr id="13" name="Text 11"/>
-          <p:cNvSpPr/>
-          <p:nvPr/>
-        </p:nvSpPr>
-        <p:spPr>
-          <a:xfrm>
-            <a:off x="457200" y="3429000"/>
-            <a:ext cx="8046720" cy="292608"/>
-          </a:xfrm>
-          <a:prstGeom prst="rect">
-            <a:avLst/>
-          </a:prstGeom>
-          <a:noFill/>
-          <a:ln/>
-        </p:spPr>
-        <p:txBody>
-          <a:bodyPr wrap="square" lIns="0" tIns="0" rIns="0" bIns="0" rtlCol="0" anchor="ctr"/>
-          <a:lstStyle/>
-          <a:p>
-            <a:pPr indent="0" marL="0">
-              <a:buNone/>
-            </a:pPr>
-            <a:r>
-              <a:rPr lang="en-US" sz="1100" b="1" spc="200" kern="0" dirty="0">
-                <a:solidFill>
-                  <a:srgbClr val="8B6FC0"/>
-                </a:solidFill>
-                <a:latin typeface="Calibri" pitchFamily="34" charset="0"/>
-                <a:ea typeface="Calibri" pitchFamily="34" charset="-122"/>
-                <a:cs typeface="Calibri" pitchFamily="34" charset="-120"/>
-              </a:rPr>
-              <a:t>READING LENS</a:t>
-            </a:r>
-            <a:endParaRPr lang="en-US" sz="1100" dirty="0"/>
-          </a:p>
-        </p:txBody>
-      </p:sp>
-      <p:sp>
-        <p:nvSpPr>
-          <p:cNvPr id="14" name="Text 12"/>
-          <p:cNvSpPr/>
-          <p:nvPr/>
-        </p:nvSpPr>
-        <p:spPr>
-          <a:xfrm>
-            <a:off x="640080" y="3749040"/>
-            <a:ext cx="7863840" cy="731520"/>
+            <a:off x="365760" y="2843784"/>
+            <a:ext cx="8412480" cy="914400"/>
           </a:xfrm>
           <a:prstGeom prst="rect">
             <a:avLst/>
@@ -4872,91 +4503,122 @@
       </p:grpSpPr>
       <p:sp>
         <p:nvSpPr>
-          <p:cNvPr id="2" name="Text 0"/>
-          <p:cNvSpPr/>
-          <p:nvPr/>
-        </p:nvSpPr>
-        <p:spPr>
-          <a:xfrm>
-            <a:off x="365760" y="164592"/>
-            <a:ext cx="8412480" cy="566928"/>
-          </a:xfrm>
-          <a:prstGeom prst="rect">
-            <a:avLst/>
-          </a:prstGeom>
-          <a:noFill/>
-          <a:ln/>
-        </p:spPr>
-        <p:txBody>
-          <a:bodyPr wrap="square" lIns="0" tIns="0" rIns="0" bIns="0" rtlCol="0" anchor="ctr"/>
-          <a:lstStyle/>
-          <a:p>
-            <a:pPr algn="l" indent="0" marL="0">
-              <a:buNone/>
-            </a:pPr>
-            <a:r>
-              <a:rPr lang="en-US" sz="2800" b="1" dirty="0">
-                <a:solidFill>
-                  <a:srgbClr val="0E1C42"/>
-                </a:solidFill>
-                <a:latin typeface="Calibri" pitchFamily="34" charset="0"/>
-                <a:ea typeface="Calibri" pitchFamily="34" charset="-122"/>
-                <a:cs typeface="Calibri" pitchFamily="34" charset="-120"/>
-              </a:rPr>
-              <a:t>✅ Model Sentence — Study What's Right</a:t>
-            </a:r>
-            <a:endParaRPr lang="en-US" sz="2800" dirty="0"/>
-          </a:p>
-        </p:txBody>
-      </p:sp>
-      <p:sp>
-        <p:nvSpPr>
-          <p:cNvPr id="3" name="Shape 1"/>
-          <p:cNvSpPr/>
-          <p:nvPr/>
-        </p:nvSpPr>
-        <p:spPr>
-          <a:xfrm>
-            <a:off x="365760" y="749808"/>
-            <a:ext cx="8412480" cy="0"/>
-          </a:xfrm>
-          <a:prstGeom prst="line">
-            <a:avLst/>
-          </a:prstGeom>
-          <a:noFill/>
-          <a:ln w="19050">
-            <a:solidFill>
-              <a:srgbClr val="34B76F"/>
-            </a:solidFill>
-            <a:prstDash val="solid"/>
-          </a:ln>
-        </p:spPr>
-      </p:sp>
-      <p:sp>
-        <p:nvSpPr>
-          <p:cNvPr id="4" name="Shape 2"/>
-          <p:cNvSpPr/>
-          <p:nvPr/>
-        </p:nvSpPr>
-        <p:spPr>
-          <a:xfrm>
-            <a:off x="457200" y="1097280"/>
-            <a:ext cx="8229600" cy="914400"/>
+          <p:cNvPr id="2" name="Shape 0"/>
+          <p:cNvSpPr/>
+          <p:nvPr/>
+        </p:nvSpPr>
+        <p:spPr>
+          <a:xfrm>
+            <a:off x="0" y="0"/>
+            <a:ext cx="9144000" cy="566928"/>
+          </a:xfrm>
+          <a:prstGeom prst="rect">
+            <a:avLst/>
+          </a:prstGeom>
+          <a:solidFill>
+            <a:srgbClr val="55C8E8"/>
+          </a:solidFill>
+          <a:ln/>
+        </p:spPr>
+      </p:sp>
+      <p:sp>
+        <p:nvSpPr>
+          <p:cNvPr id="3" name="Text 1"/>
+          <p:cNvSpPr/>
+          <p:nvPr/>
+        </p:nvSpPr>
+        <p:spPr>
+          <a:xfrm>
+            <a:off x="365760" y="54864"/>
+            <a:ext cx="8412480" cy="457200"/>
+          </a:xfrm>
+          <a:prstGeom prst="rect">
+            <a:avLst/>
+          </a:prstGeom>
+          <a:noFill/>
+          <a:ln/>
+        </p:spPr>
+        <p:txBody>
+          <a:bodyPr wrap="square" lIns="0" tIns="0" rIns="0" bIns="0" rtlCol="0" anchor="ctr"/>
+          <a:lstStyle/>
+          <a:p>
+            <a:pPr indent="0" marL="0">
+              <a:buNone/>
+            </a:pPr>
+            <a:r>
+              <a:rPr lang="en-US" sz="2200" b="1" dirty="0">
+                <a:solidFill>
+                  <a:srgbClr val="FFFFFF"/>
+                </a:solidFill>
+                <a:latin typeface="Calibri" pitchFamily="34" charset="0"/>
+                <a:ea typeface="Calibri" pitchFamily="34" charset="-122"/>
+                <a:cs typeface="Calibri" pitchFamily="34" charset="-120"/>
+              </a:rPr>
+              <a:t>✏️  Daily Oral Language</a:t>
+            </a:r>
+            <a:endParaRPr lang="en-US" sz="2200" dirty="0"/>
+          </a:p>
+        </p:txBody>
+      </p:sp>
+      <p:sp>
+        <p:nvSpPr>
+          <p:cNvPr id="4" name="Text 2"/>
+          <p:cNvSpPr/>
+          <p:nvPr/>
+        </p:nvSpPr>
+        <p:spPr>
+          <a:xfrm>
+            <a:off x="365760" y="804672"/>
+            <a:ext cx="8229600" cy="237744"/>
+          </a:xfrm>
+          <a:prstGeom prst="rect">
+            <a:avLst/>
+          </a:prstGeom>
+          <a:noFill/>
+          <a:ln/>
+        </p:spPr>
+        <p:txBody>
+          <a:bodyPr wrap="square" lIns="0" tIns="0" rIns="0" bIns="0" rtlCol="0" anchor="ctr"/>
+          <a:lstStyle/>
+          <a:p>
+            <a:pPr indent="0" marL="0">
+              <a:buNone/>
+            </a:pPr>
+            <a:r>
+              <a:rPr lang="en-US" sz="1100" b="1" spc="100" kern="0" dirty="0">
+                <a:solidFill>
+                  <a:srgbClr val="55C8E8"/>
+                </a:solidFill>
+                <a:latin typeface="Calibri" pitchFamily="34" charset="0"/>
+                <a:ea typeface="Calibri" pitchFamily="34" charset="-122"/>
+                <a:cs typeface="Calibri" pitchFamily="34" charset="-120"/>
+              </a:rPr>
+              <a:t>KEY GRAMMAR POINTS IN THE MODEL</a:t>
+            </a:r>
+            <a:endParaRPr lang="en-US" sz="1100" dirty="0"/>
+          </a:p>
+        </p:txBody>
+      </p:sp>
+      <p:sp>
+        <p:nvSpPr>
+          <p:cNvPr id="5" name="Shape 3"/>
+          <p:cNvSpPr/>
+          <p:nvPr/>
+        </p:nvSpPr>
+        <p:spPr>
+          <a:xfrm>
+            <a:off x="365760" y="1097280"/>
+            <a:ext cx="8412480" cy="548640"/>
           </a:xfrm>
           <a:prstGeom prst="roundRect">
             <a:avLst>
-              <a:gd name="adj" fmla="val 10000"/>
+              <a:gd name="adj" fmla="val 16667"/>
             </a:avLst>
           </a:prstGeom>
           <a:solidFill>
-            <a:srgbClr val="E8F8EF"/>
+            <a:srgbClr val="F8FAFC"/>
           </a:solidFill>
-          <a:ln w="12700">
-            <a:solidFill>
-              <a:srgbClr val="34B76F"/>
-            </a:solidFill>
-            <a:prstDash val="solid"/>
-          </a:ln>
+          <a:ln/>
           <a:effectLst>
             <a:outerShdw sx="100000" sy="100000" kx="0" ky="0" algn="bl" rotWithShape="0" blurRad="101600" dist="38100" dir="2700000">
               <a:srgbClr val="000000">
@@ -4968,30 +4630,44 @@
       </p:sp>
       <p:sp>
         <p:nvSpPr>
-          <p:cNvPr id="5" name="Text 3"/>
-          <p:cNvSpPr/>
-          <p:nvPr/>
-        </p:nvSpPr>
-        <p:spPr>
-          <a:xfrm>
-            <a:off x="640080" y="1207008"/>
-            <a:ext cx="7863840" cy="685800"/>
-          </a:xfrm>
-          <a:prstGeom prst="rect">
-            <a:avLst/>
-          </a:prstGeom>
-          <a:noFill/>
-          <a:ln/>
-        </p:spPr>
-        <p:txBody>
-          <a:bodyPr wrap="square" lIns="0" tIns="0" rIns="0" bIns="0" rtlCol="0" anchor="ctr"/>
-          <a:lstStyle/>
-          <a:p>
-            <a:pPr indent="0" marL="0">
-              <a:buNone/>
-            </a:pPr>
-            <a:r>
-              <a:rPr lang="en-US" sz="1800" i="1" dirty="0">
+          <p:cNvPr id="6" name="Text 4"/>
+          <p:cNvSpPr/>
+          <p:nvPr/>
+        </p:nvSpPr>
+        <p:spPr>
+          <a:xfrm>
+            <a:off x="594360" y="1188720"/>
+            <a:ext cx="7863840" cy="365760"/>
+          </a:xfrm>
+          <a:prstGeom prst="rect">
+            <a:avLst/>
+          </a:prstGeom>
+          <a:noFill/>
+          <a:ln/>
+        </p:spPr>
+        <p:txBody>
+          <a:bodyPr wrap="square" lIns="0" tIns="0" rIns="0" bIns="0" rtlCol="0" anchor="ctr"/>
+          <a:lstStyle/>
+          <a:p>
+            <a:pPr indent="0" marL="0">
+              <a:buNone/>
+            </a:pPr>
+            <a:r>
+              <a:rPr lang="en-US" sz="1500" b="1" dirty="0">
+                <a:solidFill>
+                  <a:srgbClr val="0E1C42"/>
+                </a:solidFill>
+                <a:latin typeface="Calibri" pitchFamily="34" charset="0"/>
+                <a:ea typeface="Calibri" pitchFamily="34" charset="-122"/>
+                <a:cs typeface="Calibri" pitchFamily="34" charset="-120"/>
+              </a:rPr>
+              <a:t>After  </a:t>
+            </a:r>
+            <a:pPr indent="0" marL="0">
+              <a:buNone/>
+            </a:pPr>
+            <a:r>
+              <a:rPr lang="en-US" sz="1300" dirty="0">
                 <a:solidFill>
                   <a:srgbClr val="1E293B"/>
                 </a:solidFill>
@@ -4999,9 +4675,255 @@
                 <a:ea typeface="Calibri" pitchFamily="34" charset="-122"/>
                 <a:cs typeface="Calibri" pitchFamily="34" charset="-120"/>
               </a:rPr>
-              <a:t>After Narnia, four children queens.</a:t>
-            </a:r>
-            <a:endParaRPr lang="en-US" sz="1800" dirty="0"/>
+              <a:t>Connecting word — begins the dependent clause.</a:t>
+            </a:r>
+            <a:endParaRPr lang="en-US" sz="1500" dirty="0"/>
+          </a:p>
+        </p:txBody>
+      </p:sp>
+      <p:sp>
+        <p:nvSpPr>
+          <p:cNvPr id="7" name="Shape 5"/>
+          <p:cNvSpPr/>
+          <p:nvPr/>
+        </p:nvSpPr>
+        <p:spPr>
+          <a:xfrm>
+            <a:off x="365760" y="1719072"/>
+            <a:ext cx="8412480" cy="548640"/>
+          </a:xfrm>
+          <a:prstGeom prst="roundRect">
+            <a:avLst>
+              <a:gd name="adj" fmla="val 16667"/>
+            </a:avLst>
+          </a:prstGeom>
+          <a:solidFill>
+            <a:srgbClr val="FFFFFF"/>
+          </a:solidFill>
+          <a:ln/>
+          <a:effectLst>
+            <a:outerShdw sx="100000" sy="100000" kx="0" ky="0" algn="bl" rotWithShape="0" blurRad="101600" dist="38100" dir="2700000">
+              <a:srgbClr val="000000">
+                <a:alpha val="12000"/>
+              </a:srgbClr>
+            </a:outerShdw>
+          </a:effectLst>
+        </p:spPr>
+      </p:sp>
+      <p:sp>
+        <p:nvSpPr>
+          <p:cNvPr id="8" name="Text 6"/>
+          <p:cNvSpPr/>
+          <p:nvPr/>
+        </p:nvSpPr>
+        <p:spPr>
+          <a:xfrm>
+            <a:off x="594360" y="1810512"/>
+            <a:ext cx="7863840" cy="365760"/>
+          </a:xfrm>
+          <a:prstGeom prst="rect">
+            <a:avLst/>
+          </a:prstGeom>
+          <a:noFill/>
+          <a:ln/>
+        </p:spPr>
+        <p:txBody>
+          <a:bodyPr wrap="square" lIns="0" tIns="0" rIns="0" bIns="0" rtlCol="0" anchor="ctr"/>
+          <a:lstStyle/>
+          <a:p>
+            <a:pPr indent="0" marL="0">
+              <a:buNone/>
+            </a:pPr>
+            <a:r>
+              <a:rPr lang="en-US" sz="1500" b="1" dirty="0">
+                <a:solidFill>
+                  <a:srgbClr val="0E1C42"/>
+                </a:solidFill>
+                <a:latin typeface="Calibri" pitchFamily="34" charset="0"/>
+                <a:ea typeface="Calibri" pitchFamily="34" charset="-122"/>
+                <a:cs typeface="Calibri" pitchFamily="34" charset="-120"/>
+              </a:rPr>
+              <a:t>Narnia,  </a:t>
+            </a:r>
+            <a:pPr indent="0" marL="0">
+              <a:buNone/>
+            </a:pPr>
+            <a:r>
+              <a:rPr lang="en-US" sz="1300" dirty="0">
+                <a:solidFill>
+                  <a:srgbClr val="1E293B"/>
+                </a:solidFill>
+                <a:latin typeface="Calibri" pitchFamily="34" charset="0"/>
+                <a:ea typeface="Calibri" pitchFamily="34" charset="-122"/>
+                <a:cs typeface="Calibri" pitchFamily="34" charset="-120"/>
+              </a:rPr>
+              <a:t>Proper noun — capital N; comma after the dependent clause.</a:t>
+            </a:r>
+            <a:endParaRPr lang="en-US" sz="1500" dirty="0"/>
+          </a:p>
+        </p:txBody>
+      </p:sp>
+      <p:sp>
+        <p:nvSpPr>
+          <p:cNvPr id="9" name="Shape 7"/>
+          <p:cNvSpPr/>
+          <p:nvPr/>
+        </p:nvSpPr>
+        <p:spPr>
+          <a:xfrm>
+            <a:off x="365760" y="2340864"/>
+            <a:ext cx="8412480" cy="548640"/>
+          </a:xfrm>
+          <a:prstGeom prst="roundRect">
+            <a:avLst>
+              <a:gd name="adj" fmla="val 16667"/>
+            </a:avLst>
+          </a:prstGeom>
+          <a:solidFill>
+            <a:srgbClr val="F8FAFC"/>
+          </a:solidFill>
+          <a:ln/>
+          <a:effectLst>
+            <a:outerShdw sx="100000" sy="100000" kx="0" ky="0" algn="bl" rotWithShape="0" blurRad="101600" dist="38100" dir="2700000">
+              <a:srgbClr val="000000">
+                <a:alpha val="12000"/>
+              </a:srgbClr>
+            </a:outerShdw>
+          </a:effectLst>
+        </p:spPr>
+      </p:sp>
+      <p:sp>
+        <p:nvSpPr>
+          <p:cNvPr id="10" name="Text 8"/>
+          <p:cNvSpPr/>
+          <p:nvPr/>
+        </p:nvSpPr>
+        <p:spPr>
+          <a:xfrm>
+            <a:off x="594360" y="2432304"/>
+            <a:ext cx="7863840" cy="365760"/>
+          </a:xfrm>
+          <a:prstGeom prst="rect">
+            <a:avLst/>
+          </a:prstGeom>
+          <a:noFill/>
+          <a:ln/>
+        </p:spPr>
+        <p:txBody>
+          <a:bodyPr wrap="square" lIns="0" tIns="0" rIns="0" bIns="0" rtlCol="0" anchor="ctr"/>
+          <a:lstStyle/>
+          <a:p>
+            <a:pPr indent="0" marL="0">
+              <a:buNone/>
+            </a:pPr>
+            <a:r>
+              <a:rPr lang="en-US" sz="1500" b="1" dirty="0">
+                <a:solidFill>
+                  <a:srgbClr val="0E1C42"/>
+                </a:solidFill>
+                <a:latin typeface="Calibri" pitchFamily="34" charset="0"/>
+                <a:ea typeface="Calibri" pitchFamily="34" charset="-122"/>
+                <a:cs typeface="Calibri" pitchFamily="34" charset="-120"/>
+              </a:rPr>
+              <a:t>four  </a:t>
+            </a:r>
+            <a:pPr indent="0" marL="0">
+              <a:buNone/>
+            </a:pPr>
+            <a:r>
+              <a:rPr lang="en-US" sz="1300" dirty="0">
+                <a:solidFill>
+                  <a:srgbClr val="1E293B"/>
+                </a:solidFill>
+                <a:latin typeface="Calibri" pitchFamily="34" charset="0"/>
+                <a:ea typeface="Calibri" pitchFamily="34" charset="-122"/>
+                <a:cs typeface="Calibri" pitchFamily="34" charset="-120"/>
+              </a:rPr>
+              <a:t>Number — lowercase in a sentence.</a:t>
+            </a:r>
+            <a:endParaRPr lang="en-US" sz="1500" dirty="0"/>
+          </a:p>
+        </p:txBody>
+      </p:sp>
+      <p:sp>
+        <p:nvSpPr>
+          <p:cNvPr id="11" name="Shape 9"/>
+          <p:cNvSpPr/>
+          <p:nvPr/>
+        </p:nvSpPr>
+        <p:spPr>
+          <a:xfrm>
+            <a:off x="365760" y="2962656"/>
+            <a:ext cx="8412480" cy="548640"/>
+          </a:xfrm>
+          <a:prstGeom prst="roundRect">
+            <a:avLst>
+              <a:gd name="adj" fmla="val 16667"/>
+            </a:avLst>
+          </a:prstGeom>
+          <a:solidFill>
+            <a:srgbClr val="FFFFFF"/>
+          </a:solidFill>
+          <a:ln/>
+          <a:effectLst>
+            <a:outerShdw sx="100000" sy="100000" kx="0" ky="0" algn="bl" rotWithShape="0" blurRad="101600" dist="38100" dir="2700000">
+              <a:srgbClr val="000000">
+                <a:alpha val="12000"/>
+              </a:srgbClr>
+            </a:outerShdw>
+          </a:effectLst>
+        </p:spPr>
+      </p:sp>
+      <p:sp>
+        <p:nvSpPr>
+          <p:cNvPr id="12" name="Text 10"/>
+          <p:cNvSpPr/>
+          <p:nvPr/>
+        </p:nvSpPr>
+        <p:spPr>
+          <a:xfrm>
+            <a:off x="594360" y="3054096"/>
+            <a:ext cx="7863840" cy="365760"/>
+          </a:xfrm>
+          <a:prstGeom prst="rect">
+            <a:avLst/>
+          </a:prstGeom>
+          <a:noFill/>
+          <a:ln/>
+        </p:spPr>
+        <p:txBody>
+          <a:bodyPr wrap="square" lIns="0" tIns="0" rIns="0" bIns="0" rtlCol="0" anchor="ctr"/>
+          <a:lstStyle/>
+          <a:p>
+            <a:pPr indent="0" marL="0">
+              <a:buNone/>
+            </a:pPr>
+            <a:r>
+              <a:rPr lang="en-US" sz="1500" b="1" dirty="0">
+                <a:solidFill>
+                  <a:srgbClr val="0E1C42"/>
+                </a:solidFill>
+                <a:latin typeface="Calibri" pitchFamily="34" charset="0"/>
+                <a:ea typeface="Calibri" pitchFamily="34" charset="-122"/>
+                <a:cs typeface="Calibri" pitchFamily="34" charset="-120"/>
+              </a:rPr>
+              <a:t>children  </a:t>
+            </a:r>
+            <a:pPr indent="0" marL="0">
+              <a:buNone/>
+            </a:pPr>
+            <a:r>
+              <a:rPr lang="en-US" sz="1300" dirty="0">
+                <a:solidFill>
+                  <a:srgbClr val="1E293B"/>
+                </a:solidFill>
+                <a:latin typeface="Calibri" pitchFamily="34" charset="0"/>
+                <a:ea typeface="Calibri" pitchFamily="34" charset="-122"/>
+                <a:cs typeface="Calibri" pitchFamily="34" charset="-120"/>
+              </a:rPr>
+              <a:t>Common noun — lowercase.</a:t>
+            </a:r>
+            <a:endParaRPr lang="en-US" sz="1500" dirty="0"/>
           </a:p>
         </p:txBody>
       </p:sp>
@@ -5019,7 +4941,7 @@
     <p:bg>
       <p:bgPr>
         <a:solidFill>
-          <a:srgbClr val="E5F7FC"/>
+          <a:srgbClr val="F8FAFC"/>
         </a:solidFill>
       </p:bgPr>
     </p:bg>
@@ -5039,149 +4961,124 @@
       </p:grpSpPr>
       <p:sp>
         <p:nvSpPr>
-          <p:cNvPr id="2" name="Text 0"/>
-          <p:cNvSpPr/>
-          <p:nvPr/>
-        </p:nvSpPr>
-        <p:spPr>
-          <a:xfrm>
-            <a:off x="365760" y="164592"/>
-            <a:ext cx="5943600" cy="566928"/>
-          </a:xfrm>
-          <a:prstGeom prst="rect">
-            <a:avLst/>
-          </a:prstGeom>
-          <a:noFill/>
-          <a:ln/>
-        </p:spPr>
-        <p:txBody>
-          <a:bodyPr wrap="square" lIns="0" tIns="0" rIns="0" bIns="0" rtlCol="0" anchor="ctr"/>
-          <a:lstStyle/>
-          <a:p>
-            <a:pPr algn="l" indent="0" marL="0">
-              <a:buNone/>
-            </a:pPr>
-            <a:r>
-              <a:rPr lang="en-US" sz="2800" b="1" dirty="0">
-                <a:solidFill>
-                  <a:srgbClr val="0E1C42"/>
-                </a:solidFill>
-                <a:latin typeface="Calibri" pitchFamily="34" charset="0"/>
-                <a:ea typeface="Calibri" pitchFamily="34" charset="-122"/>
-                <a:cs typeface="Calibri" pitchFamily="34" charset="-120"/>
-              </a:rPr>
-              <a:t>🔧 Fix-It Sentence — Now You Try</a:t>
-            </a:r>
-            <a:endParaRPr lang="en-US" sz="2800" dirty="0"/>
-          </a:p>
-        </p:txBody>
-      </p:sp>
-      <p:sp>
-        <p:nvSpPr>
-          <p:cNvPr id="3" name="Shape 1"/>
+          <p:cNvPr id="2" name="Shape 0"/>
+          <p:cNvSpPr/>
+          <p:nvPr/>
+        </p:nvSpPr>
+        <p:spPr>
+          <a:xfrm>
+            <a:off x="0" y="0"/>
+            <a:ext cx="9144000" cy="566928"/>
+          </a:xfrm>
+          <a:prstGeom prst="rect">
+            <a:avLst/>
+          </a:prstGeom>
+          <a:solidFill>
+            <a:srgbClr val="55C8E8"/>
+          </a:solidFill>
+          <a:ln/>
+        </p:spPr>
+      </p:sp>
+      <p:sp>
+        <p:nvSpPr>
+          <p:cNvPr id="3" name="Text 1"/>
+          <p:cNvSpPr/>
+          <p:nvPr/>
+        </p:nvSpPr>
+        <p:spPr>
+          <a:xfrm>
+            <a:off x="365760" y="54864"/>
+            <a:ext cx="8412480" cy="457200"/>
+          </a:xfrm>
+          <a:prstGeom prst="rect">
+            <a:avLst/>
+          </a:prstGeom>
+          <a:noFill/>
+          <a:ln/>
+        </p:spPr>
+        <p:txBody>
+          <a:bodyPr wrap="square" lIns="0" tIns="0" rIns="0" bIns="0" rtlCol="0" anchor="ctr"/>
+          <a:lstStyle/>
+          <a:p>
+            <a:pPr indent="0" marL="0">
+              <a:buNone/>
+            </a:pPr>
+            <a:r>
+              <a:rPr lang="en-US" sz="2200" b="1" dirty="0">
+                <a:solidFill>
+                  <a:srgbClr val="FFFFFF"/>
+                </a:solidFill>
+                <a:latin typeface="Calibri" pitchFamily="34" charset="0"/>
+                <a:ea typeface="Calibri" pitchFamily="34" charset="-122"/>
+                <a:cs typeface="Calibri" pitchFamily="34" charset="-120"/>
+              </a:rPr>
+              <a:t>✏️  Daily Oral Language</a:t>
+            </a:r>
+            <a:endParaRPr lang="en-US" sz="2200" dirty="0"/>
+          </a:p>
+        </p:txBody>
+      </p:sp>
+      <p:sp>
+        <p:nvSpPr>
+          <p:cNvPr id="4" name="Text 2"/>
           <p:cNvSpPr/>
           <p:nvPr/>
         </p:nvSpPr>
         <p:spPr>
           <a:xfrm>
             <a:off x="365760" y="749808"/>
-            <a:ext cx="8412480" cy="0"/>
-          </a:xfrm>
-          <a:prstGeom prst="line">
-            <a:avLst/>
-          </a:prstGeom>
-          <a:noFill/>
+            <a:ext cx="8229600" cy="237744"/>
+          </a:xfrm>
+          <a:prstGeom prst="rect">
+            <a:avLst/>
+          </a:prstGeom>
+          <a:noFill/>
+          <a:ln/>
+        </p:spPr>
+        <p:txBody>
+          <a:bodyPr wrap="square" lIns="0" tIns="0" rIns="0" bIns="0" rtlCol="0" anchor="ctr"/>
+          <a:lstStyle/>
+          <a:p>
+            <a:pPr indent="0" marL="0">
+              <a:buNone/>
+            </a:pPr>
+            <a:r>
+              <a:rPr lang="en-US" sz="1100" b="1" spc="100" kern="0" dirty="0">
+                <a:solidFill>
+                  <a:srgbClr val="55C8E8"/>
+                </a:solidFill>
+                <a:latin typeface="Calibri" pitchFamily="34" charset="0"/>
+                <a:ea typeface="Calibri" pitchFamily="34" charset="-122"/>
+                <a:cs typeface="Calibri" pitchFamily="34" charset="-120"/>
+              </a:rPr>
+              <a:t>NOW FIX THIS ONE</a:t>
+            </a:r>
+            <a:endParaRPr lang="en-US" sz="1100" dirty="0"/>
+          </a:p>
+        </p:txBody>
+      </p:sp>
+      <p:sp>
+        <p:nvSpPr>
+          <p:cNvPr id="5" name="Shape 3"/>
+          <p:cNvSpPr/>
+          <p:nvPr/>
+        </p:nvSpPr>
+        <p:spPr>
+          <a:xfrm>
+            <a:off x="365760" y="1024128"/>
+            <a:ext cx="8412480" cy="777240"/>
+          </a:xfrm>
+          <a:prstGeom prst="roundRect">
+            <a:avLst>
+              <a:gd name="adj" fmla="val 11765"/>
+            </a:avLst>
+          </a:prstGeom>
+          <a:solidFill>
+            <a:srgbClr val="FFFFFF"/>
+          </a:solidFill>
           <a:ln w="19050">
             <a:solidFill>
-              <a:srgbClr val="4A90D9"/>
-            </a:solidFill>
-            <a:prstDash val="solid"/>
-          </a:ln>
-        </p:spPr>
-      </p:sp>
-      <p:sp>
-        <p:nvSpPr>
-          <p:cNvPr id="4" name="Shape 2"/>
-          <p:cNvSpPr/>
-          <p:nvPr/>
-        </p:nvSpPr>
-        <p:spPr>
-          <a:xfrm>
-            <a:off x="6492240" y="173736"/>
-            <a:ext cx="2286000" cy="502920"/>
-          </a:xfrm>
-          <a:prstGeom prst="roundRect">
-            <a:avLst>
-              <a:gd name="adj" fmla="val 21818"/>
-            </a:avLst>
-          </a:prstGeom>
-          <a:solidFill>
-            <a:srgbClr val="4A90D9"/>
-          </a:solidFill>
-          <a:ln/>
-        </p:spPr>
-      </p:sp>
-      <p:sp>
-        <p:nvSpPr>
-          <p:cNvPr id="5" name="Text 3"/>
-          <p:cNvSpPr/>
-          <p:nvPr/>
-        </p:nvSpPr>
-        <p:spPr>
-          <a:xfrm>
-            <a:off x="6492240" y="173736"/>
-            <a:ext cx="2286000" cy="502920"/>
-          </a:xfrm>
-          <a:prstGeom prst="rect">
-            <a:avLst/>
-          </a:prstGeom>
-          <a:noFill/>
-          <a:ln/>
-        </p:spPr>
-        <p:txBody>
-          <a:bodyPr wrap="square" lIns="0" tIns="0" rIns="0" bIns="0" rtlCol="0" anchor="ctr"/>
-          <a:lstStyle/>
-          <a:p>
-            <a:pPr algn="ctr" indent="0" marL="0">
-              <a:buNone/>
-            </a:pPr>
-            <a:r>
-              <a:rPr lang="en-US" sz="1100" b="1" dirty="0">
-                <a:solidFill>
-                  <a:srgbClr val="0E1C42"/>
-                </a:solidFill>
-                <a:latin typeface="Calibri" pitchFamily="34" charset="0"/>
-                <a:ea typeface="Calibri" pitchFamily="34" charset="-122"/>
-                <a:cs typeface="Calibri" pitchFamily="34" charset="-120"/>
-              </a:rPr>
-              <a:t>CHAT PROMPT</a:t>
-            </a:r>
-            <a:endParaRPr lang="en-US" sz="1100" dirty="0"/>
-          </a:p>
-        </p:txBody>
-      </p:sp>
-      <p:sp>
-        <p:nvSpPr>
-          <p:cNvPr id="6" name="Shape 4"/>
-          <p:cNvSpPr/>
-          <p:nvPr/>
-        </p:nvSpPr>
-        <p:spPr>
-          <a:xfrm>
-            <a:off x="457200" y="1005840"/>
-            <a:ext cx="8229600" cy="640080"/>
-          </a:xfrm>
-          <a:prstGeom prst="roundRect">
-            <a:avLst>
-              <a:gd name="adj" fmla="val 14286"/>
-            </a:avLst>
-          </a:prstGeom>
-          <a:solidFill>
-            <a:srgbClr val="F8FAFC"/>
-          </a:solidFill>
-          <a:ln w="12700">
-            <a:solidFill>
-              <a:srgbClr val="C7922C"/>
+              <a:srgbClr val="55C8E8"/>
             </a:solidFill>
             <a:prstDash val="solid"/>
           </a:ln>
@@ -5196,40 +5093,79 @@
       </p:sp>
       <p:sp>
         <p:nvSpPr>
+          <p:cNvPr id="6" name="Text 4"/>
+          <p:cNvSpPr/>
+          <p:nvPr/>
+        </p:nvSpPr>
+        <p:spPr>
+          <a:xfrm>
+            <a:off x="594360" y="1152144"/>
+            <a:ext cx="7955280" cy="521208"/>
+          </a:xfrm>
+          <a:prstGeom prst="rect">
+            <a:avLst/>
+          </a:prstGeom>
+          <a:noFill/>
+          <a:ln/>
+        </p:spPr>
+        <p:txBody>
+          <a:bodyPr wrap="square" lIns="0" tIns="0" rIns="0" bIns="0" rtlCol="0" anchor="ctr"/>
+          <a:lstStyle/>
+          <a:p>
+            <a:pPr indent="0" marL="0">
+              <a:buNone/>
+            </a:pPr>
+            <a:r>
+              <a:rPr lang="en-US" sz="1700" dirty="0">
+                <a:solidFill>
+                  <a:srgbClr val="1E293B"/>
+                </a:solidFill>
+                <a:latin typeface="Calibri" pitchFamily="34" charset="0"/>
+                <a:ea typeface="Calibri" pitchFamily="34" charset="-122"/>
+                <a:cs typeface="Calibri" pitchFamily="34" charset="-120"/>
+              </a:rPr>
+              <a:t>the children reigned over narnia for many years but they never forgot their home and the wardrobe that had brought them there</a:t>
+            </a:r>
+            <a:endParaRPr lang="en-US" sz="1700" dirty="0"/>
+          </a:p>
+        </p:txBody>
+      </p:sp>
+      <p:sp>
+        <p:nvSpPr>
           <p:cNvPr id="7" name="Text 5"/>
           <p:cNvSpPr/>
           <p:nvPr/>
         </p:nvSpPr>
         <p:spPr>
           <a:xfrm>
-            <a:off x="640080" y="1115568"/>
-            <a:ext cx="7863840" cy="411480"/>
-          </a:xfrm>
-          <a:prstGeom prst="rect">
-            <a:avLst/>
-          </a:prstGeom>
-          <a:noFill/>
-          <a:ln/>
-        </p:spPr>
-        <p:txBody>
-          <a:bodyPr wrap="square" lIns="0" tIns="0" rIns="0" bIns="0" rtlCol="0" anchor="ctr"/>
-          <a:lstStyle/>
-          <a:p>
-            <a:pPr indent="0" marL="0">
-              <a:buNone/>
-            </a:pPr>
-            <a:r>
-              <a:rPr lang="en-US" sz="1800" i="1" dirty="0">
-                <a:solidFill>
-                  <a:srgbClr val="1E293B"/>
-                </a:solidFill>
-                <a:latin typeface="Calibri" pitchFamily="34" charset="0"/>
-                <a:ea typeface="Calibri" pitchFamily="34" charset="-122"/>
-                <a:cs typeface="Calibri" pitchFamily="34" charset="-120"/>
-              </a:rPr>
-              <a:t>the children reigned over narnia for many years but they never forgot their home and the wardrobe that had brought them there</a:t>
-            </a:r>
-            <a:endParaRPr lang="en-US" sz="1800" dirty="0"/>
+            <a:off x="365760" y="2788920"/>
+            <a:ext cx="8412480" cy="365760"/>
+          </a:xfrm>
+          <a:prstGeom prst="rect">
+            <a:avLst/>
+          </a:prstGeom>
+          <a:noFill/>
+          <a:ln/>
+        </p:spPr>
+        <p:txBody>
+          <a:bodyPr wrap="square" lIns="0" tIns="0" rIns="0" bIns="0" rtlCol="0" anchor="ctr"/>
+          <a:lstStyle/>
+          <a:p>
+            <a:pPr indent="0" marL="0">
+              <a:buNone/>
+            </a:pPr>
+            <a:r>
+              <a:rPr lang="en-US" sz="1600" b="1" dirty="0">
+                <a:solidFill>
+                  <a:srgbClr val="0E1C42"/>
+                </a:solidFill>
+                <a:latin typeface="Calibri" pitchFamily="34" charset="0"/>
+                <a:ea typeface="Calibri" pitchFamily="34" charset="-122"/>
+                <a:cs typeface="Calibri" pitchFamily="34" charset="-120"/>
+              </a:rPr>
+              <a:t>Rewrite the sentence correctly in your notebook.</a:t>
+            </a:r>
+            <a:endParaRPr lang="en-US" sz="1600" dirty="0"/>
           </a:p>
         </p:txBody>
       </p:sp>
@@ -5247,7 +5183,7 @@
     <p:bg>
       <p:bgPr>
         <a:solidFill>
-          <a:srgbClr val="E5F7FC"/>
+          <a:srgbClr val="F8FAFC"/>
         </a:solidFill>
       </p:bgPr>
     </p:bg>
@@ -5267,149 +5203,124 @@
       </p:grpSpPr>
       <p:sp>
         <p:nvSpPr>
-          <p:cNvPr id="2" name="Text 0"/>
-          <p:cNvSpPr/>
-          <p:nvPr/>
-        </p:nvSpPr>
-        <p:spPr>
-          <a:xfrm>
-            <a:off x="365760" y="164592"/>
-            <a:ext cx="5943600" cy="566928"/>
-          </a:xfrm>
-          <a:prstGeom prst="rect">
-            <a:avLst/>
-          </a:prstGeom>
-          <a:noFill/>
-          <a:ln/>
-        </p:spPr>
-        <p:txBody>
-          <a:bodyPr wrap="square" lIns="0" tIns="0" rIns="0" bIns="0" rtlCol="0" anchor="ctr"/>
-          <a:lstStyle/>
-          <a:p>
-            <a:pPr algn="l" indent="0" marL="0">
-              <a:buNone/>
-            </a:pPr>
-            <a:r>
-              <a:rPr lang="en-US" sz="2800" b="1" dirty="0">
-                <a:solidFill>
-                  <a:srgbClr val="0E1C42"/>
-                </a:solidFill>
-                <a:latin typeface="Calibri" pitchFamily="34" charset="0"/>
-                <a:ea typeface="Calibri" pitchFamily="34" charset="-122"/>
-                <a:cs typeface="Calibri" pitchFamily="34" charset="-120"/>
-              </a:rPr>
-              <a:t>🔧 Fix-It Sentence — Answer Revealed</a:t>
-            </a:r>
-            <a:endParaRPr lang="en-US" sz="2800" dirty="0"/>
-          </a:p>
-        </p:txBody>
-      </p:sp>
-      <p:sp>
-        <p:nvSpPr>
-          <p:cNvPr id="3" name="Shape 1"/>
+          <p:cNvPr id="2" name="Shape 0"/>
+          <p:cNvSpPr/>
+          <p:nvPr/>
+        </p:nvSpPr>
+        <p:spPr>
+          <a:xfrm>
+            <a:off x="0" y="0"/>
+            <a:ext cx="9144000" cy="566928"/>
+          </a:xfrm>
+          <a:prstGeom prst="rect">
+            <a:avLst/>
+          </a:prstGeom>
+          <a:solidFill>
+            <a:srgbClr val="55C8E8"/>
+          </a:solidFill>
+          <a:ln/>
+        </p:spPr>
+      </p:sp>
+      <p:sp>
+        <p:nvSpPr>
+          <p:cNvPr id="3" name="Text 1"/>
+          <p:cNvSpPr/>
+          <p:nvPr/>
+        </p:nvSpPr>
+        <p:spPr>
+          <a:xfrm>
+            <a:off x="365760" y="54864"/>
+            <a:ext cx="8412480" cy="457200"/>
+          </a:xfrm>
+          <a:prstGeom prst="rect">
+            <a:avLst/>
+          </a:prstGeom>
+          <a:noFill/>
+          <a:ln/>
+        </p:spPr>
+        <p:txBody>
+          <a:bodyPr wrap="square" lIns="0" tIns="0" rIns="0" bIns="0" rtlCol="0" anchor="ctr"/>
+          <a:lstStyle/>
+          <a:p>
+            <a:pPr indent="0" marL="0">
+              <a:buNone/>
+            </a:pPr>
+            <a:r>
+              <a:rPr lang="en-US" sz="2200" b="1" dirty="0">
+                <a:solidFill>
+                  <a:srgbClr val="FFFFFF"/>
+                </a:solidFill>
+                <a:latin typeface="Calibri" pitchFamily="34" charset="0"/>
+                <a:ea typeface="Calibri" pitchFamily="34" charset="-122"/>
+                <a:cs typeface="Calibri" pitchFamily="34" charset="-120"/>
+              </a:rPr>
+              <a:t>✏️  Daily Oral Language</a:t>
+            </a:r>
+            <a:endParaRPr lang="en-US" sz="2200" dirty="0"/>
+          </a:p>
+        </p:txBody>
+      </p:sp>
+      <p:sp>
+        <p:nvSpPr>
+          <p:cNvPr id="4" name="Text 2"/>
           <p:cNvSpPr/>
           <p:nvPr/>
         </p:nvSpPr>
         <p:spPr>
           <a:xfrm>
             <a:off x="365760" y="749808"/>
-            <a:ext cx="8412480" cy="0"/>
-          </a:xfrm>
-          <a:prstGeom prst="line">
-            <a:avLst/>
-          </a:prstGeom>
-          <a:noFill/>
+            <a:ext cx="8229600" cy="237744"/>
+          </a:xfrm>
+          <a:prstGeom prst="rect">
+            <a:avLst/>
+          </a:prstGeom>
+          <a:noFill/>
+          <a:ln/>
+        </p:spPr>
+        <p:txBody>
+          <a:bodyPr wrap="square" lIns="0" tIns="0" rIns="0" bIns="0" rtlCol="0" anchor="ctr"/>
+          <a:lstStyle/>
+          <a:p>
+            <a:pPr indent="0" marL="0">
+              <a:buNone/>
+            </a:pPr>
+            <a:r>
+              <a:rPr lang="en-US" sz="1100" b="1" spc="100" kern="0" dirty="0">
+                <a:solidFill>
+                  <a:srgbClr val="55C8E8"/>
+                </a:solidFill>
+                <a:latin typeface="Calibri" pitchFamily="34" charset="0"/>
+                <a:ea typeface="Calibri" pitchFamily="34" charset="-122"/>
+                <a:cs typeface="Calibri" pitchFamily="34" charset="-120"/>
+              </a:rPr>
+              <a:t>NOW FIX THIS ONE</a:t>
+            </a:r>
+            <a:endParaRPr lang="en-US" sz="1100" dirty="0"/>
+          </a:p>
+        </p:txBody>
+      </p:sp>
+      <p:sp>
+        <p:nvSpPr>
+          <p:cNvPr id="5" name="Shape 3"/>
+          <p:cNvSpPr/>
+          <p:nvPr/>
+        </p:nvSpPr>
+        <p:spPr>
+          <a:xfrm>
+            <a:off x="365760" y="1024128"/>
+            <a:ext cx="8412480" cy="777240"/>
+          </a:xfrm>
+          <a:prstGeom prst="roundRect">
+            <a:avLst>
+              <a:gd name="adj" fmla="val 11765"/>
+            </a:avLst>
+          </a:prstGeom>
+          <a:solidFill>
+            <a:srgbClr val="FFFFFF"/>
+          </a:solidFill>
           <a:ln w="19050">
             <a:solidFill>
-              <a:srgbClr val="4A90D9"/>
-            </a:solidFill>
-            <a:prstDash val="solid"/>
-          </a:ln>
-        </p:spPr>
-      </p:sp>
-      <p:sp>
-        <p:nvSpPr>
-          <p:cNvPr id="4" name="Shape 2"/>
-          <p:cNvSpPr/>
-          <p:nvPr/>
-        </p:nvSpPr>
-        <p:spPr>
-          <a:xfrm>
-            <a:off x="6492240" y="173736"/>
-            <a:ext cx="2286000" cy="502920"/>
-          </a:xfrm>
-          <a:prstGeom prst="roundRect">
-            <a:avLst>
-              <a:gd name="adj" fmla="val 21818"/>
-            </a:avLst>
-          </a:prstGeom>
-          <a:solidFill>
-            <a:srgbClr val="4A90D9"/>
-          </a:solidFill>
-          <a:ln/>
-        </p:spPr>
-      </p:sp>
-      <p:sp>
-        <p:nvSpPr>
-          <p:cNvPr id="5" name="Text 3"/>
-          <p:cNvSpPr/>
-          <p:nvPr/>
-        </p:nvSpPr>
-        <p:spPr>
-          <a:xfrm>
-            <a:off x="6492240" y="173736"/>
-            <a:ext cx="2286000" cy="502920"/>
-          </a:xfrm>
-          <a:prstGeom prst="rect">
-            <a:avLst/>
-          </a:prstGeom>
-          <a:noFill/>
-          <a:ln/>
-        </p:spPr>
-        <p:txBody>
-          <a:bodyPr wrap="square" lIns="0" tIns="0" rIns="0" bIns="0" rtlCol="0" anchor="ctr"/>
-          <a:lstStyle/>
-          <a:p>
-            <a:pPr algn="ctr" indent="0" marL="0">
-              <a:buNone/>
-            </a:pPr>
-            <a:r>
-              <a:rPr lang="en-US" sz="1100" b="1" dirty="0">
-                <a:solidFill>
-                  <a:srgbClr val="0E1C42"/>
-                </a:solidFill>
-                <a:latin typeface="Calibri" pitchFamily="34" charset="0"/>
-                <a:ea typeface="Calibri" pitchFamily="34" charset="-122"/>
-                <a:cs typeface="Calibri" pitchFamily="34" charset="-120"/>
-              </a:rPr>
-              <a:t>CHAT PROMPT</a:t>
-            </a:r>
-            <a:endParaRPr lang="en-US" sz="1100" dirty="0"/>
-          </a:p>
-        </p:txBody>
-      </p:sp>
-      <p:sp>
-        <p:nvSpPr>
-          <p:cNvPr id="6" name="Shape 4"/>
-          <p:cNvSpPr/>
-          <p:nvPr/>
-        </p:nvSpPr>
-        <p:spPr>
-          <a:xfrm>
-            <a:off x="457200" y="1005840"/>
-            <a:ext cx="8229600" cy="640080"/>
-          </a:xfrm>
-          <a:prstGeom prst="roundRect">
-            <a:avLst>
-              <a:gd name="adj" fmla="val 14286"/>
-            </a:avLst>
-          </a:prstGeom>
-          <a:solidFill>
-            <a:srgbClr val="F8FAFC"/>
-          </a:solidFill>
-          <a:ln w="12700">
-            <a:solidFill>
-              <a:srgbClr val="C7922C"/>
+              <a:srgbClr val="55C8E8"/>
             </a:solidFill>
             <a:prstDash val="solid"/>
           </a:ln>
@@ -5424,30 +5335,30 @@
       </p:sp>
       <p:sp>
         <p:nvSpPr>
-          <p:cNvPr id="7" name="Text 5"/>
-          <p:cNvSpPr/>
-          <p:nvPr/>
-        </p:nvSpPr>
-        <p:spPr>
-          <a:xfrm>
-            <a:off x="640080" y="1115568"/>
-            <a:ext cx="7863840" cy="411480"/>
-          </a:xfrm>
-          <a:prstGeom prst="rect">
-            <a:avLst/>
-          </a:prstGeom>
-          <a:noFill/>
-          <a:ln/>
-        </p:spPr>
-        <p:txBody>
-          <a:bodyPr wrap="square" lIns="0" tIns="0" rIns="0" bIns="0" rtlCol="0" anchor="ctr"/>
-          <a:lstStyle/>
-          <a:p>
-            <a:pPr indent="0" marL="0">
-              <a:buNone/>
-            </a:pPr>
-            <a:r>
-              <a:rPr lang="en-US" sz="1800" i="1" dirty="0">
+          <p:cNvPr id="6" name="Text 4"/>
+          <p:cNvSpPr/>
+          <p:nvPr/>
+        </p:nvSpPr>
+        <p:spPr>
+          <a:xfrm>
+            <a:off x="594360" y="1152144"/>
+            <a:ext cx="7955280" cy="521208"/>
+          </a:xfrm>
+          <a:prstGeom prst="rect">
+            <a:avLst/>
+          </a:prstGeom>
+          <a:noFill/>
+          <a:ln/>
+        </p:spPr>
+        <p:txBody>
+          <a:bodyPr wrap="square" lIns="0" tIns="0" rIns="0" bIns="0" rtlCol="0" anchor="ctr"/>
+          <a:lstStyle/>
+          <a:p>
+            <a:pPr indent="0" marL="0">
+              <a:buNone/>
+            </a:pPr>
+            <a:r>
+              <a:rPr lang="en-US" sz="1700" dirty="0">
                 <a:solidFill>
                   <a:srgbClr val="1E293B"/>
                 </a:solidFill>
@@ -5457,9 +5368,38 @@
               </a:rPr>
               <a:t>the children reigned over narnia for many years but they never forgot their home and the wardrobe that had brought them there</a:t>
             </a:r>
-            <a:endParaRPr lang="en-US" sz="1800" dirty="0"/>
-          </a:p>
-        </p:txBody>
+            <a:endParaRPr lang="en-US" sz="1700" dirty="0"/>
+          </a:p>
+        </p:txBody>
+      </p:sp>
+      <p:sp>
+        <p:nvSpPr>
+          <p:cNvPr id="7" name="Shape 5"/>
+          <p:cNvSpPr/>
+          <p:nvPr/>
+        </p:nvSpPr>
+        <p:spPr>
+          <a:xfrm>
+            <a:off x="365760" y="2743200"/>
+            <a:ext cx="8412480" cy="1417320"/>
+          </a:xfrm>
+          <a:prstGeom prst="roundRect">
+            <a:avLst>
+              <a:gd name="adj" fmla="val 6452"/>
+            </a:avLst>
+          </a:prstGeom>
+          <a:solidFill>
+            <a:srgbClr val="E8F8EF"/>
+          </a:solidFill>
+          <a:ln/>
+          <a:effectLst>
+            <a:outerShdw sx="100000" sy="100000" kx="0" ky="0" algn="bl" rotWithShape="0" blurRad="101600" dist="38100" dir="2700000">
+              <a:srgbClr val="000000">
+                <a:alpha val="12000"/>
+              </a:srgbClr>
+            </a:outerShdw>
+          </a:effectLst>
+        </p:spPr>
       </p:sp>
       <p:sp>
         <p:nvSpPr>
@@ -5469,24 +5409,108 @@
         </p:nvSpPr>
         <p:spPr>
           <a:xfrm>
-            <a:off x="457200" y="1737360"/>
-            <a:ext cx="8046720" cy="292608"/>
-          </a:xfrm>
-          <a:prstGeom prst="rect">
-            <a:avLst/>
-          </a:prstGeom>
-          <a:noFill/>
-          <a:ln/>
-        </p:spPr>
-        <p:txBody>
-          <a:bodyPr wrap="square" lIns="0" tIns="0" rIns="0" bIns="0" rtlCol="0" anchor="ctr"/>
-          <a:lstStyle/>
-          <a:p>
-            <a:pPr indent="0" marL="0">
-              <a:buNone/>
-            </a:pPr>
-            <a:r>
-              <a:rPr lang="en-US" sz="1100" b="1" spc="200" kern="0" dirty="0">
+            <a:off x="566928" y="2816352"/>
+            <a:ext cx="8229600" cy="237744"/>
+          </a:xfrm>
+          <a:prstGeom prst="rect">
+            <a:avLst/>
+          </a:prstGeom>
+          <a:noFill/>
+          <a:ln/>
+        </p:spPr>
+        <p:txBody>
+          <a:bodyPr wrap="square" lIns="0" tIns="0" rIns="0" bIns="0" rtlCol="0" anchor="ctr"/>
+          <a:lstStyle/>
+          <a:p>
+            <a:pPr indent="0" marL="0">
+              <a:buNone/>
+            </a:pPr>
+            <a:r>
+              <a:rPr lang="en-US" sz="1100" b="1" spc="100" kern="0" dirty="0">
+                <a:solidFill>
+                  <a:srgbClr val="34B76F"/>
+                </a:solidFill>
+                <a:latin typeface="Calibri" pitchFamily="34" charset="0"/>
+                <a:ea typeface="Calibri" pitchFamily="34" charset="-122"/>
+                <a:cs typeface="Calibri" pitchFamily="34" charset="-120"/>
+              </a:rPr>
+              <a:t>✅  CORRECTED</a:t>
+            </a:r>
+            <a:endParaRPr lang="en-US" sz="1100" dirty="0"/>
+          </a:p>
+        </p:txBody>
+      </p:sp>
+      <p:sp>
+        <p:nvSpPr>
+          <p:cNvPr id="9" name="Text 7"/>
+          <p:cNvSpPr/>
+          <p:nvPr/>
+        </p:nvSpPr>
+        <p:spPr>
+          <a:xfrm>
+            <a:off x="566928" y="3072384"/>
+            <a:ext cx="8010144" cy="685800"/>
+          </a:xfrm>
+          <a:prstGeom prst="rect">
+            <a:avLst/>
+          </a:prstGeom>
+          <a:noFill/>
+          <a:ln/>
+        </p:spPr>
+        <p:txBody>
+          <a:bodyPr wrap="square" lIns="0" tIns="0" rIns="0" bIns="0" rtlCol="0" anchor="ctr"/>
+          <a:lstStyle/>
+          <a:p>
+            <a:pPr indent="0" marL="0">
+              <a:buNone/>
+            </a:pPr>
+            <a:r>
+              <a:rPr lang="en-US" sz="1400" i="1" dirty="0">
+                <a:solidFill>
+                  <a:srgbClr val="1E293B"/>
+                </a:solidFill>
+                <a:latin typeface="Calibri" pitchFamily="34" charset="0"/>
+                <a:ea typeface="Calibri" pitchFamily="34" charset="-122"/>
+                <a:cs typeface="Calibri" pitchFamily="34" charset="-120"/>
+              </a:rPr>
+              <a:t>Corrected: The children reigned over Narnia for many years, but they never forgot their home and the wardrobe that had brought them there.</a:t>
+            </a:r>
+            <a:endParaRPr lang="en-US" sz="1400" dirty="0"/>
+          </a:p>
+          <a:p>
+            <a:pPr indent="0" marL="0">
+              <a:buNone/>
+            </a:pPr>
+            <a:endParaRPr lang="en-US" sz="1400" dirty="0"/>
+          </a:p>
+        </p:txBody>
+      </p:sp>
+      <p:sp>
+        <p:nvSpPr>
+          <p:cNvPr id="10" name="Text 8"/>
+          <p:cNvSpPr/>
+          <p:nvPr/>
+        </p:nvSpPr>
+        <p:spPr>
+          <a:xfrm>
+            <a:off x="566928" y="3767328"/>
+            <a:ext cx="8010144" cy="320040"/>
+          </a:xfrm>
+          <a:prstGeom prst="rect">
+            <a:avLst/>
+          </a:prstGeom>
+          <a:noFill/>
+          <a:ln/>
+        </p:spPr>
+        <p:txBody>
+          <a:bodyPr wrap="square" lIns="0" tIns="0" rIns="0" bIns="0" rtlCol="0" anchor="ctr"/>
+          <a:lstStyle/>
+          <a:p>
+            <a:pPr indent="0" marL="0">
+              <a:buNone/>
+            </a:pPr>
+            <a:r>
+              <a:rPr lang="en-US" sz="1200" dirty="0">
                 <a:solidFill>
                   <a:srgbClr val="64748B"/>
                 </a:solidFill>
@@ -5494,48 +5518,9 @@
                 <a:ea typeface="Calibri" pitchFamily="34" charset="-122"/>
                 <a:cs typeface="Calibri" pitchFamily="34" charset="-120"/>
               </a:rPr>
-              <a:t>WHY</a:t>
-            </a:r>
-            <a:endParaRPr lang="en-US" sz="1100" dirty="0"/>
-          </a:p>
-        </p:txBody>
-      </p:sp>
-      <p:sp>
-        <p:nvSpPr>
-          <p:cNvPr id="9" name="Text 7"/>
-          <p:cNvSpPr/>
-          <p:nvPr/>
-        </p:nvSpPr>
-        <p:spPr>
-          <a:xfrm>
-            <a:off x="640080" y="2011680"/>
-            <a:ext cx="7863840" cy="502920"/>
-          </a:xfrm>
-          <a:prstGeom prst="rect">
-            <a:avLst/>
-          </a:prstGeom>
-          <a:noFill/>
-          <a:ln/>
-        </p:spPr>
-        <p:txBody>
-          <a:bodyPr wrap="square" lIns="0" tIns="0" rIns="0" bIns="0" rtlCol="0" anchor="ctr"/>
-          <a:lstStyle/>
-          <a:p>
-            <a:pPr indent="0" marL="0">
-              <a:buNone/>
-            </a:pPr>
-            <a:r>
-              <a:rPr lang="en-US" sz="1300" i="1" dirty="0">
-                <a:solidFill>
-                  <a:srgbClr val="64748B"/>
-                </a:solidFill>
-                <a:latin typeface="Calibri" pitchFamily="34" charset="0"/>
-                <a:ea typeface="Calibri" pitchFamily="34" charset="-122"/>
-                <a:cs typeface="Calibri" pitchFamily="34" charset="-120"/>
-              </a:rPr>
               <a:t>Capitalize The at the start; Narnia = proper noun (capital N); comma before but joining two independent clauses; period ends.</a:t>
             </a:r>
-            <a:endParaRPr lang="en-US" sz="1300" dirty="0"/>
+            <a:endParaRPr lang="en-US" sz="1200" dirty="0"/>
           </a:p>
         </p:txBody>
       </p:sp>

--- a/Planning docs/Slides/lesson-30-3-teacher-slides.pptx
+++ b/Planning docs/Slides/lesson-30-3-teacher-slides.pptx
@@ -514,7 +514,7 @@
           <a:p>
             <a:r>
               <a:rPr lang="en-US" dirty="0"/>
-              <a:t>Lesson 30.3. Reading: Reading: Ch. 16–17 + Synthesis.</a:t>
+              <a:t>Lesson 30.3. Reading: .</a:t>
             </a:r>
             <a:endParaRPr lang="en-US" dirty="0"/>
           </a:p>
@@ -2054,7 +2054,7 @@
                 <a:ea typeface="Calibri" pitchFamily="34" charset="-122"/>
                 <a:cs typeface="Calibri" pitchFamily="34" charset="-120"/>
               </a:rPr>
-              <a:t>Lesson 30.3  ·  Reading: Ch. 16–17 + Synthesis</a:t>
+              <a:t>Lesson 30.3</a:t>
             </a:r>
             <a:endParaRPr lang="en-US" sz="2000" dirty="0"/>
           </a:p>
@@ -2797,121 +2797,9 @@
                 <a:ea typeface="Calibri" pitchFamily="34" charset="-122"/>
                 <a:cs typeface="Calibri" pitchFamily="34" charset="-120"/>
               </a:rPr>
-              <a:t>Reading: Ch. 16–17 + Synthesis</a:t>
+              <a:t>Today’s chapters</a:t>
             </a:r>
             <a:endParaRPr lang="en-US" sz="2600" dirty="0"/>
-          </a:p>
-        </p:txBody>
-      </p:sp>
-      <p:sp>
-        <p:nvSpPr>
-          <p:cNvPr id="5" name="Text 3"/>
-          <p:cNvSpPr/>
-          <p:nvPr/>
-        </p:nvSpPr>
-        <p:spPr>
-          <a:xfrm>
-            <a:off x="365760" y="1463040"/>
-            <a:ext cx="8229600" cy="237744"/>
-          </a:xfrm>
-          <a:prstGeom prst="rect">
-            <a:avLst/>
-          </a:prstGeom>
-          <a:noFill/>
-          <a:ln/>
-        </p:spPr>
-        <p:txBody>
-          <a:bodyPr wrap="square" lIns="0" tIns="0" rIns="0" bIns="0" rtlCol="0" anchor="ctr"/>
-          <a:lstStyle/>
-          <a:p>
-            <a:pPr indent="0" marL="0">
-              <a:buNone/>
-            </a:pPr>
-            <a:r>
-              <a:rPr lang="en-US" sz="1100" b="1" spc="100" kern="0" dirty="0">
-                <a:solidFill>
-                  <a:srgbClr val="C7922C"/>
-                </a:solidFill>
-                <a:latin typeface="Calibri" pitchFamily="34" charset="0"/>
-                <a:ea typeface="Calibri" pitchFamily="34" charset="-122"/>
-                <a:cs typeface="Calibri" pitchFamily="34" charset="-120"/>
-              </a:rPr>
-              <a:t>PAUSE &amp; THINK</a:t>
-            </a:r>
-            <a:endParaRPr lang="en-US" sz="1100" dirty="0"/>
-          </a:p>
-        </p:txBody>
-      </p:sp>
-      <p:sp>
-        <p:nvSpPr>
-          <p:cNvPr id="6" name="Text 4"/>
-          <p:cNvSpPr/>
-          <p:nvPr/>
-        </p:nvSpPr>
-        <p:spPr>
-          <a:xfrm>
-            <a:off x="365760" y="1719072"/>
-            <a:ext cx="8412480" cy="914400"/>
-          </a:xfrm>
-          <a:prstGeom prst="rect">
-            <a:avLst/>
-          </a:prstGeom>
-          <a:noFill/>
-          <a:ln/>
-        </p:spPr>
-        <p:txBody>
-          <a:bodyPr wrap="square" lIns="0" tIns="0" rIns="0" bIns="0" rtlCol="0" anchor="ctr"/>
-          <a:lstStyle/>
-          <a:p>
-            <a:pPr indent="0" marL="0">
-              <a:buNone/>
-            </a:pPr>
-            <a:r>
-              <a:rPr lang="en-US" sz="1500" dirty="0">
-                <a:solidFill>
-                  <a:srgbClr val="1E293B"/>
-                </a:solidFill>
-                <a:latin typeface="Calibri" pitchFamily="34" charset="0"/>
-                <a:ea typeface="Calibri" pitchFamily="34" charset="-122"/>
-                <a:cs typeface="Calibri" pitchFamily="34" charset="-120"/>
-              </a:rPr>
-              <a:t>•  Explain how the ending reveals theme.</a:t>
-            </a:r>
-            <a:endParaRPr lang="en-US" sz="1500" dirty="0"/>
-          </a:p>
-          <a:p>
-            <a:pPr indent="0" marL="0">
-              <a:buNone/>
-            </a:pPr>
-            <a:r>
-              <a:rPr lang="en-US" sz="1500" dirty="0">
-                <a:solidFill>
-                  <a:srgbClr val="1E293B"/>
-                </a:solidFill>
-                <a:latin typeface="Calibri" pitchFamily="34" charset="0"/>
-                <a:ea typeface="Calibri" pitchFamily="34" charset="-122"/>
-                <a:cs typeface="Calibri" pitchFamily="34" charset="-120"/>
-              </a:rPr>
-              <a:t>•  As you read today, ask yourself: How does understanding the theme help you explain what the novel is really about?</a:t>
-            </a:r>
-            <a:endParaRPr lang="en-US" sz="1500" dirty="0"/>
-          </a:p>
-          <a:p>
-            <a:pPr indent="0" marL="0">
-              <a:buNone/>
-            </a:pPr>
-            <a:r>
-              <a:rPr lang="en-US" sz="1500" dirty="0">
-                <a:solidFill>
-                  <a:srgbClr val="1E293B"/>
-                </a:solidFill>
-                <a:latin typeface="Calibri" pitchFamily="34" charset="0"/>
-                <a:ea typeface="Calibri" pitchFamily="34" charset="-122"/>
-                <a:cs typeface="Calibri" pitchFamily="34" charset="-120"/>
-              </a:rPr>
-              <a:t>•  Write a 3–5 sentence synthesis paragraph. Include: the title, the theme stated as a complete idea, two pieces of evidence from different chapters, and a closing sentence.</a:t>
-            </a:r>
-            <a:endParaRPr lang="en-US" sz="1500" dirty="0"/>
           </a:p>
         </p:txBody>
       </p:sp>
@@ -4228,13 +4116,13 @@
             <a:r>
               <a:rPr lang="en-US" sz="1100" b="1" spc="100" kern="0" dirty="0">
                 <a:solidFill>
-                  <a:srgbClr val="8B6FC0"/>
-                </a:solidFill>
-                <a:latin typeface="Calibri" pitchFamily="34" charset="0"/>
-                <a:ea typeface="Calibri" pitchFamily="34" charset="-122"/>
-                <a:cs typeface="Calibri" pitchFamily="34" charset="-120"/>
-              </a:rPr>
-              <a:t>READING</a:t>
+                  <a:srgbClr val="C7922C"/>
+                </a:solidFill>
+                <a:latin typeface="Calibri" pitchFamily="34" charset="0"/>
+                <a:ea typeface="Calibri" pitchFamily="34" charset="-122"/>
+                <a:cs typeface="Calibri" pitchFamily="34" charset="-120"/>
+              </a:rPr>
+              <a:t>BIG QUESTION</a:t>
             </a:r>
             <a:endParaRPr lang="en-US" sz="1100" dirty="0"/>
           </a:p>
@@ -4242,91 +4130,13 @@
       </p:sp>
       <p:sp>
         <p:nvSpPr>
-          <p:cNvPr id="5" name="Text 3"/>
+          <p:cNvPr id="5" name="Shape 3"/>
           <p:cNvSpPr/>
           <p:nvPr/>
         </p:nvSpPr>
         <p:spPr>
           <a:xfrm>
             <a:off x="365760" y="1014984"/>
-            <a:ext cx="8412480" cy="365760"/>
-          </a:xfrm>
-          <a:prstGeom prst="rect">
-            <a:avLst/>
-          </a:prstGeom>
-          <a:noFill/>
-          <a:ln/>
-        </p:spPr>
-        <p:txBody>
-          <a:bodyPr wrap="square" lIns="0" tIns="0" rIns="0" bIns="0" rtlCol="0" anchor="ctr"/>
-          <a:lstStyle/>
-          <a:p>
-            <a:pPr indent="0" marL="0">
-              <a:buNone/>
-            </a:pPr>
-            <a:r>
-              <a:rPr lang="en-US" sz="2000" b="1" dirty="0">
-                <a:solidFill>
-                  <a:srgbClr val="0E1C42"/>
-                </a:solidFill>
-                <a:latin typeface="Calibri" pitchFamily="34" charset="0"/>
-                <a:ea typeface="Calibri" pitchFamily="34" charset="-122"/>
-                <a:cs typeface="Calibri" pitchFamily="34" charset="-120"/>
-              </a:rPr>
-              <a:t>Reading: Ch. 16–17 + Synthesis</a:t>
-            </a:r>
-            <a:endParaRPr lang="en-US" sz="2000" dirty="0"/>
-          </a:p>
-        </p:txBody>
-      </p:sp>
-      <p:sp>
-        <p:nvSpPr>
-          <p:cNvPr id="6" name="Text 4"/>
-          <p:cNvSpPr/>
-          <p:nvPr/>
-        </p:nvSpPr>
-        <p:spPr>
-          <a:xfrm>
-            <a:off x="365760" y="1508760"/>
-            <a:ext cx="8229600" cy="237744"/>
-          </a:xfrm>
-          <a:prstGeom prst="rect">
-            <a:avLst/>
-          </a:prstGeom>
-          <a:noFill/>
-          <a:ln/>
-        </p:spPr>
-        <p:txBody>
-          <a:bodyPr wrap="square" lIns="0" tIns="0" rIns="0" bIns="0" rtlCol="0" anchor="ctr"/>
-          <a:lstStyle/>
-          <a:p>
-            <a:pPr indent="0" marL="0">
-              <a:buNone/>
-            </a:pPr>
-            <a:r>
-              <a:rPr lang="en-US" sz="1100" b="1" spc="100" kern="0" dirty="0">
-                <a:solidFill>
-                  <a:srgbClr val="C7922C"/>
-                </a:solidFill>
-                <a:latin typeface="Calibri" pitchFamily="34" charset="0"/>
-                <a:ea typeface="Calibri" pitchFamily="34" charset="-122"/>
-                <a:cs typeface="Calibri" pitchFamily="34" charset="-120"/>
-              </a:rPr>
-              <a:t>BIG QUESTION</a:t>
-            </a:r>
-            <a:endParaRPr lang="en-US" sz="1100" dirty="0"/>
-          </a:p>
-        </p:txBody>
-      </p:sp>
-      <p:sp>
-        <p:nvSpPr>
-          <p:cNvPr id="7" name="Shape 5"/>
-          <p:cNvSpPr/>
-          <p:nvPr/>
-        </p:nvSpPr>
-        <p:spPr>
-          <a:xfrm>
-            <a:off x="365760" y="1746504"/>
             <a:ext cx="8412480" cy="731520"/>
           </a:xfrm>
           <a:prstGeom prst="roundRect">
@@ -4354,91 +4164,91 @@
       </p:sp>
       <p:sp>
         <p:nvSpPr>
+          <p:cNvPr id="6" name="Text 4"/>
+          <p:cNvSpPr/>
+          <p:nvPr/>
+        </p:nvSpPr>
+        <p:spPr>
+          <a:xfrm>
+            <a:off x="594360" y="1143000"/>
+            <a:ext cx="7955280" cy="475488"/>
+          </a:xfrm>
+          <a:prstGeom prst="rect">
+            <a:avLst/>
+          </a:prstGeom>
+          <a:noFill/>
+          <a:ln/>
+        </p:spPr>
+        <p:txBody>
+          <a:bodyPr wrap="square" lIns="0" tIns="0" rIns="0" bIns="0" rtlCol="0" anchor="ctr"/>
+          <a:lstStyle/>
+          <a:p>
+            <a:pPr indent="0" marL="0">
+              <a:buNone/>
+            </a:pPr>
+            <a:r>
+              <a:rPr lang="en-US" sz="1700" dirty="0">
+                <a:solidFill>
+                  <a:srgbClr val="1E293B"/>
+                </a:solidFill>
+                <a:latin typeface="Calibri" pitchFamily="34" charset="0"/>
+                <a:ea typeface="Calibri" pitchFamily="34" charset="-122"/>
+                <a:cs typeface="Calibri" pitchFamily="34" charset="-120"/>
+              </a:rPr>
+              <a:t>Explain how the ending reveals theme.</a:t>
+            </a:r>
+            <a:endParaRPr lang="en-US" sz="1700" dirty="0"/>
+          </a:p>
+        </p:txBody>
+      </p:sp>
+      <p:sp>
+        <p:nvSpPr>
+          <p:cNvPr id="7" name="Text 5"/>
+          <p:cNvSpPr/>
+          <p:nvPr/>
+        </p:nvSpPr>
+        <p:spPr>
+          <a:xfrm>
+            <a:off x="365760" y="1874520"/>
+            <a:ext cx="8229600" cy="237744"/>
+          </a:xfrm>
+          <a:prstGeom prst="rect">
+            <a:avLst/>
+          </a:prstGeom>
+          <a:noFill/>
+          <a:ln/>
+        </p:spPr>
+        <p:txBody>
+          <a:bodyPr wrap="square" lIns="0" tIns="0" rIns="0" bIns="0" rtlCol="0" anchor="ctr"/>
+          <a:lstStyle/>
+          <a:p>
+            <a:pPr indent="0" marL="0">
+              <a:buNone/>
+            </a:pPr>
+            <a:r>
+              <a:rPr lang="en-US" sz="1100" b="1" spc="100" kern="0" dirty="0">
+                <a:solidFill>
+                  <a:srgbClr val="55C8E8"/>
+                </a:solidFill>
+                <a:latin typeface="Calibri" pitchFamily="34" charset="0"/>
+                <a:ea typeface="Calibri" pitchFamily="34" charset="-122"/>
+                <a:cs typeface="Calibri" pitchFamily="34" charset="-120"/>
+              </a:rPr>
+              <a:t>READING LENS</a:t>
+            </a:r>
+            <a:endParaRPr lang="en-US" sz="1100" dirty="0"/>
+          </a:p>
+        </p:txBody>
+      </p:sp>
+      <p:sp>
+        <p:nvSpPr>
           <p:cNvPr id="8" name="Text 6"/>
           <p:cNvSpPr/>
           <p:nvPr/>
         </p:nvSpPr>
         <p:spPr>
           <a:xfrm>
-            <a:off x="594360" y="1874520"/>
-            <a:ext cx="7955280" cy="475488"/>
-          </a:xfrm>
-          <a:prstGeom prst="rect">
-            <a:avLst/>
-          </a:prstGeom>
-          <a:noFill/>
-          <a:ln/>
-        </p:spPr>
-        <p:txBody>
-          <a:bodyPr wrap="square" lIns="0" tIns="0" rIns="0" bIns="0" rtlCol="0" anchor="ctr"/>
-          <a:lstStyle/>
-          <a:p>
-            <a:pPr indent="0" marL="0">
-              <a:buNone/>
-            </a:pPr>
-            <a:r>
-              <a:rPr lang="en-US" sz="1700" dirty="0">
-                <a:solidFill>
-                  <a:srgbClr val="1E293B"/>
-                </a:solidFill>
-                <a:latin typeface="Calibri" pitchFamily="34" charset="0"/>
-                <a:ea typeface="Calibri" pitchFamily="34" charset="-122"/>
-                <a:cs typeface="Calibri" pitchFamily="34" charset="-120"/>
-              </a:rPr>
-              <a:t>Explain how the ending reveals theme.</a:t>
-            </a:r>
-            <a:endParaRPr lang="en-US" sz="1700" dirty="0"/>
-          </a:p>
-        </p:txBody>
-      </p:sp>
-      <p:sp>
-        <p:nvSpPr>
-          <p:cNvPr id="9" name="Text 7"/>
-          <p:cNvSpPr/>
-          <p:nvPr/>
-        </p:nvSpPr>
-        <p:spPr>
-          <a:xfrm>
-            <a:off x="365760" y="2606040"/>
-            <a:ext cx="8229600" cy="237744"/>
-          </a:xfrm>
-          <a:prstGeom prst="rect">
-            <a:avLst/>
-          </a:prstGeom>
-          <a:noFill/>
-          <a:ln/>
-        </p:spPr>
-        <p:txBody>
-          <a:bodyPr wrap="square" lIns="0" tIns="0" rIns="0" bIns="0" rtlCol="0" anchor="ctr"/>
-          <a:lstStyle/>
-          <a:p>
-            <a:pPr indent="0" marL="0">
-              <a:buNone/>
-            </a:pPr>
-            <a:r>
-              <a:rPr lang="en-US" sz="1100" b="1" spc="100" kern="0" dirty="0">
-                <a:solidFill>
-                  <a:srgbClr val="55C8E8"/>
-                </a:solidFill>
-                <a:latin typeface="Calibri" pitchFamily="34" charset="0"/>
-                <a:ea typeface="Calibri" pitchFamily="34" charset="-122"/>
-                <a:cs typeface="Calibri" pitchFamily="34" charset="-120"/>
-              </a:rPr>
-              <a:t>READING LENS</a:t>
-            </a:r>
-            <a:endParaRPr lang="en-US" sz="1100" dirty="0"/>
-          </a:p>
-        </p:txBody>
-      </p:sp>
-      <p:sp>
-        <p:nvSpPr>
-          <p:cNvPr id="10" name="Text 8"/>
-          <p:cNvSpPr/>
-          <p:nvPr/>
-        </p:nvSpPr>
-        <p:spPr>
-          <a:xfrm>
-            <a:off x="365760" y="2843784"/>
+            <a:off x="365760" y="2112264"/>
             <a:ext cx="8412480" cy="914400"/>
           </a:xfrm>
           <a:prstGeom prst="rect">
